--- a/presentacion_datathon_madridnext.pptx
+++ b/presentacion_datathon_madridnext.pptx
@@ -3195,7 +3195,7 @@
         </p:nvSpPr>
         <p:spPr>
           <a:xfrm>
-            <a:off x="914400" y="1188720"/>
+            <a:off x="914400" y="1005840"/>
             <a:ext cx="10332720" cy="320040"/>
           </a:xfrm>
           <a:prstGeom prst="rect">
@@ -3231,8 +3231,8 @@
         </p:nvSpPr>
         <p:spPr>
           <a:xfrm>
-            <a:off x="914400" y="1554480"/>
-            <a:ext cx="10332720" cy="1371600"/>
+            <a:off x="914400" y="1371600"/>
+            <a:ext cx="10332720" cy="1463040"/>
           </a:xfrm>
           <a:prstGeom prst="rect">
             <a:avLst/>
@@ -3254,15 +3254,15 @@
               </a:defRPr>
             </a:pPr>
             <a:r>
-              <a:t>MadridNext: Capacidad de Acogida Territorial</a:t>
+              <a:t>MadridNext: Capacidad de acogida territorial</a:t>
             </a:r>
           </a:p>
           <a:p>
             <a:pPr>
               <a:spcBef>
-                <a:spcPts val="500"/>
+                <a:spcPts val="600"/>
               </a:spcBef>
-              <a:defRPr sz="1600">
+              <a:defRPr sz="1500">
                 <a:solidFill>
                   <a:srgbClr val="CBD5E1"/>
                 </a:solidFill>
@@ -3270,59 +3270,62 @@
               </a:defRPr>
             </a:pPr>
             <a:r>
-              <a:t>Herramienta analítica de diagnóstico dotacional y optimización presupuestaria en municipios &lt; 50.000 hab.</a:t>
-            </a:r>
-          </a:p>
-        </p:txBody>
-      </p:sp>
-      <p:sp>
-        <p:nvSpPr>
-          <p:cNvPr id="6" name="TextBox 5"/>
-          <p:cNvSpPr txBox="1"/>
-          <p:nvPr/>
-        </p:nvSpPr>
-        <p:spPr>
-          <a:xfrm>
-            <a:off x="914400" y="2926080"/>
-            <a:ext cx="10332720" cy="594360"/>
-          </a:xfrm>
-          <a:prstGeom prst="rect">
-            <a:avLst/>
-          </a:prstGeom>
-          <a:noFill/>
-        </p:spPr>
-        <p:txBody>
-          <a:bodyPr wrap="square" lIns="0" tIns="0" rIns="0" bIns="0">
-            <a:spAutoFit/>
-          </a:bodyPr>
-          <a:lstStyle/>
-          <a:p>
-            <a:pPr>
+              <a:t>Herramienta de diagnóstico dotacional y optimización presupuestaria para municipios de menos de 50.000 habitantes</a:t>
+            </a:r>
+          </a:p>
+        </p:txBody>
+      </p:sp>
+      <p:sp>
+        <p:nvSpPr>
+          <p:cNvPr id="6" name="Rounded Rectangle 5"/>
+          <p:cNvSpPr/>
+          <p:nvPr/>
+        </p:nvSpPr>
+        <p:spPr>
+          <a:xfrm>
+            <a:off x="914400" y="2971800"/>
+            <a:ext cx="3840480" cy="411480"/>
+          </a:xfrm>
+          <a:prstGeom prst="roundRect">
+            <a:avLst/>
+          </a:prstGeom>
+          <a:solidFill>
+            <a:srgbClr val="334155"/>
+          </a:solidFill>
+          <a:ln w="12700">
+            <a:solidFill>
+              <a:srgbClr val="475569"/>
+            </a:solidFill>
+          </a:ln>
+        </p:spPr>
+        <p:style>
+          <a:lnRef idx="1">
+            <a:schemeClr val="accent1"/>
+          </a:lnRef>
+          <a:fillRef idx="3">
+            <a:schemeClr val="accent1"/>
+          </a:fillRef>
+          <a:effectRef idx="2">
+            <a:schemeClr val="accent1"/>
+          </a:effectRef>
+          <a:fontRef idx="minor">
+            <a:schemeClr val="lt1"/>
+          </a:fontRef>
+        </p:style>
+        <p:txBody>
+          <a:bodyPr rtlCol="0" anchor="ctr"/>
+          <a:lstStyle/>
+          <a:p>
+            <a:pPr algn="ctr">
               <a:defRPr sz="1000" b="1">
                 <a:solidFill>
-                  <a:srgbClr val="C8102E"/>
-                </a:solidFill>
-                <a:latin typeface="Segoe UI"/>
-              </a:defRPr>
-            </a:pPr>
-            <a:r>
-              <a:t>EQUIPO DE DESARROLLO:</a:t>
-            </a:r>
-          </a:p>
-          <a:p>
-            <a:pPr>
-              <a:spcBef>
-                <a:spcPts val="200"/>
-              </a:spcBef>
-              <a:defRPr sz="1400" b="1">
-                <a:solidFill>
-                  <a:srgbClr val="FFFFFF"/>
-                </a:solidFill>
-                <a:latin typeface="Segoe UI"/>
-              </a:defRPr>
-            </a:pPr>
-            <a:r>
-              <a:t>Adrián Hernando Muñoz   •   Juan Torrero de Pablo   •   Alejandro Cuntin Bariteau</a:t>
+                  <a:srgbClr val="F1F5F9"/>
+                </a:solidFill>
+                <a:latin typeface="Segoe UI"/>
+              </a:defRPr>
+            </a:pPr>
+            <a:r>
+              <a:t>ÁMBITO: 155 MUNICIPIOS (20 EN EL PANEL PILOTO)</a:t>
             </a:r>
           </a:p>
         </p:txBody>
@@ -3335,8 +3338,8 @@
         </p:nvSpPr>
         <p:spPr>
           <a:xfrm>
-            <a:off x="914400" y="3703320"/>
-            <a:ext cx="10362895" cy="1325880"/>
+            <a:off x="914400" y="3566160"/>
+            <a:ext cx="10362895" cy="1463040"/>
           </a:xfrm>
           <a:prstGeom prst="roundRect">
             <a:avLst/>
@@ -3369,44 +3372,71 @@
           <a:lstStyle/>
           <a:p>
             <a:pPr algn="ctr">
-              <a:defRPr sz="1050" b="1">
-                <a:solidFill>
-                  <a:srgbClr val="94A3B8"/>
-                </a:solidFill>
-                <a:latin typeface="Segoe UI"/>
-              </a:defRPr>
-            </a:pPr>
-            <a:r>
-              <a:t>DECLARACIÓN DE PROPÓSITO DEL PROYECTO</a:t>
-            </a:r>
-          </a:p>
-          <a:p>
-            <a:pPr>
-              <a:spcBef>
-                <a:spcPts val="400"/>
-              </a:spcBef>
-              <a:defRPr sz="1350">
-                <a:solidFill>
-                  <a:srgbClr val="FFFFFF"/>
-                </a:solidFill>
-                <a:latin typeface="Segoe UI"/>
-              </a:defRPr>
-            </a:pPr>
-            <a:r>
-              <a:t>«El crecimiento demográfico regional no debe planificarse por intuición ni por mero atractivo inmobiliario. MadridNext proporciona a la Administración y a la ciudadanía una base objetiva para identificar techos dotacionales, prever cuellos de botella y priorizar inversiones públicas.»</a:t>
-            </a:r>
-          </a:p>
-        </p:txBody>
-      </p:sp>
-      <p:sp>
-        <p:nvSpPr>
-          <p:cNvPr id="8" name="TextBox 7"/>
+              <a:defRPr sz="1350" i="1">
+                <a:solidFill>
+                  <a:srgbClr val="E2E8F0"/>
+                </a:solidFill>
+                <a:latin typeface="Segoe UI"/>
+              </a:defRPr>
+            </a:pPr>
+            <a:r>
+              <a:t>«El crecimiento demográfico regional no debe planificarse por intuición ni por mero atractivo inmobiliario. MadridNext ofrece a la Administración y a la ciudadanía una base objetiva para identificar techos dotacionales, prever cuellos de botella y priorizar inversiones públicas.»</a:t>
+            </a:r>
+          </a:p>
+        </p:txBody>
+      </p:sp>
+      <p:sp>
+        <p:nvSpPr>
+          <p:cNvPr id="8" name="Rectangle 7"/>
+          <p:cNvSpPr/>
+          <p:nvPr/>
+        </p:nvSpPr>
+        <p:spPr>
+          <a:xfrm>
+            <a:off x="914400" y="3639312"/>
+            <a:ext cx="73152" cy="1316736"/>
+          </a:xfrm>
+          <a:prstGeom prst="rect">
+            <a:avLst/>
+          </a:prstGeom>
+          <a:solidFill>
+            <a:srgbClr val="C8102E"/>
+          </a:solidFill>
+          <a:ln>
+            <a:noFill/>
+          </a:ln>
+        </p:spPr>
+        <p:style>
+          <a:lnRef idx="1">
+            <a:schemeClr val="accent1"/>
+          </a:lnRef>
+          <a:fillRef idx="3">
+            <a:schemeClr val="accent1"/>
+          </a:fillRef>
+          <a:effectRef idx="2">
+            <a:schemeClr val="accent1"/>
+          </a:effectRef>
+          <a:fontRef idx="minor">
+            <a:schemeClr val="lt1"/>
+          </a:fontRef>
+        </p:style>
+        <p:txBody>
+          <a:bodyPr rtlCol="0" anchor="ctr"/>
+          <a:lstStyle/>
+          <a:p>
+            <a:pPr algn="ctr"/>
+          </a:p>
+        </p:txBody>
+      </p:sp>
+      <p:sp>
+        <p:nvSpPr>
+          <p:cNvPr id="9" name="TextBox 8"/>
           <p:cNvSpPr txBox="1"/>
           <p:nvPr/>
         </p:nvSpPr>
         <p:spPr>
           <a:xfrm>
-            <a:off x="914400" y="5349240"/>
+            <a:off x="914400" y="5257800"/>
             <a:ext cx="10332720" cy="822960"/>
           </a:xfrm>
           <a:prstGeom prst="rect">
@@ -3421,7 +3451,7 @@
           <a:lstStyle/>
           <a:p>
             <a:pPr>
-              <a:defRPr sz="1150" b="1">
+              <a:defRPr sz="1000" b="1">
                 <a:solidFill>
                   <a:srgbClr val="94A3B8"/>
                 </a:solidFill>
@@ -3429,7 +3459,7 @@
               </a:defRPr>
             </a:pPr>
             <a:r>
-              <a:t>Sesión Oficial de Presentación de Proyectos | Campus de Leganés, UC3M</a:t>
+              <a:t>EQUIPO DE DESARROLLO:</a:t>
             </a:r>
           </a:p>
           <a:p>
@@ -3437,15 +3467,31 @@
               <a:spcBef>
                 <a:spcPts val="300"/>
               </a:spcBef>
-              <a:defRPr sz="1050">
-                <a:solidFill>
-                  <a:srgbClr val="64748B"/>
-                </a:solidFill>
-                <a:latin typeface="Segoe UI"/>
-              </a:defRPr>
-            </a:pPr>
-            <a:r>
-              <a:t>Plataforma tecnológica: Ingesta de datos abiertos, inferencia relacional Oracle Database 23ai (ONNX) y portal interactivo</a:t>
+              <a:defRPr sz="1500" b="1">
+                <a:solidFill>
+                  <a:srgbClr val="FFFFFF"/>
+                </a:solidFill>
+                <a:latin typeface="Segoe UI"/>
+              </a:defRPr>
+            </a:pPr>
+            <a:r>
+              <a:t>Adrián Hernando Muñoz   •   Juan Torrero de Pablo   •   Alejandro Cuntin Bariteau</a:t>
+            </a:r>
+          </a:p>
+          <a:p>
+            <a:pPr>
+              <a:spcBef>
+                <a:spcPts val="300"/>
+              </a:spcBef>
+              <a:defRPr sz="1100">
+                <a:solidFill>
+                  <a:srgbClr val="CBD5E1"/>
+                </a:solidFill>
+                <a:latin typeface="Segoe UI"/>
+              </a:defRPr>
+            </a:pPr>
+            <a:r>
+              <a:t>Cátedra I+D+i LoDCOREMadrid  ·  Salón de Grados, Campus de Leganés (UC3M)</a:t>
             </a:r>
           </a:p>
         </p:txBody>
@@ -3542,7 +3588,7 @@
               </a:defRPr>
             </a:pPr>
             <a:r>
-              <a:t>9. ROBUSTEZ METODOLÓGICA</a:t>
+              <a:t>9  ·  ROBUSTEZ METODOLÓGICA</a:t>
             </a:r>
           </a:p>
         </p:txBody>
@@ -3578,7 +3624,7 @@
               </a:defRPr>
             </a:pPr>
             <a:r>
-              <a:t>Auditoría Antifraude: El Modelo Aprende, No Memoriza</a:t>
+              <a:t>El modelo aprende, no memoriza</a:t>
             </a:r>
           </a:p>
           <a:p>
@@ -3594,7 +3640,7 @@
               </a:defRPr>
             </a:pPr>
             <a:r>
-              <a:t>Garantía contra fuga de datos (Data Leakage) y validación espacial sin atajos</a:t>
+              <a:t>Garantías contra la fuga de datos y validación espacial sin atajos</a:t>
             </a:r>
           </a:p>
         </p:txBody>
@@ -3607,8 +3653,8 @@
         </p:nvSpPr>
         <p:spPr>
           <a:xfrm>
-            <a:off x="731520" y="1645920"/>
-            <a:ext cx="5212080" cy="4572000"/>
+            <a:off x="731520" y="1463040"/>
+            <a:ext cx="5120640" cy="4754880"/>
           </a:xfrm>
           <a:prstGeom prst="roundRect">
             <a:avLst/>
@@ -3637,10 +3683,80 @@
           </a:fontRef>
         </p:style>
         <p:txBody>
-          <a:bodyPr rtlCol="0" anchor="ctr"/>
-          <a:lstStyle/>
-          <a:p>
-            <a:pPr algn="ctr"/>
+          <a:bodyPr rtlCol="0" anchor="ctr" wrap="square"/>
+          <a:lstStyle/>
+          <a:p>
+            <a:pPr algn="ctr">
+              <a:defRPr sz="1200" b="1">
+                <a:solidFill>
+                  <a:srgbClr val="C8102E"/>
+                </a:solidFill>
+                <a:latin typeface="Segoe UI"/>
+              </a:defRPr>
+            </a:pPr>
+            <a:r>
+              <a:t>TRES FORMAS DE HACER TRAMPA (PREVENIDAS)</a:t>
+            </a:r>
+          </a:p>
+          <a:p>
+            <a:pPr>
+              <a:spcBef>
+                <a:spcPts val="800"/>
+              </a:spcBef>
+              <a:defRPr sz="1050">
+                <a:solidFill>
+                  <a:srgbClr val="334155"/>
+                </a:solidFill>
+                <a:latin typeface="Segoe UI"/>
+              </a:defRPr>
+            </a:pPr>
+            <a:r>
+              <a:t>1. Mirar al futuro (Fuga Temporal):</a:t>
+            </a:r>
+            <a:br/>
+            <a:r>
+              <a:t>Usar la población proyectada a 2031 para predecir 2025 infla las métricas pero deja el modelo inservible en producción.</a:t>
+            </a:r>
+          </a:p>
+          <a:p>
+            <a:pPr>
+              <a:spcBef>
+                <a:spcPts val="1000"/>
+              </a:spcBef>
+              <a:defRPr sz="1050">
+                <a:solidFill>
+                  <a:srgbClr val="334155"/>
+                </a:solidFill>
+                <a:latin typeface="Segoe UI"/>
+              </a:defRPr>
+            </a:pPr>
+            <a:r>
+              <a:t>2. Mezclar vecinos (Fuga Espacial):</a:t>
+            </a:r>
+            <a:br/>
+            <a:r>
+              <a:t>Repartir al azar municipios contiguos entre entrenamiento y prueba filtra información por correlación espacial.</a:t>
+            </a:r>
+          </a:p>
+          <a:p>
+            <a:pPr>
+              <a:spcBef>
+                <a:spcPts val="1000"/>
+              </a:spcBef>
+              <a:defRPr sz="1050">
+                <a:solidFill>
+                  <a:srgbClr val="334155"/>
+                </a:solidFill>
+                <a:latin typeface="Segoe UI"/>
+              </a:defRPr>
+            </a:pPr>
+            <a:r>
+              <a:t>3. Memorizar (Sobreajuste):</a:t>
+            </a:r>
+            <a:br/>
+            <a:r>
+              <a:t>Con N = 20, un modelo demasiado complejo memoriza filas en lugar de aprender patrones generales.</a:t>
+            </a:r>
           </a:p>
         </p:txBody>
       </p:sp>
@@ -3652,14 +3768,14 @@
         </p:nvSpPr>
         <p:spPr>
           <a:xfrm>
-            <a:off x="731520" y="1719072"/>
-            <a:ext cx="73152" cy="4425696"/>
+            <a:off x="731520" y="1536192"/>
+            <a:ext cx="73152" cy="4608576"/>
           </a:xfrm>
           <a:prstGeom prst="rect">
             <a:avLst/>
           </a:prstGeom>
           <a:solidFill>
-            <a:srgbClr val="B45309"/>
+            <a:srgbClr val="C8102E"/>
           </a:solidFill>
           <a:ln>
             <a:noFill/>
@@ -3689,110 +3805,14 @@
       </p:sp>
       <p:sp>
         <p:nvSpPr>
-          <p:cNvPr id="7" name="TextBox 6"/>
-          <p:cNvSpPr txBox="1"/>
-          <p:nvPr/>
-        </p:nvSpPr>
-        <p:spPr>
-          <a:xfrm>
-            <a:off x="914400" y="1828800"/>
-            <a:ext cx="4846320" cy="4114800"/>
-          </a:xfrm>
-          <a:prstGeom prst="rect">
-            <a:avLst/>
-          </a:prstGeom>
-          <a:noFill/>
-        </p:spPr>
-        <p:txBody>
-          <a:bodyPr wrap="square">
-            <a:spAutoFit/>
-          </a:bodyPr>
-          <a:lstStyle/>
-          <a:p>
-            <a:pPr>
-              <a:defRPr sz="1100" b="1">
-                <a:solidFill>
-                  <a:srgbClr val="B45309"/>
-                </a:solidFill>
-                <a:latin typeface="Segoe UI"/>
-              </a:defRPr>
-            </a:pPr>
-            <a:r>
-              <a:t>FORMAS DE HACER TRAMPAS EN MODELOS PREDICTIVOS</a:t>
-            </a:r>
-          </a:p>
-          <a:p>
-            <a:pPr>
-              <a:spcBef>
-                <a:spcPts val="600"/>
-              </a:spcBef>
-              <a:defRPr sz="1100">
-                <a:solidFill>
-                  <a:srgbClr val="334155"/>
-                </a:solidFill>
-                <a:latin typeface="Segoe UI"/>
-              </a:defRPr>
-            </a:pPr>
-            <a:r>
-              <a:t>• Mirar Datos del Futuro:</a:t>
-            </a:r>
-            <a:br/>
-            <a:r>
-              <a:t>  Utilizar variables como la población proyectada a 2031 para predecir el estado de 2025. Esto infla artificialmente el rendimiento pero inutiliza el modelo en producción.</a:t>
-            </a:r>
-          </a:p>
-          <a:p>
-            <a:pPr>
-              <a:spcBef>
-                <a:spcPts val="600"/>
-              </a:spcBef>
-              <a:defRPr sz="1100">
-                <a:solidFill>
-                  <a:srgbClr val="334155"/>
-                </a:solidFill>
-                <a:latin typeface="Segoe UI"/>
-              </a:defRPr>
-            </a:pPr>
-            <a:r>
-              <a:t>• Mezclar Territorios Vecinos:</a:t>
-            </a:r>
-            <a:br/>
-            <a:r>
-              <a:t>  Particionar aleatoriamente municipios contiguos entre entrenamiento y prueba. La proximidad geográfica filtra información y genera falsa precisión.</a:t>
-            </a:r>
-          </a:p>
-          <a:p>
-            <a:pPr>
-              <a:spcBef>
-                <a:spcPts val="600"/>
-              </a:spcBef>
-              <a:defRPr sz="1100">
-                <a:solidFill>
-                  <a:srgbClr val="334155"/>
-                </a:solidFill>
-                <a:latin typeface="Segoe UI"/>
-              </a:defRPr>
-            </a:pPr>
-            <a:r>
-              <a:t>• Memorización por Sobreajuste:</a:t>
-            </a:r>
-            <a:br/>
-            <a:r>
-              <a:t>  Ajustar modelos excesivamente complejos en muestras pequeñas (N=20), memorizando filas en lugar de aprender patrones generales.</a:t>
-            </a:r>
-          </a:p>
-        </p:txBody>
-      </p:sp>
-      <p:sp>
-        <p:nvSpPr>
-          <p:cNvPr id="8" name="Rounded Rectangle 7"/>
+          <p:cNvPr id="7" name="Rounded Rectangle 6"/>
           <p:cNvSpPr/>
           <p:nvPr/>
         </p:nvSpPr>
         <p:spPr>
           <a:xfrm>
-            <a:off x="6217920" y="1645920"/>
-            <a:ext cx="5212080" cy="4572000"/>
+            <a:off x="6309360" y="1463040"/>
+            <a:ext cx="5120640" cy="4754880"/>
           </a:xfrm>
           <a:prstGeom prst="roundRect">
             <a:avLst/>
@@ -3821,23 +3841,113 @@
           </a:fontRef>
         </p:style>
         <p:txBody>
-          <a:bodyPr rtlCol="0" anchor="ctr"/>
-          <a:lstStyle/>
-          <a:p>
-            <a:pPr algn="ctr"/>
-          </a:p>
-        </p:txBody>
-      </p:sp>
-      <p:sp>
-        <p:nvSpPr>
-          <p:cNvPr id="9" name="Rectangle 8"/>
+          <a:bodyPr rtlCol="0" anchor="ctr" wrap="square"/>
+          <a:lstStyle/>
+          <a:p>
+            <a:pPr algn="ctr">
+              <a:defRPr sz="1200" b="1">
+                <a:solidFill>
+                  <a:srgbClr val="166534"/>
+                </a:solidFill>
+                <a:latin typeface="Segoe UI"/>
+              </a:defRPr>
+            </a:pPr>
+            <a:r>
+              <a:t>CÓMO LO COMPROBAMOS (AUDITORÍA)</a:t>
+            </a:r>
+          </a:p>
+          <a:p>
+            <a:pPr>
+              <a:spcBef>
+                <a:spcPts val="800"/>
+              </a:spcBef>
+              <a:defRPr sz="1050">
+                <a:solidFill>
+                  <a:srgbClr val="334155"/>
+                </a:solidFill>
+                <a:latin typeface="Segoe UI"/>
+              </a:defRPr>
+            </a:pPr>
+            <a:r>
+              <a:t>✔ Comparativa adversarial:</a:t>
+            </a:r>
+            <a:br/>
+            <a:r>
+              <a:t>Versiones con y sin fuga deliberada para confirmar que las métricas finales corresponden a generalización real.</a:t>
+            </a:r>
+          </a:p>
+          <a:p>
+            <a:pPr>
+              <a:spcBef>
+                <a:spcPts val="800"/>
+              </a:spcBef>
+              <a:defRPr sz="1050">
+                <a:solidFill>
+                  <a:srgbClr val="334155"/>
+                </a:solidFill>
+                <a:latin typeface="Segoe UI"/>
+              </a:defRPr>
+            </a:pPr>
+            <a:r>
+              <a:t>✔ Validación espacial GroupKFold:</a:t>
+            </a:r>
+            <a:br/>
+            <a:r>
+              <a:t>Los municipios de una misma comarca van juntos a entrenamiento o a prueba, impidiendo contaminación vecinal.</a:t>
+            </a:r>
+          </a:p>
+          <a:p>
+            <a:pPr>
+              <a:spcBef>
+                <a:spcPts val="800"/>
+              </a:spcBef>
+              <a:defRPr sz="1050">
+                <a:solidFill>
+                  <a:srgbClr val="334155"/>
+                </a:solidFill>
+                <a:latin typeface="Segoe UI"/>
+              </a:defRPr>
+            </a:pPr>
+            <a:r>
+              <a:t>✔ Control point-in-time:</a:t>
+            </a:r>
+            <a:br/>
+            <a:r>
+              <a:t>Ningún dato de entrada es posterior a la fecha de decisión del MVP.</a:t>
+            </a:r>
+          </a:p>
+          <a:p>
+            <a:pPr>
+              <a:spcBef>
+                <a:spcPts val="800"/>
+              </a:spcBef>
+              <a:defRPr sz="1050" b="1">
+                <a:solidFill>
+                  <a:srgbClr val="166534"/>
+                </a:solidFill>
+                <a:latin typeface="Segoe UI"/>
+              </a:defRPr>
+            </a:pPr>
+            <a:r>
+              <a:t>✔ 73 tests continuos en verde:</a:t>
+            </a:r>
+            <a:br/>
+            <a:r>
+              <a:t>Auditan formalmente las 7 fugas posibles (L1 a L7) y sincronización SQL con pytest.</a:t>
+            </a:r>
+          </a:p>
+        </p:txBody>
+      </p:sp>
+      <p:sp>
+        <p:nvSpPr>
+          <p:cNvPr id="8" name="Rectangle 7"/>
           <p:cNvSpPr/>
           <p:nvPr/>
         </p:nvSpPr>
         <p:spPr>
           <a:xfrm>
-            <a:off x="6217920" y="1719072"/>
-            <a:ext cx="73152" cy="4425696"/>
+            <a:off x="6309360" y="1536192"/>
+            <a:ext cx="73152" cy="4608576"/>
           </a:xfrm>
           <a:prstGeom prst="rect">
             <a:avLst/>
@@ -3868,122 +3978,6 @@
           <a:lstStyle/>
           <a:p>
             <a:pPr algn="ctr"/>
-          </a:p>
-        </p:txBody>
-      </p:sp>
-      <p:sp>
-        <p:nvSpPr>
-          <p:cNvPr id="10" name="TextBox 9"/>
-          <p:cNvSpPr txBox="1"/>
-          <p:nvPr/>
-        </p:nvSpPr>
-        <p:spPr>
-          <a:xfrm>
-            <a:off x="6400800" y="1828800"/>
-            <a:ext cx="4846320" cy="4114800"/>
-          </a:xfrm>
-          <a:prstGeom prst="rect">
-            <a:avLst/>
-          </a:prstGeom>
-          <a:noFill/>
-        </p:spPr>
-        <p:txBody>
-          <a:bodyPr wrap="square">
-            <a:spAutoFit/>
-          </a:bodyPr>
-          <a:lstStyle/>
-          <a:p>
-            <a:pPr>
-              <a:defRPr sz="1100" b="1">
-                <a:solidFill>
-                  <a:srgbClr val="166534"/>
-                </a:solidFill>
-                <a:latin typeface="Segoe UI"/>
-              </a:defRPr>
-            </a:pPr>
-            <a:r>
-              <a:t>MÉTODOS DE COMPROBACIÓN APLICADOS EN MADRIDNEXT</a:t>
-            </a:r>
-          </a:p>
-          <a:p>
-            <a:pPr>
-              <a:spcBef>
-                <a:spcPts val="500"/>
-              </a:spcBef>
-              <a:defRPr sz="1050">
-                <a:solidFill>
-                  <a:srgbClr val="334155"/>
-                </a:solidFill>
-                <a:latin typeface="Segoe UI"/>
-              </a:defRPr>
-            </a:pPr>
-            <a:r>
-              <a:t>✔ Comparativa Adversarial (Modelo Honesto vs. Tramposo):</a:t>
-            </a:r>
-            <a:br/>
-            <a:r>
-              <a:t>  Se entrenaron versiones con y sin fuga deliberada para verificar que las métricas finales corresponden a capacidad de generalización real.</a:t>
-            </a:r>
-          </a:p>
-          <a:p>
-            <a:pPr>
-              <a:spcBef>
-                <a:spcPts val="500"/>
-              </a:spcBef>
-              <a:defRPr sz="1050">
-                <a:solidFill>
-                  <a:srgbClr val="334155"/>
-                </a:solidFill>
-                <a:latin typeface="Segoe UI"/>
-              </a:defRPr>
-            </a:pPr>
-            <a:r>
-              <a:t>✔ Validación Espacial GroupKFold:</a:t>
-            </a:r>
-            <a:br/>
-            <a:r>
-              <a:t>  Los municipios de una misma comarca se asignan juntos a train o a test, impidiendo que municipios colindantes contaminen la evaluación.</a:t>
-            </a:r>
-          </a:p>
-          <a:p>
-            <a:pPr>
-              <a:spcBef>
-                <a:spcPts val="500"/>
-              </a:spcBef>
-              <a:defRPr sz="1050">
-                <a:solidFill>
-                  <a:srgbClr val="334155"/>
-                </a:solidFill>
-                <a:latin typeface="Segoe UI"/>
-              </a:defRPr>
-            </a:pPr>
-            <a:r>
-              <a:t>✔ Control Point-in-Time:</a:t>
-            </a:r>
-            <a:br/>
-            <a:r>
-              <a:t>  Verificación estricta de que ningún dato de entrada tenga fecha posterior a la fecha de decisión del MVP.</a:t>
-            </a:r>
-          </a:p>
-          <a:p>
-            <a:pPr>
-              <a:spcBef>
-                <a:spcPts val="500"/>
-              </a:spcBef>
-              <a:defRPr sz="1050">
-                <a:solidFill>
-                  <a:srgbClr val="334155"/>
-                </a:solidFill>
-                <a:latin typeface="Segoe UI"/>
-              </a:defRPr>
-            </a:pPr>
-            <a:r>
-              <a:t>✔ 36 Tests Unitarios y de Integración:</a:t>
-            </a:r>
-            <a:br/>
-            <a:r>
-              <a:t>  Batería continua de pruebas en pytest que audita formalmente las 7 fugas de información potenciales (L1 a L7).</a:t>
-            </a:r>
           </a:p>
         </p:txBody>
       </p:sp>
@@ -4079,7 +4073,7 @@
               </a:defRPr>
             </a:pPr>
             <a:r>
-              <a:t>10. HERRAMIENTAS PARA LA GESTIÓN</a:t>
+              <a:t>10  ·  HERRAMIENTAS PARA LA GESTIÓN</a:t>
             </a:r>
           </a:p>
         </p:txBody>
@@ -4115,7 +4109,7 @@
               </a:defRPr>
             </a:pPr>
             <a:r>
-              <a:t>Operativa Institucional: Simulador What-If y Optimizador M5</a:t>
+              <a:t>Simulador what-if y optimizador presupuestario</a:t>
             </a:r>
           </a:p>
           <a:p>
@@ -4131,7 +4125,7 @@
               </a:defRPr>
             </a:pPr>
             <a:r>
-              <a:t>Instrumentos analíticos para la toma de decisiones y asignación presupuestaria</a:t>
+              <a:t>Instrumentos analíticos para decidir y repartir presupuesto público regional</a:t>
             </a:r>
           </a:p>
         </p:txBody>
@@ -4144,8 +4138,8 @@
         </p:nvSpPr>
         <p:spPr>
           <a:xfrm>
-            <a:off x="731520" y="1645920"/>
-            <a:ext cx="5212080" cy="4572000"/>
+            <a:off x="731520" y="1463040"/>
+            <a:ext cx="5120640" cy="4754880"/>
           </a:xfrm>
           <a:prstGeom prst="roundRect">
             <a:avLst/>
@@ -4174,10 +4168,62 @@
           </a:fontRef>
         </p:style>
         <p:txBody>
-          <a:bodyPr rtlCol="0" anchor="ctr"/>
-          <a:lstStyle/>
-          <a:p>
-            <a:pPr algn="ctr"/>
+          <a:bodyPr rtlCol="0" anchor="ctr" wrap="square"/>
+          <a:lstStyle/>
+          <a:p>
+            <a:pPr algn="ctr">
+              <a:defRPr sz="1200" b="1">
+                <a:solidFill>
+                  <a:srgbClr val="1E40AF"/>
+                </a:solidFill>
+                <a:latin typeface="Segoe UI"/>
+              </a:defRPr>
+            </a:pPr>
+            <a:r>
+              <a:t>PANTALLA 1  ·  SIMULADOR WHAT-IF</a:t>
+            </a:r>
+          </a:p>
+          <a:p>
+            <a:pPr>
+              <a:spcBef>
+                <a:spcPts val="600"/>
+              </a:spcBef>
+              <a:defRPr sz="1250" b="1">
+                <a:solidFill>
+                  <a:srgbClr val="1E293B"/>
+                </a:solidFill>
+                <a:latin typeface="Segoe UI"/>
+              </a:defRPr>
+            </a:pPr>
+            <a:r>
+              <a:t>«¿Si entran 2.000 personas en este pueblo, qué pasa?»</a:t>
+            </a:r>
+          </a:p>
+          <a:p>
+            <a:pPr>
+              <a:spcBef>
+                <a:spcPts val="1000"/>
+              </a:spcBef>
+              <a:defRPr sz="1050">
+                <a:solidFill>
+                  <a:srgbClr val="334155"/>
+                </a:solidFill>
+                <a:latin typeface="Segoe UI"/>
+              </a:defRPr>
+            </a:pPr>
+            <a:r>
+              <a:t>• Recálculo reactivo instantáneo: Actualiza de inmediato todos los indicadores de presión dotacional ante el incremento de población.</a:t>
+            </a:r>
+            <a:br/>
+            <a:br/>
+            <a:r>
+              <a:t>• Diagnóstico del colapso: Indica qué servicio entra antes en crisis (médicos o aulas), cuántas plazas faltan y cuánto cuesta reforzarlo.</a:t>
+            </a:r>
+            <a:br/>
+            <a:br/>
+            <a:r>
+              <a:t>• Evaluación preventiva: Permite a los ayuntamientos evaluar planes urbanísticos antes de conceder licencias residenciales masivas.</a:t>
+            </a:r>
           </a:p>
         </p:txBody>
       </p:sp>
@@ -4189,8 +4235,8 @@
         </p:nvSpPr>
         <p:spPr>
           <a:xfrm>
-            <a:off x="731520" y="1719072"/>
-            <a:ext cx="73152" cy="4425696"/>
+            <a:off x="731520" y="1536192"/>
+            <a:ext cx="73152" cy="4608576"/>
           </a:xfrm>
           <a:prstGeom prst="rect">
             <a:avLst/>
@@ -4226,100 +4272,14 @@
       </p:sp>
       <p:sp>
         <p:nvSpPr>
-          <p:cNvPr id="7" name="TextBox 6"/>
-          <p:cNvSpPr txBox="1"/>
-          <p:nvPr/>
-        </p:nvSpPr>
-        <p:spPr>
-          <a:xfrm>
-            <a:off x="914400" y="1828800"/>
-            <a:ext cx="4846320" cy="4114800"/>
-          </a:xfrm>
-          <a:prstGeom prst="rect">
-            <a:avLst/>
-          </a:prstGeom>
-          <a:noFill/>
-        </p:spPr>
-        <p:txBody>
-          <a:bodyPr wrap="square">
-            <a:spAutoFit/>
-          </a:bodyPr>
-          <a:lstStyle/>
-          <a:p>
-            <a:pPr>
-              <a:defRPr sz="1100" b="1">
-                <a:solidFill>
-                  <a:srgbClr val="1E40AF"/>
-                </a:solidFill>
-                <a:latin typeface="Segoe UI"/>
-              </a:defRPr>
-            </a:pPr>
-            <a:r>
-              <a:t>PANTALLA 1: SIMULADOR DEMOGRÁFICO WHAT-IF</a:t>
-            </a:r>
-          </a:p>
-          <a:p>
-            <a:pPr>
-              <a:spcBef>
-                <a:spcPts val="400"/>
-              </a:spcBef>
-              <a:defRPr sz="1400" b="1">
-                <a:solidFill>
-                  <a:srgbClr val="1E293B"/>
-                </a:solidFill>
-                <a:latin typeface="Segoe UI"/>
-              </a:defRPr>
-            </a:pPr>
-            <a:r>
-              <a:t>«¿Si entran 2.000 personas en este pueblo, qué pasa?»</a:t>
-            </a:r>
-          </a:p>
-          <a:p>
-            <a:pPr>
-              <a:spcBef>
-                <a:spcPts val="600"/>
-              </a:spcBef>
-              <a:defRPr sz="1100">
-                <a:solidFill>
-                  <a:srgbClr val="334155"/>
-                </a:solidFill>
-                <a:latin typeface="Segoe UI"/>
-              </a:defRPr>
-            </a:pPr>
-            <a:r>
-              <a:t>• Recálculo Reactivo Inmediato:</a:t>
-            </a:r>
-            <a:br/>
-            <a:r>
-              <a:t>El usuario introduce un volumen hipotético de nuevos residentes y el sistema recalcula al instante todos los indicadores de presión dotacional.</a:t>
-            </a:r>
-            <a:br/>
-            <a:br/>
-            <a:r>
-              <a:t>• Diagnóstico del Colapso:</a:t>
-            </a:r>
-            <a:br/>
-            <a:r>
-              <a:t>Indica con precisión matemática qué servicio entra primero en crisis (sanidad o educación), cuántas plazas o médicos faltan y cuál es el coste estimado de refuerzo para evitar la saturación.</a:t>
-            </a:r>
-            <a:br/>
-            <a:br/>
-            <a:r>
-              <a:t>• Utilidad: Permite a los ayuntamientos evaluar planes urbanísticos antes de aprobar licencias residenciales.</a:t>
-            </a:r>
-          </a:p>
-        </p:txBody>
-      </p:sp>
-      <p:sp>
-        <p:nvSpPr>
-          <p:cNvPr id="8" name="Rounded Rectangle 7"/>
+          <p:cNvPr id="7" name="Rounded Rectangle 6"/>
           <p:cNvSpPr/>
           <p:nvPr/>
         </p:nvSpPr>
         <p:spPr>
           <a:xfrm>
-            <a:off x="6217920" y="1645920"/>
-            <a:ext cx="5212080" cy="4572000"/>
+            <a:off x="6309360" y="1463040"/>
+            <a:ext cx="5120640" cy="4754880"/>
           </a:xfrm>
           <a:prstGeom prst="roundRect">
             <a:avLst/>
@@ -4348,23 +4308,97 @@
           </a:fontRef>
         </p:style>
         <p:txBody>
-          <a:bodyPr rtlCol="0" anchor="ctr"/>
-          <a:lstStyle/>
-          <a:p>
-            <a:pPr algn="ctr"/>
-          </a:p>
-        </p:txBody>
-      </p:sp>
-      <p:sp>
-        <p:nvSpPr>
-          <p:cNvPr id="9" name="Rectangle 8"/>
+          <a:bodyPr rtlCol="0" anchor="ctr" wrap="square"/>
+          <a:lstStyle/>
+          <a:p>
+            <a:pPr algn="ctr">
+              <a:defRPr sz="1200" b="1">
+                <a:solidFill>
+                  <a:srgbClr val="166534"/>
+                </a:solidFill>
+                <a:latin typeface="Segoe UI"/>
+              </a:defRPr>
+            </a:pPr>
+            <a:r>
+              <a:t>PANTALLA 2  ·  OPTIMIZADOR M5 (SIMPLEX)</a:t>
+            </a:r>
+          </a:p>
+          <a:p>
+            <a:pPr>
+              <a:spcBef>
+                <a:spcPts val="600"/>
+              </a:spcBef>
+              <a:defRPr sz="1250" b="1">
+                <a:solidFill>
+                  <a:srgbClr val="1E293B"/>
+                </a:solidFill>
+                <a:latin typeface="Segoe UI"/>
+              </a:defRPr>
+            </a:pPr>
+            <a:r>
+              <a:t>«Tengo 2.000.000 €, ¿dónde los reparto en esta comarca?»</a:t>
+            </a:r>
+          </a:p>
+          <a:p>
+            <a:pPr>
+              <a:spcBef>
+                <a:spcPts val="600"/>
+              </a:spcBef>
+              <a:defRPr sz="1000">
+                <a:solidFill>
+                  <a:srgbClr val="334155"/>
+                </a:solidFill>
+                <a:latin typeface="Segoe UI"/>
+              </a:defRPr>
+            </a:pPr>
+            <a:r>
+              <a:t>Caso Real Sierra Oeste (Programación Lineal):</a:t>
+            </a:r>
+            <a:br/>
+            <a:r>
+              <a:t>• Villa del Prado: 450.000 € (1 médico) → +830 personas.</a:t>
+            </a:r>
+            <a:br/>
+            <a:r>
+              <a:t>• S. Martín Valdeiglesias: 600.000 € (50 plazas) → +279 hab.</a:t>
+            </a:r>
+            <a:br/>
+            <a:r>
+              <a:t>• Robledo de Chavela: 600.000 € (50 plazas) → +227 hab.</a:t>
+            </a:r>
+            <a:br/>
+            <a:r>
+              <a:t>• Navalcarnero: 0 € asignados de forma justificada (su restricción es la vivienda, no las dotaciones).</a:t>
+            </a:r>
+          </a:p>
+          <a:p>
+            <a:pPr>
+              <a:spcBef>
+                <a:spcPts val="1000"/>
+              </a:spcBef>
+              <a:defRPr sz="1100" b="1">
+                <a:solidFill>
+                  <a:srgbClr val="166534"/>
+                </a:solidFill>
+                <a:latin typeface="Segoe UI"/>
+              </a:defRPr>
+            </a:pPr>
+            <a:r>
+              <a:t>1.650.000 € invertidos  |  +1.336 personas  |  350.000 € ahorrados</a:t>
+            </a:r>
+          </a:p>
+        </p:txBody>
+      </p:sp>
+      <p:sp>
+        <p:nvSpPr>
+          <p:cNvPr id="8" name="Rectangle 7"/>
           <p:cNvSpPr/>
           <p:nvPr/>
         </p:nvSpPr>
         <p:spPr>
           <a:xfrm>
-            <a:off x="6217920" y="1719072"/>
-            <a:ext cx="73152" cy="4425696"/>
+            <a:off x="6309360" y="1536192"/>
+            <a:ext cx="73152" cy="4608576"/>
           </a:xfrm>
           <a:prstGeom prst="rect">
             <a:avLst/>
@@ -4395,99 +4429,6 @@
           <a:lstStyle/>
           <a:p>
             <a:pPr algn="ctr"/>
-          </a:p>
-        </p:txBody>
-      </p:sp>
-      <p:sp>
-        <p:nvSpPr>
-          <p:cNvPr id="10" name="TextBox 9"/>
-          <p:cNvSpPr txBox="1"/>
-          <p:nvPr/>
-        </p:nvSpPr>
-        <p:spPr>
-          <a:xfrm>
-            <a:off x="6400800" y="1828800"/>
-            <a:ext cx="4846320" cy="4114800"/>
-          </a:xfrm>
-          <a:prstGeom prst="rect">
-            <a:avLst/>
-          </a:prstGeom>
-          <a:noFill/>
-        </p:spPr>
-        <p:txBody>
-          <a:bodyPr wrap="square">
-            <a:spAutoFit/>
-          </a:bodyPr>
-          <a:lstStyle/>
-          <a:p>
-            <a:pPr>
-              <a:defRPr sz="1100" b="1">
-                <a:solidFill>
-                  <a:srgbClr val="166534"/>
-                </a:solidFill>
-                <a:latin typeface="Segoe UI"/>
-              </a:defRPr>
-            </a:pPr>
-            <a:r>
-              <a:t>PANTALLA 2: OPTIMIZADOR PRESUPUESTARIO M5</a:t>
-            </a:r>
-          </a:p>
-          <a:p>
-            <a:pPr>
-              <a:spcBef>
-                <a:spcPts val="400"/>
-              </a:spcBef>
-              <a:defRPr sz="1400" b="1">
-                <a:solidFill>
-                  <a:srgbClr val="1E293B"/>
-                </a:solidFill>
-                <a:latin typeface="Segoe UI"/>
-              </a:defRPr>
-            </a:pPr>
-            <a:r>
-              <a:t>«Tengo 2.000.000 €, ¿dónde los reparto en esta comarca?»</a:t>
-            </a:r>
-          </a:p>
-          <a:p>
-            <a:pPr>
-              <a:spcBef>
-                <a:spcPts val="600"/>
-              </a:spcBef>
-              <a:defRPr sz="1050">
-                <a:solidFill>
-                  <a:srgbClr val="334155"/>
-                </a:solidFill>
-                <a:latin typeface="Segoe UI"/>
-              </a:defRPr>
-            </a:pPr>
-            <a:r>
-              <a:t>• Caso Real Sierra Oeste:</a:t>
-            </a:r>
-            <a:br/>
-            <a:r>
-              <a:t>Asignación matemática óptima mediante programación lineal Simplex:</a:t>
-            </a:r>
-            <a:br/>
-            <a:r>
-              <a:t>- Villa del Prado: 450.000 € (1 médico) → +830 habitantes acogibles.</a:t>
-            </a:r>
-            <a:br/>
-            <a:r>
-              <a:t>- San Martín de Valdeiglesias: 600.000 € (50 plazas) → +279 hab.</a:t>
-            </a:r>
-            <a:br/>
-            <a:r>
-              <a:t>- Robledo de Chavela: 600.000 € (50 plazas) → +227 hab.</a:t>
-            </a:r>
-            <a:br/>
-            <a:r>
-              <a:t>- Navalcarnero: 0 € asignados de forma justificada (su restricción es la vivienda; gastar en dotaciones sanitarias sería ineficaz).</a:t>
-            </a:r>
-            <a:br/>
-            <a:br/>
-            <a:r>
-              <a:t>• Balance: 1.650.000 € invertidos con ganancia neta de +1.336 personas y 350.000 € ahorrados.</a:t>
-            </a:r>
           </a:p>
         </p:txBody>
       </p:sp>
@@ -4524,7 +4465,7 @@
             <a:avLst/>
           </a:prstGeom>
           <a:solidFill>
-            <a:srgbClr val="1E293B"/>
+            <a:srgbClr val="F8FAFC"/>
           </a:solidFill>
           <a:ln>
             <a:noFill/>
@@ -4577,13 +4518,13 @@
             <a:pPr>
               <a:defRPr sz="1050" b="1">
                 <a:solidFill>
-                  <a:srgbClr val="94A3B8"/>
-                </a:solidFill>
-                <a:latin typeface="Segoe UI"/>
-              </a:defRPr>
-            </a:pPr>
-            <a:r>
-              <a:t>11. CONCLUSIONES Y TRANSFERENCIA</a:t>
+                  <a:srgbClr val="C8102E"/>
+                </a:solidFill>
+                <a:latin typeface="Segoe UI"/>
+              </a:defRPr>
+            </a:pPr>
+            <a:r>
+              <a:t>11  ·  CONCLUSIONES Y TRANSFERENCIA</a:t>
             </a:r>
           </a:p>
         </p:txBody>
@@ -4613,117 +4554,391 @@
             <a:pPr>
               <a:defRPr sz="2100" b="1">
                 <a:solidFill>
-                  <a:srgbClr val="FFFFFF"/>
-                </a:solidFill>
-                <a:latin typeface="Segoe UI"/>
-              </a:defRPr>
-            </a:pPr>
-            <a:r>
-              <a:t>Del Piloto de 20 Municipios al Despliegue Regional en la CAM</a:t>
-            </a:r>
-          </a:p>
-        </p:txBody>
-      </p:sp>
-      <p:sp>
-        <p:nvSpPr>
-          <p:cNvPr id="5" name="TextBox 4"/>
-          <p:cNvSpPr txBox="1"/>
-          <p:nvPr/>
-        </p:nvSpPr>
-        <p:spPr>
-          <a:xfrm>
-            <a:off x="914400" y="1645920"/>
-            <a:ext cx="10332720" cy="3657600"/>
+                  <a:srgbClr val="1E293B"/>
+                </a:solidFill>
+                <a:latin typeface="Segoe UI"/>
+              </a:defRPr>
+            </a:pPr>
+            <a:r>
+              <a:t>Del piloto de 20 municipios a toda la región</a:t>
+            </a:r>
+          </a:p>
+          <a:p>
+            <a:pPr>
+              <a:spcBef>
+                <a:spcPts val="200"/>
+              </a:spcBef>
+              <a:defRPr sz="1150">
+                <a:solidFill>
+                  <a:srgbClr val="64748B"/>
+                </a:solidFill>
+                <a:latin typeface="Segoe UI"/>
+              </a:defRPr>
+            </a:pPr>
+            <a:r>
+              <a:t>Tres aportaciones estratégicas para la Comunidad de Madrid</a:t>
+            </a:r>
+          </a:p>
+        </p:txBody>
+      </p:sp>
+      <p:sp>
+        <p:nvSpPr>
+          <p:cNvPr id="5" name="Rounded Rectangle 4"/>
+          <p:cNvSpPr/>
+          <p:nvPr/>
+        </p:nvSpPr>
+        <p:spPr>
+          <a:xfrm>
+            <a:off x="731520" y="1463040"/>
+            <a:ext cx="3337560" cy="3108960"/>
+          </a:xfrm>
+          <a:prstGeom prst="roundRect">
+            <a:avLst/>
+          </a:prstGeom>
+          <a:solidFill>
+            <a:srgbClr val="FFFFFF"/>
+          </a:solidFill>
+          <a:ln w="12700">
+            <a:solidFill>
+              <a:srgbClr val="E2E8F0"/>
+            </a:solidFill>
+          </a:ln>
+        </p:spPr>
+        <p:style>
+          <a:lnRef idx="1">
+            <a:schemeClr val="accent1"/>
+          </a:lnRef>
+          <a:fillRef idx="3">
+            <a:schemeClr val="accent1"/>
+          </a:fillRef>
+          <a:effectRef idx="2">
+            <a:schemeClr val="accent1"/>
+          </a:effectRef>
+          <a:fontRef idx="minor">
+            <a:schemeClr val="lt1"/>
+          </a:fontRef>
+        </p:style>
+        <p:txBody>
+          <a:bodyPr rtlCol="0" anchor="ctr" wrap="square"/>
+          <a:lstStyle/>
+          <a:p>
+            <a:pPr algn="ctr">
+              <a:defRPr sz="1200" b="1">
+                <a:solidFill>
+                  <a:srgbClr val="1E40AF"/>
+                </a:solidFill>
+                <a:latin typeface="Segoe UI"/>
+              </a:defRPr>
+            </a:pPr>
+            <a:r>
+              <a:t>1. RESOLUCIÓN EMPÍRICA</a:t>
+            </a:r>
+          </a:p>
+          <a:p>
+            <a:pPr>
+              <a:spcBef>
+                <a:spcPts val="600"/>
+              </a:spcBef>
+              <a:defRPr sz="1050">
+                <a:solidFill>
+                  <a:srgbClr val="334155"/>
+                </a:solidFill>
+                <a:latin typeface="Segoe UI"/>
+              </a:defRPr>
+            </a:pPr>
+            <a:r>
+              <a:t>Sustituimos la especulación por un marco cuantitativo verificado con backtest real (1,55% de error mediano) que integra capacidad dotacional y precios inmobiliarios.</a:t>
+            </a:r>
+          </a:p>
+        </p:txBody>
+      </p:sp>
+      <p:sp>
+        <p:nvSpPr>
+          <p:cNvPr id="6" name="Rectangle 5"/>
+          <p:cNvSpPr/>
+          <p:nvPr/>
+        </p:nvSpPr>
+        <p:spPr>
+          <a:xfrm>
+            <a:off x="731520" y="1536192"/>
+            <a:ext cx="73152" cy="2962656"/>
           </a:xfrm>
           <a:prstGeom prst="rect">
             <a:avLst/>
           </a:prstGeom>
-          <a:noFill/>
-        </p:spPr>
-        <p:txBody>
-          <a:bodyPr wrap="square">
-            <a:spAutoFit/>
-          </a:bodyPr>
-          <a:lstStyle/>
-          <a:p>
-            <a:pPr>
+          <a:solidFill>
+            <a:srgbClr val="1E40AF"/>
+          </a:solidFill>
+          <a:ln>
+            <a:noFill/>
+          </a:ln>
+        </p:spPr>
+        <p:style>
+          <a:lnRef idx="1">
+            <a:schemeClr val="accent1"/>
+          </a:lnRef>
+          <a:fillRef idx="3">
+            <a:schemeClr val="accent1"/>
+          </a:fillRef>
+          <a:effectRef idx="2">
+            <a:schemeClr val="accent1"/>
+          </a:effectRef>
+          <a:fontRef idx="minor">
+            <a:schemeClr val="lt1"/>
+          </a:fontRef>
+        </p:style>
+        <p:txBody>
+          <a:bodyPr rtlCol="0" anchor="ctr"/>
+          <a:lstStyle/>
+          <a:p>
+            <a:pPr algn="ctr"/>
+          </a:p>
+        </p:txBody>
+      </p:sp>
+      <p:sp>
+        <p:nvSpPr>
+          <p:cNvPr id="7" name="Rounded Rectangle 6"/>
+          <p:cNvSpPr/>
+          <p:nvPr/>
+        </p:nvSpPr>
+        <p:spPr>
+          <a:xfrm>
+            <a:off x="4270248" y="1463040"/>
+            <a:ext cx="3337560" cy="3108960"/>
+          </a:xfrm>
+          <a:prstGeom prst="roundRect">
+            <a:avLst/>
+          </a:prstGeom>
+          <a:solidFill>
+            <a:srgbClr val="FFFFFF"/>
+          </a:solidFill>
+          <a:ln w="12700">
+            <a:solidFill>
+              <a:srgbClr val="E2E8F0"/>
+            </a:solidFill>
+          </a:ln>
+        </p:spPr>
+        <p:style>
+          <a:lnRef idx="1">
+            <a:schemeClr val="accent1"/>
+          </a:lnRef>
+          <a:fillRef idx="3">
+            <a:schemeClr val="accent1"/>
+          </a:fillRef>
+          <a:effectRef idx="2">
+            <a:schemeClr val="accent1"/>
+          </a:effectRef>
+          <a:fontRef idx="minor">
+            <a:schemeClr val="lt1"/>
+          </a:fontRef>
+        </p:style>
+        <p:txBody>
+          <a:bodyPr rtlCol="0" anchor="ctr" wrap="square"/>
+          <a:lstStyle/>
+          <a:p>
+            <a:pPr algn="ctr">
               <a:defRPr sz="1200" b="1">
                 <a:solidFill>
-                  <a:srgbClr val="94A3B8"/>
-                </a:solidFill>
-                <a:latin typeface="Segoe UI"/>
-              </a:defRPr>
-            </a:pPr>
-            <a:r>
-              <a:t>SÍNTESIS DE APORTACIONES DEL PROYECTO</a:t>
+                  <a:srgbClr val="166534"/>
+                </a:solidFill>
+                <a:latin typeface="Segoe UI"/>
+              </a:defRPr>
+            </a:pPr>
+            <a:r>
+              <a:t>2. DOBLE UTILIDAD PRÁCTICA</a:t>
             </a:r>
           </a:p>
           <a:p>
             <a:pPr>
               <a:spcBef>
-                <a:spcPts val="800"/>
+                <a:spcPts val="600"/>
               </a:spcBef>
-              <a:defRPr sz="1300">
-                <a:solidFill>
-                  <a:srgbClr val="FFFFFF"/>
-                </a:solidFill>
-                <a:latin typeface="Segoe UI"/>
-              </a:defRPr>
-            </a:pPr>
-            <a:r>
-              <a:t>• 1. Resolución Empírica del Reto: Se sustituye la especulación por un marco cuantitativo verificado mediante backtesting real (1,55% de error demográfico mediano) que integra capacidad dotacional y precios.</a:t>
+              <a:defRPr sz="1050">
+                <a:solidFill>
+                  <a:srgbClr val="334155"/>
+                </a:solidFill>
+                <a:latin typeface="Segoe UI"/>
+              </a:defRPr>
+            </a:pPr>
+            <a:r>
+              <a:t>Sirve tanto a las familias que planifican su traslado como a los gestores públicos de la Comunidad que deben decidir y repartir recursos presupuestarios con rigor.</a:t>
+            </a:r>
+          </a:p>
+        </p:txBody>
+      </p:sp>
+      <p:sp>
+        <p:nvSpPr>
+          <p:cNvPr id="8" name="Rectangle 7"/>
+          <p:cNvSpPr/>
+          <p:nvPr/>
+        </p:nvSpPr>
+        <p:spPr>
+          <a:xfrm>
+            <a:off x="4270248" y="1536192"/>
+            <a:ext cx="73152" cy="2962656"/>
+          </a:xfrm>
+          <a:prstGeom prst="rect">
+            <a:avLst/>
+          </a:prstGeom>
+          <a:solidFill>
+            <a:srgbClr val="166534"/>
+          </a:solidFill>
+          <a:ln>
+            <a:noFill/>
+          </a:ln>
+        </p:spPr>
+        <p:style>
+          <a:lnRef idx="1">
+            <a:schemeClr val="accent1"/>
+          </a:lnRef>
+          <a:fillRef idx="3">
+            <a:schemeClr val="accent1"/>
+          </a:fillRef>
+          <a:effectRef idx="2">
+            <a:schemeClr val="accent1"/>
+          </a:effectRef>
+          <a:fontRef idx="minor">
+            <a:schemeClr val="lt1"/>
+          </a:fontRef>
+        </p:style>
+        <p:txBody>
+          <a:bodyPr rtlCol="0" anchor="ctr"/>
+          <a:lstStyle/>
+          <a:p>
+            <a:pPr algn="ctr"/>
+          </a:p>
+        </p:txBody>
+      </p:sp>
+      <p:sp>
+        <p:nvSpPr>
+          <p:cNvPr id="9" name="Rounded Rectangle 8"/>
+          <p:cNvSpPr/>
+          <p:nvPr/>
+        </p:nvSpPr>
+        <p:spPr>
+          <a:xfrm>
+            <a:off x="7808976" y="1463040"/>
+            <a:ext cx="3337560" cy="3108960"/>
+          </a:xfrm>
+          <a:prstGeom prst="roundRect">
+            <a:avLst/>
+          </a:prstGeom>
+          <a:solidFill>
+            <a:srgbClr val="FFFFFF"/>
+          </a:solidFill>
+          <a:ln w="12700">
+            <a:solidFill>
+              <a:srgbClr val="E2E8F0"/>
+            </a:solidFill>
+          </a:ln>
+        </p:spPr>
+        <p:style>
+          <a:lnRef idx="1">
+            <a:schemeClr val="accent1"/>
+          </a:lnRef>
+          <a:fillRef idx="3">
+            <a:schemeClr val="accent1"/>
+          </a:fillRef>
+          <a:effectRef idx="2">
+            <a:schemeClr val="accent1"/>
+          </a:effectRef>
+          <a:fontRef idx="minor">
+            <a:schemeClr val="lt1"/>
+          </a:fontRef>
+        </p:style>
+        <p:txBody>
+          <a:bodyPr rtlCol="0" anchor="ctr" wrap="square"/>
+          <a:lstStyle/>
+          <a:p>
+            <a:pPr algn="ctr">
+              <a:defRPr sz="1200" b="1">
+                <a:solidFill>
+                  <a:srgbClr val="C8102E"/>
+                </a:solidFill>
+                <a:latin typeface="Segoe UI"/>
+              </a:defRPr>
+            </a:pPr>
+            <a:r>
+              <a:t>3. ESCALABLE EN ORACLE 23ai</a:t>
             </a:r>
           </a:p>
           <a:p>
             <a:pPr>
               <a:spcBef>
-                <a:spcPts val="800"/>
+                <a:spcPts val="600"/>
               </a:spcBef>
-              <a:defRPr sz="1300">
-                <a:solidFill>
-                  <a:srgbClr val="FFFFFF"/>
-                </a:solidFill>
-                <a:latin typeface="Segoe UI"/>
-              </a:defRPr>
-            </a:pPr>
-            <a:r>
-              <a:t>• 2. Doble Utilidad Práctica: Herramienta orientada tanto a las familias que planifican su traslado como a los gestores públicos que deben decidir la asignación de recursos presupuestarios con rigor.</a:t>
-            </a:r>
-          </a:p>
-          <a:p>
-            <a:pPr>
-              <a:spcBef>
-                <a:spcPts val="800"/>
-              </a:spcBef>
-              <a:defRPr sz="1300">
-                <a:solidFill>
-                  <a:srgbClr val="FFFFFF"/>
-                </a:solidFill>
-                <a:latin typeface="Segoe UI"/>
-              </a:defRPr>
-            </a:pPr>
-            <a:r>
-              <a:t>• 3. Escalabilidad Inmediata en Oracle 23ai: La arquitectura técnica está lista para procesar los 155 municipios menores de 50.000 habitantes en cuanto la Comunidad de Madrid incorpore a la plataforma los registros internos de centros y plazas.</a:t>
-            </a:r>
-          </a:p>
-        </p:txBody>
-      </p:sp>
-      <p:sp>
-        <p:nvSpPr>
-          <p:cNvPr id="6" name="Rounded Rectangle 5"/>
+              <a:defRPr sz="1050">
+                <a:solidFill>
+                  <a:srgbClr val="334155"/>
+                </a:solidFill>
+                <a:latin typeface="Segoe UI"/>
+              </a:defRPr>
+            </a:pPr>
+            <a:r>
+              <a:t>Arquitectura lista para escalar a los 155 municipios en cuanto la Comunidad de Madrid incorpore los registros internos detallados de centros y plazas.</a:t>
+            </a:r>
+          </a:p>
+        </p:txBody>
+      </p:sp>
+      <p:sp>
+        <p:nvSpPr>
+          <p:cNvPr id="10" name="Rectangle 9"/>
           <p:cNvSpPr/>
           <p:nvPr/>
         </p:nvSpPr>
         <p:spPr>
           <a:xfrm>
-            <a:off x="914400" y="4572000"/>
-            <a:ext cx="10362895" cy="1554480"/>
+            <a:off x="7808976" y="1536192"/>
+            <a:ext cx="73152" cy="2962656"/>
+          </a:xfrm>
+          <a:prstGeom prst="rect">
+            <a:avLst/>
+          </a:prstGeom>
+          <a:solidFill>
+            <a:srgbClr val="C8102E"/>
+          </a:solidFill>
+          <a:ln>
+            <a:noFill/>
+          </a:ln>
+        </p:spPr>
+        <p:style>
+          <a:lnRef idx="1">
+            <a:schemeClr val="accent1"/>
+          </a:lnRef>
+          <a:fillRef idx="3">
+            <a:schemeClr val="accent1"/>
+          </a:fillRef>
+          <a:effectRef idx="2">
+            <a:schemeClr val="accent1"/>
+          </a:effectRef>
+          <a:fontRef idx="minor">
+            <a:schemeClr val="lt1"/>
+          </a:fontRef>
+        </p:style>
+        <p:txBody>
+          <a:bodyPr rtlCol="0" anchor="ctr"/>
+          <a:lstStyle/>
+          <a:p>
+            <a:pPr algn="ctr"/>
+          </a:p>
+        </p:txBody>
+      </p:sp>
+      <p:sp>
+        <p:nvSpPr>
+          <p:cNvPr id="11" name="Rounded Rectangle 10"/>
+          <p:cNvSpPr/>
+          <p:nvPr/>
+        </p:nvSpPr>
+        <p:spPr>
+          <a:xfrm>
+            <a:off x="731520" y="4800600"/>
+            <a:ext cx="10728655" cy="1417320"/>
           </a:xfrm>
           <a:prstGeom prst="roundRect">
             <a:avLst/>
           </a:prstGeom>
           <a:solidFill>
-            <a:srgbClr val="0F172A"/>
+            <a:srgbClr val="1E293B"/>
           </a:solidFill>
           <a:ln w="12700">
             <a:solidFill>
@@ -4750,9 +4965,9 @@
           <a:lstStyle/>
           <a:p>
             <a:pPr algn="ctr">
-              <a:defRPr sz="1350" b="1">
-                <a:solidFill>
-                  <a:srgbClr val="FFFFFF"/>
+              <a:defRPr sz="1300" i="1">
+                <a:solidFill>
+                  <a:srgbClr val="F1F5F9"/>
                 </a:solidFill>
                 <a:latin typeface="Segoe UI"/>
               </a:defRPr>
@@ -4761,21 +4976,48 @@
               <a:t>«No venimos a decir que nuestro índice predice el futuro: venimos a demostrar cuánto acierta, para qué sirve y cómo optimiza cada euro público invertido en la Comunidad de Madrid.»</a:t>
             </a:r>
           </a:p>
-          <a:p>
-            <a:pPr>
-              <a:spcBef>
-                <a:spcPts val="400"/>
-              </a:spcBef>
-              <a:defRPr sz="1100" b="1">
-                <a:solidFill>
-                  <a:srgbClr val="94A3B8"/>
-                </a:solidFill>
-                <a:latin typeface="Segoe UI"/>
-              </a:defRPr>
-            </a:pPr>
-            <a:r>
-              <a:t>Equipo de desarrollo: Adrián Hernando Muñoz  •  Juan Torrero de Pablo  •  Alejandro Cuntin Bariteau</a:t>
-            </a:r>
+        </p:txBody>
+      </p:sp>
+      <p:sp>
+        <p:nvSpPr>
+          <p:cNvPr id="12" name="Rectangle 11"/>
+          <p:cNvSpPr/>
+          <p:nvPr/>
+        </p:nvSpPr>
+        <p:spPr>
+          <a:xfrm>
+            <a:off x="731520" y="4873752"/>
+            <a:ext cx="73152" cy="1271016"/>
+          </a:xfrm>
+          <a:prstGeom prst="rect">
+            <a:avLst/>
+          </a:prstGeom>
+          <a:solidFill>
+            <a:srgbClr val="C8102E"/>
+          </a:solidFill>
+          <a:ln>
+            <a:noFill/>
+          </a:ln>
+        </p:spPr>
+        <p:style>
+          <a:lnRef idx="1">
+            <a:schemeClr val="accent1"/>
+          </a:lnRef>
+          <a:fillRef idx="3">
+            <a:schemeClr val="accent1"/>
+          </a:fillRef>
+          <a:effectRef idx="2">
+            <a:schemeClr val="accent1"/>
+          </a:effectRef>
+          <a:fontRef idx="minor">
+            <a:schemeClr val="lt1"/>
+          </a:fontRef>
+        </p:style>
+        <p:txBody>
+          <a:bodyPr rtlCol="0" anchor="ctr"/>
+          <a:lstStyle/>
+          <a:p>
+            <a:pPr algn="ctr"/>
           </a:p>
         </p:txBody>
       </p:sp>
@@ -4871,7 +5113,7 @@
               </a:defRPr>
             </a:pPr>
             <a:r>
-              <a:t>ANEXO METODOLÓGICO</a:t>
+              <a:t>12  ·  ANEXO METODOLÓGICO</a:t>
             </a:r>
           </a:p>
         </p:txBody>
@@ -4907,7 +5149,7 @@
               </a:defRPr>
             </a:pPr>
             <a:r>
-              <a:t>Respuestas Técnicas a Preguntas Clave del Jurado</a:t>
+              <a:t>Anexo: preguntas que puede hacer el jurado</a:t>
             </a:r>
           </a:p>
           <a:p>
@@ -4923,7 +5165,7 @@
               </a:defRPr>
             </a:pPr>
             <a:r>
-              <a:t>Comparativa de solvencia: sin modelo vs. con MadridNext</a:t>
+              <a:t>Respuestas técnicas a las preguntas más probables durante la defensa</a:t>
             </a:r>
           </a:p>
         </p:txBody>
@@ -4936,8 +5178,8 @@
         </p:nvSpPr>
         <p:spPr>
           <a:xfrm>
-            <a:off x="731520" y="1645920"/>
-            <a:ext cx="5212080" cy="2103120"/>
+            <a:off x="731520" y="1463040"/>
+            <a:ext cx="10728655" cy="1051560"/>
           </a:xfrm>
           <a:prstGeom prst="roundRect">
             <a:avLst/>
@@ -4966,10 +5208,36 @@
           </a:fontRef>
         </p:style>
         <p:txBody>
-          <a:bodyPr rtlCol="0" anchor="ctr"/>
-          <a:lstStyle/>
-          <a:p>
-            <a:pPr algn="ctr"/>
+          <a:bodyPr rtlCol="0" anchor="ctr" wrap="square"/>
+          <a:lstStyle/>
+          <a:p>
+            <a:pPr algn="ctr">
+              <a:defRPr sz="1200" b="1">
+                <a:solidFill>
+                  <a:srgbClr val="1E293B"/>
+                </a:solidFill>
+                <a:latin typeface="Segoe UI"/>
+              </a:defRPr>
+            </a:pPr>
+            <a:r>
+              <a:t>Pregunta: ¿Cómo sé que el índice sirve?</a:t>
+            </a:r>
+          </a:p>
+          <a:p>
+            <a:pPr>
+              <a:spcBef>
+                <a:spcPts val="300"/>
+              </a:spcBef>
+              <a:defRPr sz="1050">
+                <a:solidFill>
+                  <a:srgbClr val="334155"/>
+                </a:solidFill>
+                <a:latin typeface="Segoe UI"/>
+              </a:defRPr>
+            </a:pPr>
+            <a:r>
+              <a:t>Respuesta: Mide capacidad de carga, no atractivo residencial. Contrastado con el crecimiento real, los pueblos que más crecen son los que ya están saturados, lo que justifica intervenir.</a:t>
+            </a:r>
           </a:p>
         </p:txBody>
       </p:sp>
@@ -4981,8 +5249,8 @@
         </p:nvSpPr>
         <p:spPr>
           <a:xfrm>
-            <a:off x="731520" y="1719072"/>
-            <a:ext cx="73152" cy="1956815"/>
+            <a:off x="731520" y="1536192"/>
+            <a:ext cx="73152" cy="905255"/>
           </a:xfrm>
           <a:prstGeom prst="rect">
             <a:avLst/>
@@ -5018,66 +5286,14 @@
       </p:sp>
       <p:sp>
         <p:nvSpPr>
-          <p:cNvPr id="7" name="TextBox 6"/>
-          <p:cNvSpPr txBox="1"/>
-          <p:nvPr/>
-        </p:nvSpPr>
-        <p:spPr>
-          <a:xfrm>
-            <a:off x="914400" y="1783080"/>
-            <a:ext cx="4846320" cy="1828800"/>
-          </a:xfrm>
-          <a:prstGeom prst="rect">
-            <a:avLst/>
-          </a:prstGeom>
-          <a:noFill/>
-        </p:spPr>
-        <p:txBody>
-          <a:bodyPr wrap="square">
-            <a:spAutoFit/>
-          </a:bodyPr>
-          <a:lstStyle/>
-          <a:p>
-            <a:pPr>
-              <a:defRPr sz="1100" b="1">
-                <a:solidFill>
-                  <a:srgbClr val="1E293B"/>
-                </a:solidFill>
-                <a:latin typeface="Segoe UI"/>
-              </a:defRPr>
-            </a:pPr>
-            <a:r>
-              <a:t>Pregunta: ¿Cómo sé que el índice sirve?</a:t>
-            </a:r>
-          </a:p>
-          <a:p>
-            <a:pPr>
-              <a:spcBef>
-                <a:spcPts val="400"/>
-              </a:spcBef>
-              <a:defRPr sz="1000">
-                <a:solidFill>
-                  <a:srgbClr val="334155"/>
-                </a:solidFill>
-                <a:latin typeface="Segoe UI"/>
-              </a:defRPr>
-            </a:pPr>
-            <a:r>
-              <a:t>Respuesta: Mide capacidad de carga, no mero atractivo residencial. Lo contrastamos con el crecimiento real de los municipios y el backtest demuestra que los pueblos con mayor crecimiento son los que ya están saturados, justificando la intervención.</a:t>
-            </a:r>
-          </a:p>
-        </p:txBody>
-      </p:sp>
-      <p:sp>
-        <p:nvSpPr>
-          <p:cNvPr id="8" name="Rounded Rectangle 7"/>
+          <p:cNvPr id="7" name="Rounded Rectangle 6"/>
           <p:cNvSpPr/>
           <p:nvPr/>
         </p:nvSpPr>
         <p:spPr>
           <a:xfrm>
-            <a:off x="6126480" y="1645920"/>
-            <a:ext cx="5212080" cy="2103120"/>
+            <a:off x="731520" y="2651760"/>
+            <a:ext cx="10728655" cy="1051560"/>
           </a:xfrm>
           <a:prstGeom prst="roundRect">
             <a:avLst/>
@@ -5106,23 +5322,49 @@
           </a:fontRef>
         </p:style>
         <p:txBody>
-          <a:bodyPr rtlCol="0" anchor="ctr"/>
-          <a:lstStyle/>
-          <a:p>
-            <a:pPr algn="ctr"/>
-          </a:p>
-        </p:txBody>
-      </p:sp>
-      <p:sp>
-        <p:nvSpPr>
-          <p:cNvPr id="9" name="Rectangle 8"/>
+          <a:bodyPr rtlCol="0" anchor="ctr" wrap="square"/>
+          <a:lstStyle/>
+          <a:p>
+            <a:pPr algn="ctr">
+              <a:defRPr sz="1200" b="1">
+                <a:solidFill>
+                  <a:srgbClr val="1E293B"/>
+                </a:solidFill>
+                <a:latin typeface="Segoe UI"/>
+              </a:defRPr>
+            </a:pPr>
+            <a:r>
+              <a:t>Pregunta: ¿Son fiables las proyecciones demográficas?</a:t>
+            </a:r>
+          </a:p>
+          <a:p>
+            <a:pPr>
+              <a:spcBef>
+                <a:spcPts val="300"/>
+              </a:spcBef>
+              <a:defRPr sz="1050">
+                <a:solidFill>
+                  <a:srgbClr val="334155"/>
+                </a:solidFill>
+                <a:latin typeface="Segoe UI"/>
+              </a:defRPr>
+            </a:pPr>
+            <a:r>
+              <a:t>Respuesta: Presentan un error mediano contrastado del 1,55% a 5 años en ventanas históricas (INE 2015-2025), frente al 7,02% de suponer que nada cambia.</a:t>
+            </a:r>
+          </a:p>
+        </p:txBody>
+      </p:sp>
+      <p:sp>
+        <p:nvSpPr>
+          <p:cNvPr id="8" name="Rectangle 7"/>
           <p:cNvSpPr/>
           <p:nvPr/>
         </p:nvSpPr>
         <p:spPr>
           <a:xfrm>
-            <a:off x="6126480" y="1719072"/>
-            <a:ext cx="73152" cy="1956815"/>
+            <a:off x="731520" y="2724912"/>
+            <a:ext cx="73152" cy="905255"/>
           </a:xfrm>
           <a:prstGeom prst="rect">
             <a:avLst/>
@@ -5158,66 +5400,14 @@
       </p:sp>
       <p:sp>
         <p:nvSpPr>
-          <p:cNvPr id="10" name="TextBox 9"/>
-          <p:cNvSpPr txBox="1"/>
-          <p:nvPr/>
-        </p:nvSpPr>
-        <p:spPr>
-          <a:xfrm>
-            <a:off x="6309360" y="1783080"/>
-            <a:ext cx="4846320" cy="1828800"/>
-          </a:xfrm>
-          <a:prstGeom prst="rect">
-            <a:avLst/>
-          </a:prstGeom>
-          <a:noFill/>
-        </p:spPr>
-        <p:txBody>
-          <a:bodyPr wrap="square">
-            <a:spAutoFit/>
-          </a:bodyPr>
-          <a:lstStyle/>
-          <a:p>
-            <a:pPr>
-              <a:defRPr sz="1100" b="1">
-                <a:solidFill>
-                  <a:srgbClr val="1E293B"/>
-                </a:solidFill>
-                <a:latin typeface="Segoe UI"/>
-              </a:defRPr>
-            </a:pPr>
-            <a:r>
-              <a:t>Pregunta: ¿Vuestras proyecciones demográficas son fiables?</a:t>
-            </a:r>
-          </a:p>
-          <a:p>
-            <a:pPr>
-              <a:spcBef>
-                <a:spcPts val="400"/>
-              </a:spcBef>
-              <a:defRPr sz="1000">
-                <a:solidFill>
-                  <a:srgbClr val="334155"/>
-                </a:solidFill>
-                <a:latin typeface="Segoe UI"/>
-              </a:defRPr>
-            </a:pPr>
-            <a:r>
-              <a:t>Respuesta: Presentan un error mediano contrastado del 1,55% a 5 años en ventanas históricas (INE 2015-2025), frente al 7,02% de asumir una hipótesis estática.</a:t>
-            </a:r>
-          </a:p>
-        </p:txBody>
-      </p:sp>
-      <p:sp>
-        <p:nvSpPr>
-          <p:cNvPr id="11" name="Rounded Rectangle 10"/>
+          <p:cNvPr id="9" name="Rounded Rectangle 8"/>
           <p:cNvSpPr/>
           <p:nvPr/>
         </p:nvSpPr>
         <p:spPr>
           <a:xfrm>
-            <a:off x="731520" y="3931920"/>
-            <a:ext cx="5212080" cy="2103120"/>
+            <a:off x="731520" y="3840479"/>
+            <a:ext cx="10728655" cy="1051560"/>
           </a:xfrm>
           <a:prstGeom prst="roundRect">
             <a:avLst/>
@@ -5246,23 +5436,49 @@
           </a:fontRef>
         </p:style>
         <p:txBody>
-          <a:bodyPr rtlCol="0" anchor="ctr"/>
-          <a:lstStyle/>
-          <a:p>
-            <a:pPr algn="ctr"/>
-          </a:p>
-        </p:txBody>
-      </p:sp>
-      <p:sp>
-        <p:nvSpPr>
-          <p:cNvPr id="12" name="Rectangle 11"/>
+          <a:bodyPr rtlCol="0" anchor="ctr" wrap="square"/>
+          <a:lstStyle/>
+          <a:p>
+            <a:pPr algn="ctr">
+              <a:defRPr sz="1200" b="1">
+                <a:solidFill>
+                  <a:srgbClr val="1E293B"/>
+                </a:solidFill>
+                <a:latin typeface="Segoe UI"/>
+              </a:defRPr>
+            </a:pPr>
+            <a:r>
+              <a:t>Pregunta: ¿Por qué no usáis deep learning?</a:t>
+            </a:r>
+          </a:p>
+          <a:p>
+            <a:pPr>
+              <a:spcBef>
+                <a:spcPts val="300"/>
+              </a:spcBef>
+              <a:defRPr sz="1050">
+                <a:solidFill>
+                  <a:srgbClr val="334155"/>
+                </a:solidFill>
+                <a:latin typeface="Segoe UI"/>
+              </a:defRPr>
+            </a:pPr>
+            <a:r>
+              <a:t>Respuesta: Con 20 municipios y sin etiquetas arbitrarias, una red neuronal sobreajustaría. Usamos árboles regularizados exportados a ONNX con tolerancia &lt; 1e-6.</a:t>
+            </a:r>
+          </a:p>
+        </p:txBody>
+      </p:sp>
+      <p:sp>
+        <p:nvSpPr>
+          <p:cNvPr id="10" name="Rectangle 9"/>
           <p:cNvSpPr/>
           <p:nvPr/>
         </p:nvSpPr>
         <p:spPr>
           <a:xfrm>
-            <a:off x="731520" y="4005072"/>
-            <a:ext cx="73152" cy="1956815"/>
+            <a:off x="731520" y="3913631"/>
+            <a:ext cx="73152" cy="905255"/>
           </a:xfrm>
           <a:prstGeom prst="rect">
             <a:avLst/>
@@ -5298,66 +5514,14 @@
       </p:sp>
       <p:sp>
         <p:nvSpPr>
-          <p:cNvPr id="13" name="TextBox 12"/>
-          <p:cNvSpPr txBox="1"/>
-          <p:nvPr/>
-        </p:nvSpPr>
-        <p:spPr>
-          <a:xfrm>
-            <a:off x="914400" y="4069080"/>
-            <a:ext cx="4846320" cy="1828800"/>
-          </a:xfrm>
-          <a:prstGeom prst="rect">
-            <a:avLst/>
-          </a:prstGeom>
-          <a:noFill/>
-        </p:spPr>
-        <p:txBody>
-          <a:bodyPr wrap="square">
-            <a:spAutoFit/>
-          </a:bodyPr>
-          <a:lstStyle/>
-          <a:p>
-            <a:pPr>
-              <a:defRPr sz="1100" b="1">
-                <a:solidFill>
-                  <a:srgbClr val="1E293B"/>
-                </a:solidFill>
-                <a:latin typeface="Segoe UI"/>
-              </a:defRPr>
-            </a:pPr>
-            <a:r>
-              <a:t>Pregunta: ¿Por qué no usáis Deep Learning masivo?</a:t>
-            </a:r>
-          </a:p>
-          <a:p>
-            <a:pPr>
-              <a:spcBef>
-                <a:spcPts val="400"/>
-              </a:spcBef>
-              <a:defRPr sz="1000">
-                <a:solidFill>
-                  <a:srgbClr val="334155"/>
-                </a:solidFill>
-                <a:latin typeface="Segoe UI"/>
-              </a:defRPr>
-            </a:pPr>
-            <a:r>
-              <a:t>Respuesta: Con 20 municipios y sin etiquetas arbitrarias, las redes neuronales sobreajustarían. Empleamos modelos basados en árboles regularizados exportados a ONNX con verificación de tolerancia &lt;1e-6.</a:t>
-            </a:r>
-          </a:p>
-        </p:txBody>
-      </p:sp>
-      <p:sp>
-        <p:nvSpPr>
-          <p:cNvPr id="14" name="Rounded Rectangle 13"/>
+          <p:cNvPr id="11" name="Rounded Rectangle 10"/>
           <p:cNvSpPr/>
           <p:nvPr/>
         </p:nvSpPr>
         <p:spPr>
           <a:xfrm>
-            <a:off x="6126480" y="3931920"/>
-            <a:ext cx="5212080" cy="2103120"/>
+            <a:off x="731520" y="5029200"/>
+            <a:ext cx="10728655" cy="1051560"/>
           </a:xfrm>
           <a:prstGeom prst="roundRect">
             <a:avLst/>
@@ -5386,23 +5550,49 @@
           </a:fontRef>
         </p:style>
         <p:txBody>
-          <a:bodyPr rtlCol="0" anchor="ctr"/>
-          <a:lstStyle/>
-          <a:p>
-            <a:pPr algn="ctr"/>
-          </a:p>
-        </p:txBody>
-      </p:sp>
-      <p:sp>
-        <p:nvSpPr>
-          <p:cNvPr id="15" name="Rectangle 14"/>
+          <a:bodyPr rtlCol="0" anchor="ctr" wrap="square"/>
+          <a:lstStyle/>
+          <a:p>
+            <a:pPr algn="ctr">
+              <a:defRPr sz="1200" b="1">
+                <a:solidFill>
+                  <a:srgbClr val="1E293B"/>
+                </a:solidFill>
+                <a:latin typeface="Segoe UI"/>
+              </a:defRPr>
+            </a:pPr>
+            <a:r>
+              <a:t>Pregunta: ¿Qué no habéis validado?</a:t>
+            </a:r>
+          </a:p>
+          <a:p>
+            <a:pPr>
+              <a:spcBef>
+                <a:spcPts val="300"/>
+              </a:spcBef>
+              <a:defRPr sz="1050">
+                <a:solidFill>
+                  <a:srgbClr val="334155"/>
+                </a:solidFill>
+                <a:latin typeface="Segoe UI"/>
+              </a:defRPr>
+            </a:pPr>
+            <a:r>
+              <a:t>Respuesta: Que el índice anticipe por sí solo el crecimiento espontáneo (ρ = 0,10). No lo afirmamos: mide capacidad dotacional objetiva.</a:t>
+            </a:r>
+          </a:p>
+        </p:txBody>
+      </p:sp>
+      <p:sp>
+        <p:nvSpPr>
+          <p:cNvPr id="12" name="Rectangle 11"/>
           <p:cNvSpPr/>
           <p:nvPr/>
         </p:nvSpPr>
         <p:spPr>
           <a:xfrm>
-            <a:off x="6126480" y="4005072"/>
-            <a:ext cx="73152" cy="1956815"/>
+            <a:off x="731520" y="5102352"/>
+            <a:ext cx="73152" cy="905255"/>
           </a:xfrm>
           <a:prstGeom prst="rect">
             <a:avLst/>
@@ -5433,58 +5623,6 @@
           <a:lstStyle/>
           <a:p>
             <a:pPr algn="ctr"/>
-          </a:p>
-        </p:txBody>
-      </p:sp>
-      <p:sp>
-        <p:nvSpPr>
-          <p:cNvPr id="16" name="TextBox 15"/>
-          <p:cNvSpPr txBox="1"/>
-          <p:nvPr/>
-        </p:nvSpPr>
-        <p:spPr>
-          <a:xfrm>
-            <a:off x="6309360" y="4069080"/>
-            <a:ext cx="4846320" cy="1828800"/>
-          </a:xfrm>
-          <a:prstGeom prst="rect">
-            <a:avLst/>
-          </a:prstGeom>
-          <a:noFill/>
-        </p:spPr>
-        <p:txBody>
-          <a:bodyPr wrap="square">
-            <a:spAutoFit/>
-          </a:bodyPr>
-          <a:lstStyle/>
-          <a:p>
-            <a:pPr>
-              <a:defRPr sz="1100" b="1">
-                <a:solidFill>
-                  <a:srgbClr val="1E293B"/>
-                </a:solidFill>
-                <a:latin typeface="Segoe UI"/>
-              </a:defRPr>
-            </a:pPr>
-            <a:r>
-              <a:t>Pregunta: ¿Qué no habéis validado?</a:t>
-            </a:r>
-          </a:p>
-          <a:p>
-            <a:pPr>
-              <a:spcBef>
-                <a:spcPts val="400"/>
-              </a:spcBef>
-              <a:defRPr sz="1000">
-                <a:solidFill>
-                  <a:srgbClr val="334155"/>
-                </a:solidFill>
-                <a:latin typeface="Segoe UI"/>
-              </a:defRPr>
-            </a:pPr>
-            <a:r>
-              <a:t>Respuesta: Que el índice anticipe por sí solo el crecimiento espontáneo. No lo hace (ρ = 0,10) y por eso no lo afirmamos; mide capacidad dotacional objetiva.</a:t>
-            </a:r>
           </a:p>
         </p:txBody>
       </p:sp>
@@ -5521,7 +5659,7 @@
             <a:avLst/>
           </a:prstGeom>
           <a:solidFill>
-            <a:srgbClr val="0F172A"/>
+            <a:srgbClr val="1E293B"/>
           </a:solidFill>
           <a:ln>
             <a:noFill/>
@@ -5609,49 +5747,49 @@
           <a:noFill/>
         </p:spPr>
         <p:txBody>
+          <a:bodyPr wrap="none">
+            <a:spAutoFit/>
+          </a:bodyPr>
+          <a:lstStyle/>
+          <a:p>
+            <a:pPr algn="ctr">
+              <a:defRPr sz="1200" b="1">
+                <a:solidFill>
+                  <a:srgbClr val="94A3B8"/>
+                </a:solidFill>
+                <a:latin typeface="Segoe UI"/>
+              </a:defRPr>
+            </a:pPr>
+            <a:r>
+              <a:t>II DATATHON LODCOREMADRID 2026</a:t>
+            </a:r>
+          </a:p>
+        </p:txBody>
+      </p:sp>
+      <p:sp>
+        <p:nvSpPr>
+          <p:cNvPr id="5" name="TextBox 4"/>
+          <p:cNvSpPr txBox="1"/>
+          <p:nvPr/>
+        </p:nvSpPr>
+        <p:spPr>
+          <a:xfrm>
+            <a:off x="914400" y="1920240"/>
+            <a:ext cx="10332720" cy="1645920"/>
+          </a:xfrm>
+          <a:prstGeom prst="rect">
+            <a:avLst/>
+          </a:prstGeom>
+          <a:noFill/>
+        </p:spPr>
+        <p:txBody>
           <a:bodyPr wrap="square">
             <a:spAutoFit/>
           </a:bodyPr>
           <a:lstStyle/>
           <a:p>
             <a:pPr algn="ctr">
-              <a:defRPr sz="1100" b="1">
-                <a:solidFill>
-                  <a:srgbClr val="94A3B8"/>
-                </a:solidFill>
-                <a:latin typeface="Segoe UI"/>
-              </a:defRPr>
-            </a:pPr>
-            <a:r>
-              <a:t>II DATATHON LODCOREMADRID 2026 | UNIVERSIDAD CARLOS III DE MADRID &amp; COMUNIDAD DE MADRID</a:t>
-            </a:r>
-          </a:p>
-        </p:txBody>
-      </p:sp>
-      <p:sp>
-        <p:nvSpPr>
-          <p:cNvPr id="5" name="TextBox 4"/>
-          <p:cNvSpPr txBox="1"/>
-          <p:nvPr/>
-        </p:nvSpPr>
-        <p:spPr>
-          <a:xfrm>
-            <a:off x="914400" y="2011680"/>
-            <a:ext cx="10332720" cy="1188720"/>
-          </a:xfrm>
-          <a:prstGeom prst="rect">
-            <a:avLst/>
-          </a:prstGeom>
-          <a:noFill/>
-        </p:spPr>
-        <p:txBody>
-          <a:bodyPr wrap="square">
-            <a:spAutoFit/>
-          </a:bodyPr>
-          <a:lstStyle/>
-          <a:p>
-            <a:pPr algn="ctr">
-              <a:defRPr sz="4400" b="1">
+              <a:defRPr sz="4600" b="1">
                 <a:solidFill>
                   <a:srgbClr val="FFFFFF"/>
                 </a:solidFill>
@@ -5659,13 +5797,13 @@
               </a:defRPr>
             </a:pPr>
             <a:r>
-              <a:t>Muchas gracias por su atención</a:t>
+              <a:t>Muchas gracias</a:t>
             </a:r>
           </a:p>
           <a:p>
             <a:pPr algn="ctr">
               <a:spcBef>
-                <a:spcPts val="800"/>
+                <a:spcPts val="600"/>
               </a:spcBef>
               <a:defRPr sz="2800" b="1">
                 <a:solidFill>
@@ -5688,8 +5826,8 @@
         </p:nvSpPr>
         <p:spPr>
           <a:xfrm>
-            <a:off x="2286000" y="3931920"/>
-            <a:ext cx="7619695" cy="1645920"/>
+            <a:off x="1828800" y="3931920"/>
+            <a:ext cx="8534095" cy="1828800"/>
           </a:xfrm>
           <a:prstGeom prst="roundRect">
             <a:avLst/>
@@ -5722,7 +5860,7 @@
           <a:lstStyle/>
           <a:p>
             <a:pPr algn="ctr">
-              <a:defRPr sz="1100" b="1">
+              <a:defRPr sz="1150" b="1">
                 <a:solidFill>
                   <a:srgbClr val="94A3B8"/>
                 </a:solidFill>
@@ -5736,9 +5874,9 @@
           <a:p>
             <a:pPr algn="ctr">
               <a:spcBef>
-                <a:spcPts val="400"/>
+                <a:spcPts val="500"/>
               </a:spcBef>
-              <a:defRPr sz="1400" b="1">
+              <a:defRPr sz="1500" b="1">
                 <a:solidFill>
                   <a:srgbClr val="FFFFFF"/>
                 </a:solidFill>
@@ -5752,9 +5890,9 @@
           <a:p>
             <a:pPr algn="ctr">
               <a:spcBef>
-                <a:spcPts val="400"/>
+                <a:spcPts val="500"/>
               </a:spcBef>
-              <a:defRPr sz="1100">
+              <a:defRPr sz="1150">
                 <a:solidFill>
                   <a:srgbClr val="CBD5E1"/>
                 </a:solidFill>
@@ -5762,7 +5900,7 @@
               </a:defRPr>
             </a:pPr>
             <a:r>
-              <a:t>Cátedra I+D+i LoDCOREMadrid | Salón de Grados, Campus de Leganés (UC3M)</a:t>
+              <a:t>Universidad Carlos III de Madrid  ·  Comunidad de Madrid</a:t>
             </a:r>
           </a:p>
         </p:txBody>
@@ -5859,7 +5997,7 @@
               </a:defRPr>
             </a:pPr>
             <a:r>
-              <a:t>1. CONTEXTO TERRITORIAL</a:t>
+              <a:t>1  ·  CONTEXTO TERRITORIAL</a:t>
             </a:r>
           </a:p>
         </p:txBody>
@@ -5895,7 +6033,7 @@
               </a:defRPr>
             </a:pPr>
             <a:r>
-              <a:t>La Asimetría Demográfica y el Principio de No Compensación</a:t>
+              <a:t>Asimetría demográfica y no compensación</a:t>
             </a:r>
           </a:p>
           <a:p>
@@ -5924,8 +6062,8 @@
         </p:nvSpPr>
         <p:spPr>
           <a:xfrm>
-            <a:off x="731520" y="1645920"/>
-            <a:ext cx="3291840" cy="4572000"/>
+            <a:off x="731520" y="1463040"/>
+            <a:ext cx="3337560" cy="4754880"/>
           </a:xfrm>
           <a:prstGeom prst="roundRect">
             <a:avLst/>
@@ -5954,10 +6092,70 @@
           </a:fontRef>
         </p:style>
         <p:txBody>
-          <a:bodyPr rtlCol="0" anchor="ctr"/>
-          <a:lstStyle/>
-          <a:p>
-            <a:pPr algn="ctr"/>
+          <a:bodyPr rtlCol="0" anchor="ctr" wrap="square"/>
+          <a:lstStyle/>
+          <a:p>
+            <a:pPr algn="ctr">
+              <a:defRPr sz="1150" b="1">
+                <a:solidFill>
+                  <a:srgbClr val="1E40AF"/>
+                </a:solidFill>
+                <a:latin typeface="Segoe UI"/>
+              </a:defRPr>
+            </a:pPr>
+            <a:r>
+              <a:t>CONCENTRACIÓN METROPOLITANA</a:t>
+            </a:r>
+          </a:p>
+          <a:p>
+            <a:pPr>
+              <a:spcBef>
+                <a:spcPts val="600"/>
+              </a:spcBef>
+              <a:defRPr sz="3800" b="1">
+                <a:solidFill>
+                  <a:srgbClr val="1E293B"/>
+                </a:solidFill>
+                <a:latin typeface="Segoe UI"/>
+              </a:defRPr>
+            </a:pPr>
+            <a:r>
+              <a:t>80%</a:t>
+            </a:r>
+          </a:p>
+          <a:p>
+            <a:pPr>
+              <a:defRPr sz="1050" b="1">
+                <a:solidFill>
+                  <a:srgbClr val="64748B"/>
+                </a:solidFill>
+                <a:latin typeface="Segoe UI"/>
+              </a:defRPr>
+            </a:pPr>
+            <a:r>
+              <a:t>de la población regional en el área central</a:t>
+            </a:r>
+          </a:p>
+          <a:p>
+            <a:pPr>
+              <a:spcBef>
+                <a:spcPts val="1000"/>
+              </a:spcBef>
+              <a:defRPr sz="1050">
+                <a:solidFill>
+                  <a:srgbClr val="334155"/>
+                </a:solidFill>
+                <a:latin typeface="Segoe UI"/>
+              </a:defRPr>
+            </a:pPr>
+            <a:r>
+              <a:t>• El 80% de la población regional vive en el área metropolitana central: congestión viaria severa, vivienda cara y tensión asistencial.</a:t>
+            </a:r>
+            <a:br/>
+            <a:br/>
+            <a:r>
+              <a:t>• En contraste, los 155 municipios restantes de menos de 50.000 habitantes tienen potencial de desarrollo, pero antes hay que medir cuánto aguantan sin quebrar servicios.</a:t>
+            </a:r>
           </a:p>
         </p:txBody>
       </p:sp>
@@ -5969,8 +6167,8 @@
         </p:nvSpPr>
         <p:spPr>
           <a:xfrm>
-            <a:off x="731520" y="1719072"/>
-            <a:ext cx="73152" cy="4425696"/>
+            <a:off x="731520" y="1536192"/>
+            <a:ext cx="73152" cy="4608576"/>
           </a:xfrm>
           <a:prstGeom prst="rect">
             <a:avLst/>
@@ -6006,92 +6204,14 @@
       </p:sp>
       <p:sp>
         <p:nvSpPr>
-          <p:cNvPr id="7" name="TextBox 6"/>
-          <p:cNvSpPr txBox="1"/>
-          <p:nvPr/>
-        </p:nvSpPr>
-        <p:spPr>
-          <a:xfrm>
-            <a:off x="914400" y="1828800"/>
-            <a:ext cx="2926080" cy="4114800"/>
-          </a:xfrm>
-          <a:prstGeom prst="rect">
-            <a:avLst/>
-          </a:prstGeom>
-          <a:noFill/>
-        </p:spPr>
-        <p:txBody>
-          <a:bodyPr wrap="square">
-            <a:spAutoFit/>
-          </a:bodyPr>
-          <a:lstStyle/>
-          <a:p>
-            <a:pPr>
-              <a:defRPr sz="1100" b="1">
-                <a:solidFill>
-                  <a:srgbClr val="1E40AF"/>
-                </a:solidFill>
-                <a:latin typeface="Segoe UI"/>
-              </a:defRPr>
-            </a:pPr>
-            <a:r>
-              <a:t>CONCENTRACIÓN METROPOLITANA</a:t>
-            </a:r>
-          </a:p>
-          <a:p>
-            <a:pPr>
-              <a:spcBef>
-                <a:spcPts val="400"/>
-              </a:spcBef>
-              <a:defRPr sz="1600" b="1">
-                <a:solidFill>
-                  <a:srgbClr val="1E293B"/>
-                </a:solidFill>
-                <a:latin typeface="Segoe UI"/>
-              </a:defRPr>
-            </a:pPr>
-            <a:r>
-              <a:t>155 Municipios en la Corona Regional</a:t>
-            </a:r>
-          </a:p>
-          <a:p>
-            <a:pPr>
-              <a:spcBef>
-                <a:spcPts val="800"/>
-              </a:spcBef>
-              <a:defRPr sz="1150">
-                <a:solidFill>
-                  <a:srgbClr val="334155"/>
-                </a:solidFill>
-                <a:latin typeface="Segoe UI"/>
-              </a:defRPr>
-            </a:pPr>
-            <a:r>
-              <a:t>• El 80% de la población de la Comunidad de Madrid se concentra en el área metropolitana central.</a:t>
-            </a:r>
-            <a:br/>
-            <a:br/>
-            <a:r>
-              <a:t>• Esta concentración genera congestión viaria severa, encarecimiento inmobiliario y tensiones en la red asistencial.</a:t>
-            </a:r>
-            <a:br/>
-            <a:br/>
-            <a:r>
-              <a:t>• En contraste, 155 municipios cuentan con potencial de desarrollo, pero requieren evaluación previa de su capacidad de carga.</a:t>
-            </a:r>
-          </a:p>
-        </p:txBody>
-      </p:sp>
-      <p:sp>
-        <p:nvSpPr>
-          <p:cNvPr id="8" name="Rounded Rectangle 7"/>
+          <p:cNvPr id="7" name="Rounded Rectangle 6"/>
           <p:cNvSpPr/>
           <p:nvPr/>
         </p:nvSpPr>
         <p:spPr>
           <a:xfrm>
-            <a:off x="4389120" y="1645920"/>
-            <a:ext cx="3291840" cy="4572000"/>
+            <a:off x="4270248" y="1463040"/>
+            <a:ext cx="3337560" cy="4754880"/>
           </a:xfrm>
           <a:prstGeom prst="roundRect">
             <a:avLst/>
@@ -6120,23 +6240,91 @@
           </a:fontRef>
         </p:style>
         <p:txBody>
-          <a:bodyPr rtlCol="0" anchor="ctr"/>
-          <a:lstStyle/>
-          <a:p>
-            <a:pPr algn="ctr"/>
-          </a:p>
-        </p:txBody>
-      </p:sp>
-      <p:sp>
-        <p:nvSpPr>
-          <p:cNvPr id="9" name="Rectangle 8"/>
+          <a:bodyPr rtlCol="0" anchor="ctr" wrap="square"/>
+          <a:lstStyle/>
+          <a:p>
+            <a:pPr algn="ctr">
+              <a:defRPr sz="1150" b="1">
+                <a:solidFill>
+                  <a:srgbClr val="B45309"/>
+                </a:solidFill>
+                <a:latin typeface="Segoe UI"/>
+              </a:defRPr>
+            </a:pPr>
+            <a:r>
+              <a:t>LA PARADOJA DEL ATRACTIVO</a:t>
+            </a:r>
+          </a:p>
+          <a:p>
+            <a:pPr>
+              <a:spcBef>
+                <a:spcPts val="1400"/>
+              </a:spcBef>
+              <a:defRPr sz="1600" b="1">
+                <a:solidFill>
+                  <a:srgbClr val="1E293B"/>
+                </a:solidFill>
+                <a:latin typeface="Segoe UI"/>
+              </a:defRPr>
+            </a:pPr>
+            <a:r>
+              <a:t>Menor precio ≠ mayor capacidad</a:t>
+            </a:r>
+          </a:p>
+          <a:p>
+            <a:pPr>
+              <a:spcBef>
+                <a:spcPts val="200"/>
+              </a:spcBef>
+              <a:defRPr sz="1050" b="1">
+                <a:solidFill>
+                  <a:srgbClr val="64748B"/>
+                </a:solidFill>
+                <a:latin typeface="Segoe UI"/>
+              </a:defRPr>
+            </a:pPr>
+            <a:r>
+              <a:t>La trampa de las decisiones solo inmobiliarias</a:t>
+            </a:r>
+          </a:p>
+          <a:p>
+            <a:pPr>
+              <a:spcBef>
+                <a:spcPts val="1000"/>
+              </a:spcBef>
+              <a:defRPr sz="1050">
+                <a:solidFill>
+                  <a:srgbClr val="334155"/>
+                </a:solidFill>
+                <a:latin typeface="Segoe UI"/>
+              </a:defRPr>
+            </a:pPr>
+            <a:r>
+              <a:t>• Un municipio con vivienda asequible puede no tener plazas escolares ni médicos para acoger a nuevas familias.</a:t>
+            </a:r>
+            <a:br/>
+            <a:br/>
+            <a:r>
+              <a:t>• Atraer población a núcleos donde no hay holgura dotacional exporta el colapso urbano al entorno rural.</a:t>
+            </a:r>
+            <a:br/>
+            <a:br/>
+            <a:r>
+              <a:t>• Guiar la acogida solo por precio genera bolsas de desatención social inmediata.</a:t>
+            </a:r>
+          </a:p>
+        </p:txBody>
+      </p:sp>
+      <p:sp>
+        <p:nvSpPr>
+          <p:cNvPr id="8" name="Rectangle 7"/>
           <p:cNvSpPr/>
           <p:nvPr/>
         </p:nvSpPr>
         <p:spPr>
           <a:xfrm>
-            <a:off x="4389120" y="1719072"/>
-            <a:ext cx="73152" cy="4425696"/>
+            <a:off x="4270248" y="1536192"/>
+            <a:ext cx="73152" cy="4608576"/>
           </a:xfrm>
           <a:prstGeom prst="rect">
             <a:avLst/>
@@ -6172,92 +6360,14 @@
       </p:sp>
       <p:sp>
         <p:nvSpPr>
-          <p:cNvPr id="10" name="TextBox 9"/>
-          <p:cNvSpPr txBox="1"/>
-          <p:nvPr/>
-        </p:nvSpPr>
-        <p:spPr>
-          <a:xfrm>
-            <a:off x="4572000" y="1828800"/>
-            <a:ext cx="2926080" cy="4114800"/>
-          </a:xfrm>
-          <a:prstGeom prst="rect">
-            <a:avLst/>
-          </a:prstGeom>
-          <a:noFill/>
-        </p:spPr>
-        <p:txBody>
-          <a:bodyPr wrap="square">
-            <a:spAutoFit/>
-          </a:bodyPr>
-          <a:lstStyle/>
-          <a:p>
-            <a:pPr>
-              <a:defRPr sz="1100" b="1">
-                <a:solidFill>
-                  <a:srgbClr val="B45309"/>
-                </a:solidFill>
-                <a:latin typeface="Segoe UI"/>
-              </a:defRPr>
-            </a:pPr>
-            <a:r>
-              <a:t>LA PARADOJA DEL ATRACTIVO</a:t>
-            </a:r>
-          </a:p>
-          <a:p>
-            <a:pPr>
-              <a:spcBef>
-                <a:spcPts val="400"/>
-              </a:spcBef>
-              <a:defRPr sz="1600" b="1">
-                <a:solidFill>
-                  <a:srgbClr val="1E293B"/>
-                </a:solidFill>
-                <a:latin typeface="Segoe UI"/>
-              </a:defRPr>
-            </a:pPr>
-            <a:r>
-              <a:t>Menor Precio ≠ Mayor Capacidad</a:t>
-            </a:r>
-          </a:p>
-          <a:p>
-            <a:pPr>
-              <a:spcBef>
-                <a:spcPts val="800"/>
-              </a:spcBef>
-              <a:defRPr sz="1150">
-                <a:solidFill>
-                  <a:srgbClr val="334155"/>
-                </a:solidFill>
-                <a:latin typeface="Segoe UI"/>
-              </a:defRPr>
-            </a:pPr>
-            <a:r>
-              <a:t>• Las decisiones residenciales basadas únicamente en el precio por metro cuadrado o la proximidad natural son insuficientes.</a:t>
-            </a:r>
-            <a:br/>
-            <a:br/>
-            <a:r>
-              <a:t>• Un municipio con vivienda asequible puede carecer de cupos escolares o médicos para asumir nuevas familias.</a:t>
-            </a:r>
-            <a:br/>
-            <a:br/>
-            <a:r>
-              <a:t>• Atraer población a núcleos sin holgura dotacional exporta el colapso urbano al entorno rural.</a:t>
-            </a:r>
-          </a:p>
-        </p:txBody>
-      </p:sp>
-      <p:sp>
-        <p:nvSpPr>
-          <p:cNvPr id="11" name="Rounded Rectangle 10"/>
+          <p:cNvPr id="9" name="Rounded Rectangle 8"/>
           <p:cNvSpPr/>
           <p:nvPr/>
         </p:nvSpPr>
         <p:spPr>
           <a:xfrm>
-            <a:off x="8046720" y="1645920"/>
-            <a:ext cx="3291840" cy="4572000"/>
+            <a:off x="7808976" y="1463040"/>
+            <a:ext cx="3337560" cy="4754880"/>
           </a:xfrm>
           <a:prstGeom prst="roundRect">
             <a:avLst/>
@@ -6286,23 +6396,86 @@
           </a:fontRef>
         </p:style>
         <p:txBody>
-          <a:bodyPr rtlCol="0" anchor="ctr"/>
-          <a:lstStyle/>
-          <a:p>
-            <a:pPr algn="ctr"/>
-          </a:p>
-        </p:txBody>
-      </p:sp>
-      <p:sp>
-        <p:nvSpPr>
-          <p:cNvPr id="12" name="Rectangle 11"/>
+          <a:bodyPr rtlCol="0" anchor="ctr" wrap="square"/>
+          <a:lstStyle/>
+          <a:p>
+            <a:pPr algn="ctr">
+              <a:defRPr sz="1150" b="1">
+                <a:solidFill>
+                  <a:srgbClr val="C8102E"/>
+                </a:solidFill>
+                <a:latin typeface="Segoe UI"/>
+              </a:defRPr>
+            </a:pPr>
+            <a:r>
+              <a:t>REGLA DE NO COMPENSACIÓN</a:t>
+            </a:r>
+          </a:p>
+          <a:p>
+            <a:pPr>
+              <a:spcBef>
+                <a:spcPts val="1000"/>
+              </a:spcBef>
+              <a:defRPr sz="2400" b="1">
+                <a:solidFill>
+                  <a:srgbClr val="1E293B"/>
+                </a:solidFill>
+                <a:latin typeface="Segoe UI"/>
+              </a:defRPr>
+            </a:pPr>
+            <a:r>
+              <a:t>Principio de Liebig</a:t>
+            </a:r>
+          </a:p>
+          <a:p>
+            <a:pPr>
+              <a:spcBef>
+                <a:spcPts val="200"/>
+              </a:spcBef>
+              <a:defRPr sz="1050" b="1">
+                <a:solidFill>
+                  <a:srgbClr val="64748B"/>
+                </a:solidFill>
+                <a:latin typeface="Segoe UI"/>
+              </a:defRPr>
+            </a:pPr>
+            <a:r>
+              <a:t>El factor más limitante manda</a:t>
+            </a:r>
+          </a:p>
+          <a:p>
+            <a:pPr>
+              <a:spcBef>
+                <a:spcPts val="1000"/>
+              </a:spcBef>
+              <a:defRPr sz="1050">
+                <a:solidFill>
+                  <a:srgbClr val="334155"/>
+                </a:solidFill>
+                <a:latin typeface="Segoe UI"/>
+              </a:defRPr>
+            </a:pPr>
+            <a:r>
+              <a:t>• Según la ley del mínimo de Liebig, la falta de sanidad o educación no se compensa con suelo ni zonas verdes.</a:t>
+            </a:r>
+            <a:br/>
+            <a:br/>
+            <a:r>
+              <a:t>• Regla dura de control: Más de 1.500 hab/médico o aulas al 95%: el índice de capacidad queda automáticamente truncado por debajo de 40 puntos (Alerta Roja).</a:t>
+            </a:r>
+          </a:p>
+        </p:txBody>
+      </p:sp>
+      <p:sp>
+        <p:nvSpPr>
+          <p:cNvPr id="10" name="Rectangle 9"/>
           <p:cNvSpPr/>
           <p:nvPr/>
         </p:nvSpPr>
         <p:spPr>
           <a:xfrm>
-            <a:off x="8046720" y="1719072"/>
-            <a:ext cx="73152" cy="4425696"/>
+            <a:off x="7808976" y="1536192"/>
+            <a:ext cx="73152" cy="4608576"/>
           </a:xfrm>
           <a:prstGeom prst="rect">
             <a:avLst/>
@@ -6333,84 +6506,6 @@
           <a:lstStyle/>
           <a:p>
             <a:pPr algn="ctr"/>
-          </a:p>
-        </p:txBody>
-      </p:sp>
-      <p:sp>
-        <p:nvSpPr>
-          <p:cNvPr id="13" name="TextBox 12"/>
-          <p:cNvSpPr txBox="1"/>
-          <p:nvPr/>
-        </p:nvSpPr>
-        <p:spPr>
-          <a:xfrm>
-            <a:off x="8229600" y="1828800"/>
-            <a:ext cx="2926080" cy="4114800"/>
-          </a:xfrm>
-          <a:prstGeom prst="rect">
-            <a:avLst/>
-          </a:prstGeom>
-          <a:noFill/>
-        </p:spPr>
-        <p:txBody>
-          <a:bodyPr wrap="square">
-            <a:spAutoFit/>
-          </a:bodyPr>
-          <a:lstStyle/>
-          <a:p>
-            <a:pPr>
-              <a:defRPr sz="1100" b="1">
-                <a:solidFill>
-                  <a:srgbClr val="C8102E"/>
-                </a:solidFill>
-                <a:latin typeface="Segoe UI"/>
-              </a:defRPr>
-            </a:pPr>
-            <a:r>
-              <a:t>REGLA DE NO COMPENSACIÓN</a:t>
-            </a:r>
-          </a:p>
-          <a:p>
-            <a:pPr>
-              <a:spcBef>
-                <a:spcPts val="400"/>
-              </a:spcBef>
-              <a:defRPr sz="1600" b="1">
-                <a:solidFill>
-                  <a:srgbClr val="1E293B"/>
-                </a:solidFill>
-                <a:latin typeface="Segoe UI"/>
-              </a:defRPr>
-            </a:pPr>
-            <a:r>
-              <a:t>Principio del Cuello de Botella</a:t>
-            </a:r>
-          </a:p>
-          <a:p>
-            <a:pPr>
-              <a:spcBef>
-                <a:spcPts val="800"/>
-              </a:spcBef>
-              <a:defRPr sz="1150">
-                <a:solidFill>
-                  <a:srgbClr val="334155"/>
-                </a:solidFill>
-                <a:latin typeface="Segoe UI"/>
-              </a:defRPr>
-            </a:pPr>
-            <a:r>
-              <a:t>• Fundamento epistemológico: Ley del Mínimo de Liebig.</a:t>
-            </a:r>
-            <a:br/>
-            <a:br/>
-            <a:r>
-              <a:t>• La carencia severa de un servicio crítico (sanidad o educación) no puede compensarse con abundancia de suelo o zonas verdes.</a:t>
-            </a:r>
-            <a:br/>
-            <a:br/>
-            <a:r>
-              <a:t>• Regla de control: Si hab/médico &gt; 1.500 o la ocupación escolar &gt; 95%, el índice de capacidad queda limitado a nivel de alerta (&lt;40).</a:t>
-            </a:r>
           </a:p>
         </p:txBody>
       </p:sp>
@@ -6506,7 +6601,7 @@
               </a:defRPr>
             </a:pPr>
             <a:r>
-              <a:t>2. TRATAMIENTO DE DATOS</a:t>
+              <a:t>2  ·  TRATAMIENTO DE DATOS</a:t>
             </a:r>
           </a:p>
         </p:txBody>
@@ -6542,7 +6637,7 @@
               </a:defRPr>
             </a:pPr>
             <a:r>
-              <a:t>Fase 1 (Ingesta) y Fase 2 (Control de Calidad y Validación)</a:t>
+              <a:t>Datos trazables: qué es real y qué es estimado</a:t>
             </a:r>
           </a:p>
           <a:p>
@@ -6558,7 +6653,7 @@
               </a:defRPr>
             </a:pPr>
             <a:r>
-              <a:t>Tratamiento metrológico estricto: qué es real y qué es estimado para evitar sobreajuste</a:t>
+              <a:t>Fase 1, ingesta y etiquetado de fuentes. Fase 2, control de calidad.</a:t>
             </a:r>
           </a:p>
         </p:txBody>
@@ -6571,8 +6666,8 @@
         </p:nvSpPr>
         <p:spPr>
           <a:xfrm>
-            <a:off x="731520" y="1645920"/>
-            <a:ext cx="5212080" cy="4572000"/>
+            <a:off x="731520" y="1463040"/>
+            <a:ext cx="5120640" cy="4754880"/>
           </a:xfrm>
           <a:prstGeom prst="roundRect">
             <a:avLst/>
@@ -6601,10 +6696,83 @@
           </a:fontRef>
         </p:style>
         <p:txBody>
-          <a:bodyPr rtlCol="0" anchor="ctr"/>
-          <a:lstStyle/>
-          <a:p>
-            <a:pPr algn="ctr"/>
+          <a:bodyPr rtlCol="0" anchor="ctr" wrap="square"/>
+          <a:lstStyle/>
+          <a:p>
+            <a:pPr algn="ctr">
+              <a:defRPr sz="1200" b="1">
+                <a:solidFill>
+                  <a:srgbClr val="1E40AF"/>
+                </a:solidFill>
+                <a:latin typeface="Segoe UI"/>
+              </a:defRPr>
+            </a:pPr>
+            <a:r>
+              <a:t>FASE 1  ·  INGESTA Y FUENTES OFICIALES</a:t>
+            </a:r>
+          </a:p>
+          <a:p>
+            <a:pPr>
+              <a:spcBef>
+                <a:spcPts val="800"/>
+              </a:spcBef>
+              <a:defRPr sz="1050">
+                <a:solidFill>
+                  <a:srgbClr val="334155"/>
+                </a:solidFill>
+                <a:latin typeface="Segoe UI"/>
+              </a:defRPr>
+            </a:pPr>
+            <a:r>
+              <a:t>• INE (Padrón continuo 2881 y Migraciones):</a:t>
+            </a:r>
+            <a:br/>
+            <a:r>
+              <a:t>  Población histórica y saldo neto (datos reales observados).</a:t>
+            </a:r>
+            <a:br/>
+            <a:br/>
+            <a:r>
+              <a:t>• CAM (Datos Abiertos CKAN Comunidad de Madrid):</a:t>
+            </a:r>
+            <a:br/>
+            <a:r>
+              <a:t>  Centros de salud en alta (SERMAS) y centros educativos reglados.</a:t>
+            </a:r>
+            <a:br/>
+            <a:br/>
+            <a:r>
+              <a:t>• Catastro (Dirección General del Catastro, 2026):</a:t>
+            </a:r>
+            <a:br/>
+            <a:r>
+              <a:t>  Valor catastral medio residencial (€/m²) y volumen edificado.</a:t>
+            </a:r>
+            <a:br/>
+            <a:br/>
+            <a:r>
+              <a:t>• CRTM (Consorcio Regional de Transportes):</a:t>
+            </a:r>
+            <a:br/>
+            <a:r>
+              <a:t>  Zonas tarifarias de transporte e isócronas medias a Madrid.</a:t>
+            </a:r>
+          </a:p>
+          <a:p>
+            <a:pPr>
+              <a:spcBef>
+                <a:spcPts val="1200"/>
+              </a:spcBef>
+              <a:defRPr sz="1050" b="1">
+                <a:solidFill>
+                  <a:srgbClr val="1E293B"/>
+                </a:solidFill>
+                <a:latin typeface="Segoe UI"/>
+              </a:defRPr>
+            </a:pPr>
+            <a:r>
+              <a:t>Regla de honestidad: Cada variable lleva su etiqueta explícita REAL o ESTIMADO para evitar el sobreajuste (overfitting).</a:t>
+            </a:r>
           </a:p>
         </p:txBody>
       </p:sp>
@@ -6616,8 +6784,8 @@
         </p:nvSpPr>
         <p:spPr>
           <a:xfrm>
-            <a:off x="731520" y="1719072"/>
-            <a:ext cx="73152" cy="4425696"/>
+            <a:off x="731520" y="1536192"/>
+            <a:ext cx="73152" cy="4608576"/>
           </a:xfrm>
           <a:prstGeom prst="rect">
             <a:avLst/>
@@ -6653,162 +6821,14 @@
       </p:sp>
       <p:sp>
         <p:nvSpPr>
-          <p:cNvPr id="7" name="TextBox 6"/>
-          <p:cNvSpPr txBox="1"/>
-          <p:nvPr/>
-        </p:nvSpPr>
-        <p:spPr>
-          <a:xfrm>
-            <a:off x="914400" y="1828800"/>
-            <a:ext cx="4846320" cy="4114800"/>
-          </a:xfrm>
-          <a:prstGeom prst="rect">
-            <a:avLst/>
-          </a:prstGeom>
-          <a:noFill/>
-        </p:spPr>
-        <p:txBody>
-          <a:bodyPr wrap="square">
-            <a:spAutoFit/>
-          </a:bodyPr>
-          <a:lstStyle/>
-          <a:p>
-            <a:pPr>
-              <a:defRPr sz="1100" b="1">
-                <a:solidFill>
-                  <a:srgbClr val="1E40AF"/>
-                </a:solidFill>
-                <a:latin typeface="Segoe UI"/>
-              </a:defRPr>
-            </a:pPr>
-            <a:r>
-              <a:t>FASE 1: INGESTA Y ETIQUETADO DE FUENTES</a:t>
-            </a:r>
-          </a:p>
-          <a:p>
-            <a:pPr>
-              <a:spcBef>
-                <a:spcPts val="300"/>
-              </a:spcBef>
-              <a:defRPr sz="1500" b="1">
-                <a:solidFill>
-                  <a:srgbClr val="1E293B"/>
-                </a:solidFill>
-                <a:latin typeface="Segoe UI"/>
-              </a:defRPr>
-            </a:pPr>
-            <a:r>
-              <a:t>Etiquetado Sistemático de Procedencia</a:t>
-            </a:r>
-          </a:p>
-          <a:p>
-            <a:pPr>
-              <a:spcBef>
-                <a:spcPts val="400"/>
-              </a:spcBef>
-              <a:defRPr sz="1050">
-                <a:solidFill>
-                  <a:srgbClr val="334155"/>
-                </a:solidFill>
-                <a:latin typeface="Segoe UI"/>
-              </a:defRPr>
-            </a:pPr>
-            <a:r>
-              <a:t>• INE (Padrón continuo 2881 y Migraciones):</a:t>
-            </a:r>
-            <a:br/>
-            <a:r>
-              <a:t>  Datos reales observados de población histórica y saldo neto.</a:t>
-            </a:r>
-          </a:p>
-          <a:p>
-            <a:pPr>
-              <a:spcBef>
-                <a:spcPts val="400"/>
-              </a:spcBef>
-              <a:defRPr sz="1050">
-                <a:solidFill>
-                  <a:srgbClr val="334155"/>
-                </a:solidFill>
-                <a:latin typeface="Segoe UI"/>
-              </a:defRPr>
-            </a:pPr>
-            <a:r>
-              <a:t>• Comunidad de Madrid (Datos Abiertos CKAN):</a:t>
-            </a:r>
-            <a:br/>
-            <a:r>
-              <a:t>  Registro oficial de Centros de Salud en ALTA (SERMAS) y red de centros educativos.</a:t>
-            </a:r>
-          </a:p>
-          <a:p>
-            <a:pPr>
-              <a:spcBef>
-                <a:spcPts val="400"/>
-              </a:spcBef>
-              <a:defRPr sz="1050">
-                <a:solidFill>
-                  <a:srgbClr val="334155"/>
-                </a:solidFill>
-                <a:latin typeface="Segoe UI"/>
-              </a:defRPr>
-            </a:pPr>
-            <a:r>
-              <a:t>• Dirección General del Catastro (2026):</a:t>
-            </a:r>
-            <a:br/>
-            <a:r>
-              <a:t>  Valores catastrales medios (€/m²) y volumen edificado.</a:t>
-            </a:r>
-          </a:p>
-          <a:p>
-            <a:pPr>
-              <a:spcBef>
-                <a:spcPts val="400"/>
-              </a:spcBef>
-              <a:defRPr sz="1050">
-                <a:solidFill>
-                  <a:srgbClr val="334155"/>
-                </a:solidFill>
-                <a:latin typeface="Segoe UI"/>
-              </a:defRPr>
-            </a:pPr>
-            <a:r>
-              <a:t>• Consorcio Regional de Transportes (CRTM):</a:t>
-            </a:r>
-            <a:br/>
-            <a:r>
-              <a:t>  Zonas tarifarias de transporte e isócronas medias a Madrid.</a:t>
-            </a:r>
-          </a:p>
-          <a:p>
-            <a:pPr>
-              <a:spcBef>
-                <a:spcPts val="600"/>
-              </a:spcBef>
-              <a:defRPr sz="1000">
-                <a:solidFill>
-                  <a:srgbClr val="64748B"/>
-                </a:solidFill>
-                <a:latin typeface="Segoe UI"/>
-              </a:defRPr>
-            </a:pPr>
-            <a:r>
-              <a:t>Regla de honestidad: Cada variable lleva asociada su etiqueta explícita de procedencia (REAL vs. ESTIMADO) para evitar el sobreajuste (overfitting) y declarar con rigor qué magnitudes son directamente observadas.</a:t>
-            </a:r>
-          </a:p>
-        </p:txBody>
-      </p:sp>
-      <p:sp>
-        <p:nvSpPr>
-          <p:cNvPr id="8" name="Rounded Rectangle 7"/>
+          <p:cNvPr id="7" name="Rounded Rectangle 6"/>
           <p:cNvSpPr/>
           <p:nvPr/>
         </p:nvSpPr>
         <p:spPr>
           <a:xfrm>
-            <a:off x="6217920" y="1645920"/>
-            <a:ext cx="5212080" cy="4572000"/>
+            <a:off x="6309360" y="1463040"/>
+            <a:ext cx="5120640" cy="4754880"/>
           </a:xfrm>
           <a:prstGeom prst="roundRect">
             <a:avLst/>
@@ -6837,23 +6857,101 @@
           </a:fontRef>
         </p:style>
         <p:txBody>
-          <a:bodyPr rtlCol="0" anchor="ctr"/>
-          <a:lstStyle/>
-          <a:p>
-            <a:pPr algn="ctr"/>
-          </a:p>
-        </p:txBody>
-      </p:sp>
-      <p:sp>
-        <p:nvSpPr>
-          <p:cNvPr id="9" name="Rectangle 8"/>
+          <a:bodyPr rtlCol="0" anchor="ctr" wrap="square"/>
+          <a:lstStyle/>
+          <a:p>
+            <a:pPr algn="ctr">
+              <a:defRPr sz="1200" b="1">
+                <a:solidFill>
+                  <a:srgbClr val="166534"/>
+                </a:solidFill>
+                <a:latin typeface="Segoe UI"/>
+              </a:defRPr>
+            </a:pPr>
+            <a:r>
+              <a:t>FASE 2  ·  CONTROL DE CALIDAD Y AUDITORÍA</a:t>
+            </a:r>
+          </a:p>
+          <a:p>
+            <a:pPr>
+              <a:spcBef>
+                <a:spcPts val="800"/>
+              </a:spcBef>
+              <a:defRPr sz="1250" b="1">
+                <a:solidFill>
+                  <a:srgbClr val="1E293B"/>
+                </a:solidFill>
+                <a:latin typeface="Consolas"/>
+              </a:defRPr>
+            </a:pPr>
+            <a:r>
+              <a:t>92  columnas del panel verificadas</a:t>
+            </a:r>
+            <a:br/>
+            <a:r>
+              <a:t>0    valores ausentes en variables de modelado</a:t>
+            </a:r>
+            <a:br/>
+            <a:r>
+              <a:t>20  códigos INE únicos, sin repetidos</a:t>
+            </a:r>
+            <a:br/>
+            <a:r>
+              <a:t>73  pruebas automatizadas continuas (100% pasando)</a:t>
+            </a:r>
+          </a:p>
+          <a:p>
+            <a:pPr>
+              <a:spcBef>
+                <a:spcPts val="1200"/>
+              </a:spcBef>
+              <a:defRPr sz="1050">
+                <a:solidFill>
+                  <a:srgbClr val="334155"/>
+                </a:solidFill>
+                <a:latin typeface="Segoe UI"/>
+              </a:defRPr>
+            </a:pPr>
+            <a:r>
+              <a:t>• Filtro de escala: Todos los municipios tienen entre 1 y 49.999 habitantes.</a:t>
+            </a:r>
+            <a:br/>
+            <a:r>
+              <a:t>• Integridad matemática: Precios (€/m²), ocupaciones y cupos son estrictamente positivos.</a:t>
+            </a:r>
+            <a:br/>
+            <a:r>
+              <a:t>• Sin fuga: Las 7 pruebas de leakage (L1 a L7) auditadas formalmente.</a:t>
+            </a:r>
+          </a:p>
+          <a:p>
+            <a:pPr>
+              <a:spcBef>
+                <a:spcPts val="1400"/>
+              </a:spcBef>
+              <a:defRPr sz="950" b="1">
+                <a:solidFill>
+                  <a:srgbClr val="1E40AF"/>
+                </a:solidFill>
+                <a:latin typeface="Consolas"/>
+              </a:defRPr>
+            </a:pPr>
+            <a:r>
+              <a:t>Dataset certificado: data/validated/municipios_panel_validado.csv</a:t>
+            </a:r>
+          </a:p>
+        </p:txBody>
+      </p:sp>
+      <p:sp>
+        <p:nvSpPr>
+          <p:cNvPr id="8" name="Rectangle 7"/>
           <p:cNvSpPr/>
           <p:nvPr/>
         </p:nvSpPr>
         <p:spPr>
           <a:xfrm>
-            <a:off x="6217920" y="1719072"/>
-            <a:ext cx="73152" cy="4425696"/>
+            <a:off x="6309360" y="1536192"/>
+            <a:ext cx="73152" cy="4608576"/>
           </a:xfrm>
           <a:prstGeom prst="rect">
             <a:avLst/>
@@ -6884,154 +6982,6 @@
           <a:lstStyle/>
           <a:p>
             <a:pPr algn="ctr"/>
-          </a:p>
-        </p:txBody>
-      </p:sp>
-      <p:sp>
-        <p:nvSpPr>
-          <p:cNvPr id="10" name="TextBox 9"/>
-          <p:cNvSpPr txBox="1"/>
-          <p:nvPr/>
-        </p:nvSpPr>
-        <p:spPr>
-          <a:xfrm>
-            <a:off x="6400800" y="1828800"/>
-            <a:ext cx="4846320" cy="4114800"/>
-          </a:xfrm>
-          <a:prstGeom prst="rect">
-            <a:avLst/>
-          </a:prstGeom>
-          <a:noFill/>
-        </p:spPr>
-        <p:txBody>
-          <a:bodyPr wrap="square">
-            <a:spAutoFit/>
-          </a:bodyPr>
-          <a:lstStyle/>
-          <a:p>
-            <a:pPr>
-              <a:defRPr sz="1100" b="1">
-                <a:solidFill>
-                  <a:srgbClr val="166534"/>
-                </a:solidFill>
-                <a:latin typeface="Segoe UI"/>
-              </a:defRPr>
-            </a:pPr>
-            <a:r>
-              <a:t>FASE 2: PROTOCOLO DE CONTROL DE CALIDAD</a:t>
-            </a:r>
-          </a:p>
-          <a:p>
-            <a:pPr>
-              <a:spcBef>
-                <a:spcPts val="300"/>
-              </a:spcBef>
-              <a:defRPr sz="1500" b="1">
-                <a:solidFill>
-                  <a:srgbClr val="1E293B"/>
-                </a:solidFill>
-                <a:latin typeface="Segoe UI"/>
-              </a:defRPr>
-            </a:pPr>
-            <a:r>
-              <a:t>Comprobaciones y Filtros Estrictos en Rango</a:t>
-            </a:r>
-          </a:p>
-          <a:p>
-            <a:pPr>
-              <a:spcBef>
-                <a:spcPts val="500"/>
-              </a:spcBef>
-              <a:defRPr sz="1100">
-                <a:solidFill>
-                  <a:srgbClr val="334155"/>
-                </a:solidFill>
-                <a:latin typeface="Segoe UI"/>
-              </a:defRPr>
-            </a:pPr>
-            <a:r>
-              <a:t>• Columnas Obligatorias: Presencia verificada de las 92 columnas del panel analítico procesado.</a:t>
-            </a:r>
-          </a:p>
-          <a:p>
-            <a:pPr>
-              <a:spcBef>
-                <a:spcPts val="500"/>
-              </a:spcBef>
-              <a:defRPr sz="1100">
-                <a:solidFill>
-                  <a:srgbClr val="334155"/>
-                </a:solidFill>
-                <a:latin typeface="Segoe UI"/>
-              </a:defRPr>
-            </a:pPr>
-            <a:r>
-              <a:t>• Integridad de Datos (Sin Nulos): Cero registros con valores ausentes en las variables de modelado.</a:t>
-            </a:r>
-          </a:p>
-          <a:p>
-            <a:pPr>
-              <a:spcBef>
-                <a:spcPts val="500"/>
-              </a:spcBef>
-              <a:defRPr sz="1100">
-                <a:solidFill>
-                  <a:srgbClr val="334155"/>
-                </a:solidFill>
-                <a:latin typeface="Segoe UI"/>
-              </a:defRPr>
-            </a:pPr>
-            <a:r>
-              <a:t>• Unicidad Territorial: 0 municipios repetidos (20 códigos INE únicos contrastados).</a:t>
-            </a:r>
-          </a:p>
-          <a:p>
-            <a:pPr>
-              <a:spcBef>
-                <a:spcPts val="500"/>
-              </a:spcBef>
-              <a:defRPr sz="1100">
-                <a:solidFill>
-                  <a:srgbClr val="334155"/>
-                </a:solidFill>
-                <a:latin typeface="Segoe UI"/>
-              </a:defRPr>
-            </a:pPr>
-            <a:r>
-              <a:t>• Rango de Población del Reto: Todos los municipios cumplen estrictamente tener entre 1 y 49.999 habitantes.</a:t>
-            </a:r>
-          </a:p>
-          <a:p>
-            <a:pPr>
-              <a:spcBef>
-                <a:spcPts val="500"/>
-              </a:spcBef>
-              <a:defRPr sz="1100">
-                <a:solidFill>
-                  <a:srgbClr val="334155"/>
-                </a:solidFill>
-                <a:latin typeface="Segoe UI"/>
-              </a:defRPr>
-            </a:pPr>
-            <a:r>
-              <a:t>• Coherencia en Magnitudes: Precios (€/m²), ratios de ocupación escolar y cupos sanitarios positivos.</a:t>
-            </a:r>
-          </a:p>
-          <a:p>
-            <a:pPr>
-              <a:spcBef>
-                <a:spcPts val="800"/>
-              </a:spcBef>
-              <a:defRPr sz="1050" b="1">
-                <a:solidFill>
-                  <a:srgbClr val="166534"/>
-                </a:solidFill>
-                <a:latin typeface="Segoe UI"/>
-              </a:defRPr>
-            </a:pPr>
-            <a:r>
-              <a:t>Resultado: Dataset certificado y congelado (data/validated/municipios_panel_validado.csv) respaldado por 36 pruebas unitarias y de integración continuas.</a:t>
-            </a:r>
           </a:p>
         </p:txBody>
       </p:sp>
@@ -7127,7 +7077,7 @@
               </a:defRPr>
             </a:pPr>
             <a:r>
-              <a:t>3. PERFIL CIUDADANO Y PRIVACIDAD</a:t>
+              <a:t>3  ·  PERFIL CIUDADANO Y PRIVACIDAD</a:t>
             </a:r>
           </a:p>
         </p:txBody>
@@ -7163,7 +7113,7 @@
               </a:defRPr>
             </a:pPr>
             <a:r>
-              <a:t>Ponderación Multicriterio y Separación de Arquitecturas</a:t>
+              <a:t>Perfil ciudadano y privacidad por diseño</a:t>
             </a:r>
           </a:p>
           <a:p>
@@ -7179,7 +7129,7 @@
               </a:defRPr>
             </a:pPr>
             <a:r>
-              <a:t>Python y Oracle como caminos paralelos con garantía de privacidad (RGPD)</a:t>
+              <a:t>Python y Oracle como caminos paralelos, con garantía de privacidad (RGPD)</a:t>
             </a:r>
           </a:p>
         </p:txBody>
@@ -7192,8 +7142,8 @@
         </p:nvSpPr>
         <p:spPr>
           <a:xfrm>
-            <a:off x="731520" y="1645920"/>
-            <a:ext cx="5212080" cy="4572000"/>
+            <a:off x="731520" y="1463040"/>
+            <a:ext cx="5120640" cy="4754880"/>
           </a:xfrm>
           <a:prstGeom prst="roundRect">
             <a:avLst/>
@@ -7222,10 +7172,72 @@
           </a:fontRef>
         </p:style>
         <p:txBody>
-          <a:bodyPr rtlCol="0" anchor="ctr"/>
-          <a:lstStyle/>
-          <a:p>
-            <a:pPr algn="ctr"/>
+          <a:bodyPr rtlCol="0" anchor="ctr" wrap="square"/>
+          <a:lstStyle/>
+          <a:p>
+            <a:pPr algn="ctr">
+              <a:defRPr sz="1200" b="1">
+                <a:solidFill>
+                  <a:srgbClr val="1E40AF"/>
+                </a:solidFill>
+                <a:latin typeface="Segoe UI"/>
+              </a:defRPr>
+            </a:pPr>
+            <a:r>
+              <a:t>LO QUE INTRODUCE EL CIUDADANO</a:t>
+            </a:r>
+          </a:p>
+          <a:p>
+            <a:pPr>
+              <a:spcBef>
+                <a:spcPts val="800"/>
+              </a:spcBef>
+              <a:defRPr sz="1050">
+                <a:solidFill>
+                  <a:srgbClr val="334155"/>
+                </a:solidFill>
+                <a:latin typeface="Segoe UI"/>
+              </a:defRPr>
+            </a:pPr>
+            <a:r>
+              <a:t>• Presupuesto de vivienda: Total en euros o máximo por m².</a:t>
+            </a:r>
+            <a:br/>
+            <a:r>
+              <a:t>• Ingresos netos del hogar: Esfuerzo financiero sostenible (&lt; 30%).</a:t>
+            </a:r>
+            <a:br/>
+            <a:r>
+              <a:t>• Tiempo máximo de conexión: Minutos al trabajo o a Madrid.</a:t>
+            </a:r>
+            <a:br/>
+            <a:r>
+              <a:t>• Modo de transporte: Público (CRTM) o vehículo privado.</a:t>
+            </a:r>
+            <a:br/>
+            <a:r>
+              <a:t>• Composición familiar: Número de hijos y edades (ajusta plazas escolares).</a:t>
+            </a:r>
+            <a:br/>
+            <a:r>
+              <a:t>• Régimen de tenencia: Preferencia por compra o alquiler.</a:t>
+            </a:r>
+          </a:p>
+          <a:p>
+            <a:pPr>
+              <a:spcBef>
+                <a:spcPts val="1200"/>
+              </a:spcBef>
+              <a:defRPr sz="1050" b="1">
+                <a:solidFill>
+                  <a:srgbClr val="1E293B"/>
+                </a:solidFill>
+                <a:latin typeface="Segoe UI"/>
+              </a:defRPr>
+            </a:pPr>
+            <a:r>
+              <a:t>Motor multicriterio: Un módulo (config/perfiles.py) convierte las respuestas en pesos normalizados que suman 1,0 y reordena los municipios sin tocar el ICA objetivo.</a:t>
+            </a:r>
           </a:p>
         </p:txBody>
       </p:sp>
@@ -7237,8 +7249,8 @@
         </p:nvSpPr>
         <p:spPr>
           <a:xfrm>
-            <a:off x="731520" y="1719072"/>
-            <a:ext cx="73152" cy="4425696"/>
+            <a:off x="731520" y="1536192"/>
+            <a:ext cx="73152" cy="4608576"/>
           </a:xfrm>
           <a:prstGeom prst="rect">
             <a:avLst/>
@@ -7274,178 +7286,14 @@
       </p:sp>
       <p:sp>
         <p:nvSpPr>
-          <p:cNvPr id="7" name="TextBox 6"/>
-          <p:cNvSpPr txBox="1"/>
-          <p:nvPr/>
-        </p:nvSpPr>
-        <p:spPr>
-          <a:xfrm>
-            <a:off x="914400" y="1828800"/>
-            <a:ext cx="4846320" cy="4114800"/>
-          </a:xfrm>
-          <a:prstGeom prst="rect">
-            <a:avLst/>
-          </a:prstGeom>
-          <a:noFill/>
-        </p:spPr>
-        <p:txBody>
-          <a:bodyPr wrap="square">
-            <a:spAutoFit/>
-          </a:bodyPr>
-          <a:lstStyle/>
-          <a:p>
-            <a:pPr>
-              <a:defRPr sz="1100" b="1">
-                <a:solidFill>
-                  <a:srgbClr val="1E40AF"/>
-                </a:solidFill>
-                <a:latin typeface="Segoe UI"/>
-              </a:defRPr>
-            </a:pPr>
-            <a:r>
-              <a:t>ENTRADAS Y PONDERACIÓN CIUDADANA</a:t>
-            </a:r>
-          </a:p>
-          <a:p>
-            <a:pPr>
-              <a:spcBef>
-                <a:spcPts val="300"/>
-              </a:spcBef>
-              <a:defRPr sz="1300" b="1">
-                <a:solidFill>
-                  <a:srgbClr val="1E293B"/>
-                </a:solidFill>
-                <a:latin typeface="Segoe UI"/>
-              </a:defRPr>
-            </a:pPr>
-            <a:r>
-              <a:t>Parámetros que Introduce el Ciudadano:</a:t>
-            </a:r>
-          </a:p>
-          <a:p>
-            <a:pPr>
-              <a:spcBef>
-                <a:spcPts val="400"/>
-              </a:spcBef>
-              <a:defRPr sz="1050">
-                <a:solidFill>
-                  <a:srgbClr val="334155"/>
-                </a:solidFill>
-                <a:latin typeface="Segoe UI"/>
-              </a:defRPr>
-            </a:pPr>
-            <a:r>
-              <a:t>• Presupuesto de Vivienda: Límite total en euros o precio máximo por m².</a:t>
-            </a:r>
-          </a:p>
-          <a:p>
-            <a:pPr>
-              <a:spcBef>
-                <a:spcPts val="400"/>
-              </a:spcBef>
-              <a:defRPr sz="1050">
-                <a:solidFill>
-                  <a:srgbClr val="334155"/>
-                </a:solidFill>
-                <a:latin typeface="Segoe UI"/>
-              </a:defRPr>
-            </a:pPr>
-            <a:r>
-              <a:t>• Ingresos Netos del Hogar: Para calcular la tasa de esfuerzo financiero sostenible (&lt;30%).</a:t>
-            </a:r>
-          </a:p>
-          <a:p>
-            <a:pPr>
-              <a:spcBef>
-                <a:spcPts val="400"/>
-              </a:spcBef>
-              <a:defRPr sz="1050">
-                <a:solidFill>
-                  <a:srgbClr val="334155"/>
-                </a:solidFill>
-                <a:latin typeface="Segoe UI"/>
-              </a:defRPr>
-            </a:pPr>
-            <a:r>
-              <a:t>• Tiempo Máximo de Conexión: Minutos máximos tolerados al centro de trabajo o Madrid.</a:t>
-            </a:r>
-          </a:p>
-          <a:p>
-            <a:pPr>
-              <a:spcBef>
-                <a:spcPts val="400"/>
-              </a:spcBef>
-              <a:defRPr sz="1050">
-                <a:solidFill>
-                  <a:srgbClr val="334155"/>
-                </a:solidFill>
-                <a:latin typeface="Segoe UI"/>
-              </a:defRPr>
-            </a:pPr>
-            <a:r>
-              <a:t>• Modo de Transporte: Preferencia por transporte público (CRTM) o vehículo privado.</a:t>
-            </a:r>
-          </a:p>
-          <a:p>
-            <a:pPr>
-              <a:spcBef>
-                <a:spcPts val="400"/>
-              </a:spcBef>
-              <a:defRPr sz="1050">
-                <a:solidFill>
-                  <a:srgbClr val="334155"/>
-                </a:solidFill>
-                <a:latin typeface="Segoe UI"/>
-              </a:defRPr>
-            </a:pPr>
-            <a:r>
-              <a:t>• Composición Familiar: Número de hijos y edades (ajusta demanda de plazas escolares).</a:t>
-            </a:r>
-          </a:p>
-          <a:p>
-            <a:pPr>
-              <a:spcBef>
-                <a:spcPts val="400"/>
-              </a:spcBef>
-              <a:defRPr sz="1050">
-                <a:solidFill>
-                  <a:srgbClr val="334155"/>
-                </a:solidFill>
-                <a:latin typeface="Segoe UI"/>
-              </a:defRPr>
-            </a:pPr>
-            <a:r>
-              <a:t>• Régimen de Tenencia: Preferencia por compra o alquiler.</a:t>
-            </a:r>
-          </a:p>
-          <a:p>
-            <a:pPr>
-              <a:spcBef>
-                <a:spcPts val="600"/>
-              </a:spcBef>
-              <a:defRPr sz="1000">
-                <a:solidFill>
-                  <a:srgbClr val="64748B"/>
-                </a:solidFill>
-                <a:latin typeface="Segoe UI"/>
-              </a:defRPr>
-            </a:pPr>
-            <a:r>
-              <a:t>El módulo config/perfiles.py traduce estas respuestas en pesos personales normalizados (suman exactamente 1,0) para reordenar los municipios sin modificar el ICA objetivo.</a:t>
-            </a:r>
-          </a:p>
-        </p:txBody>
-      </p:sp>
-      <p:sp>
-        <p:nvSpPr>
-          <p:cNvPr id="8" name="Rounded Rectangle 7"/>
+          <p:cNvPr id="7" name="Rounded Rectangle 6"/>
           <p:cNvSpPr/>
           <p:nvPr/>
         </p:nvSpPr>
         <p:spPr>
           <a:xfrm>
-            <a:off x="6217920" y="1645920"/>
-            <a:ext cx="5212080" cy="4572000"/>
+            <a:off x="6309360" y="1463040"/>
+            <a:ext cx="5120640" cy="4754880"/>
           </a:xfrm>
           <a:prstGeom prst="roundRect">
             <a:avLst/>
@@ -7474,29 +7322,101 @@
           </a:fontRef>
         </p:style>
         <p:txBody>
-          <a:bodyPr rtlCol="0" anchor="ctr"/>
-          <a:lstStyle/>
-          <a:p>
-            <a:pPr algn="ctr"/>
-          </a:p>
-        </p:txBody>
-      </p:sp>
-      <p:sp>
-        <p:nvSpPr>
-          <p:cNvPr id="9" name="Rectangle 8"/>
+          <a:bodyPr rtlCol="0" anchor="ctr" wrap="square"/>
+          <a:lstStyle/>
+          <a:p>
+            <a:pPr algn="ctr">
+              <a:defRPr sz="1200" b="1">
+                <a:solidFill>
+                  <a:srgbClr val="C8102E"/>
+                </a:solidFill>
+                <a:latin typeface="Segoe UI"/>
+              </a:defRPr>
+            </a:pPr>
+            <a:r>
+              <a:t>DOS CAMINOS PARALELOS Y PRIVACIDAD</a:t>
+            </a:r>
+          </a:p>
+          <a:p>
+            <a:pPr>
+              <a:spcBef>
+                <a:spcPts val="800"/>
+              </a:spcBef>
+              <a:defRPr sz="1050">
+                <a:solidFill>
+                  <a:srgbClr val="334155"/>
+                </a:solidFill>
+                <a:latin typeface="Segoe UI"/>
+              </a:defRPr>
+            </a:pPr>
+            <a:r>
+              <a:t>• Python: Lee el CSV validado de forma desacoplada.</a:t>
+            </a:r>
+            <a:br/>
+            <a:r>
+              <a:t>• Oracle APEX: Autónomo en PL/SQL, sin llamar a Python.</a:t>
+            </a:r>
+            <a:br/>
+            <a:br/>
+            <a:r>
+              <a:t>• Paridad garantizada: Los tests continuos comprueban que ambos caminos producen exactamente los mismos pesos y el mismo ranking ante idénticos datos.</a:t>
+            </a:r>
+          </a:p>
+          <a:p>
+            <a:pPr>
+              <a:spcBef>
+                <a:spcPts val="1400"/>
+              </a:spcBef>
+              <a:defRPr sz="1100" b="1">
+                <a:solidFill>
+                  <a:srgbClr val="C8102E"/>
+                </a:solidFill>
+                <a:latin typeface="Segoe UI"/>
+              </a:defRPr>
+            </a:pPr>
+            <a:r>
+              <a:t>PRIVACIDAD ESTRICTA POR DISEÑO (RGPD):</a:t>
+            </a:r>
+          </a:p>
+          <a:p>
+            <a:pPr>
+              <a:spcBef>
+                <a:spcPts val="400"/>
+              </a:spcBef>
+              <a:defRPr sz="1050">
+                <a:solidFill>
+                  <a:srgbClr val="1E293B"/>
+                </a:solidFill>
+                <a:latin typeface="Segoe UI"/>
+              </a:defRPr>
+            </a:pPr>
+            <a:r>
+              <a:t>La base de datos Oracle no guarda ningún dato personal del ciudadano. Solo almacena las 5-6 reglas maestras de ponderación (ej.: «cada hijo suma 0,05 a educación»).</a:t>
+            </a:r>
+            <a:br/>
+            <a:br/>
+            <a:r>
+              <a:t>Los datos del ciudadano entran como parámetros volátiles de sesión y nunca se escriben en disco.</a:t>
+            </a:r>
+          </a:p>
+        </p:txBody>
+      </p:sp>
+      <p:sp>
+        <p:nvSpPr>
+          <p:cNvPr id="8" name="Rectangle 7"/>
           <p:cNvSpPr/>
           <p:nvPr/>
         </p:nvSpPr>
         <p:spPr>
           <a:xfrm>
-            <a:off x="6217920" y="1719072"/>
-            <a:ext cx="73152" cy="4425696"/>
+            <a:off x="6309360" y="1536192"/>
+            <a:ext cx="73152" cy="4608576"/>
           </a:xfrm>
           <a:prstGeom prst="rect">
             <a:avLst/>
           </a:prstGeom>
           <a:solidFill>
-            <a:srgbClr val="1E293B"/>
+            <a:srgbClr val="C8102E"/>
           </a:solidFill>
           <a:ln>
             <a:noFill/>
@@ -7521,118 +7441,6 @@
           <a:lstStyle/>
           <a:p>
             <a:pPr algn="ctr"/>
-          </a:p>
-        </p:txBody>
-      </p:sp>
-      <p:sp>
-        <p:nvSpPr>
-          <p:cNvPr id="10" name="TextBox 9"/>
-          <p:cNvSpPr txBox="1"/>
-          <p:nvPr/>
-        </p:nvSpPr>
-        <p:spPr>
-          <a:xfrm>
-            <a:off x="6400800" y="1828800"/>
-            <a:ext cx="4846320" cy="4114800"/>
-          </a:xfrm>
-          <a:prstGeom prst="rect">
-            <a:avLst/>
-          </a:prstGeom>
-          <a:noFill/>
-        </p:spPr>
-        <p:txBody>
-          <a:bodyPr wrap="square">
-            <a:spAutoFit/>
-          </a:bodyPr>
-          <a:lstStyle/>
-          <a:p>
-            <a:pPr>
-              <a:defRPr sz="1100" b="1">
-                <a:solidFill>
-                  <a:srgbClr val="1E293B"/>
-                </a:solidFill>
-                <a:latin typeface="Segoe UI"/>
-              </a:defRPr>
-            </a:pPr>
-            <a:r>
-              <a:t>DOS CAMINOS PARALELOS Y PRIVACIDAD ESTRICTA</a:t>
-            </a:r>
-          </a:p>
-          <a:p>
-            <a:pPr>
-              <a:spcBef>
-                <a:spcPts val="300"/>
-              </a:spcBef>
-              <a:defRPr sz="1500" b="1">
-                <a:solidFill>
-                  <a:srgbClr val="0F172A"/>
-                </a:solidFill>
-                <a:latin typeface="Segoe UI"/>
-              </a:defRPr>
-            </a:pPr>
-            <a:r>
-              <a:t>Paridad Python vs. Oracle sin Fuga de Datos</a:t>
-            </a:r>
-          </a:p>
-          <a:p>
-            <a:pPr>
-              <a:spcBef>
-                <a:spcPts val="500"/>
-              </a:spcBef>
-              <a:defRPr sz="1050">
-                <a:solidFill>
-                  <a:srgbClr val="334155"/>
-                </a:solidFill>
-                <a:latin typeface="Segoe UI"/>
-              </a:defRPr>
-            </a:pPr>
-            <a:r>
-              <a:t>• Independencia de Entornos:</a:t>
-            </a:r>
-            <a:br/>
-            <a:r>
-              <a:t>  Python lee el CSV validado. La tabla de Oracle está diseñada para que Oracle APEX funcione de forma 100% autónoma sin llamar a Python. Son dos caminos paralelos independientes.</a:t>
-            </a:r>
-          </a:p>
-          <a:p>
-            <a:pPr>
-              <a:spcBef>
-                <a:spcPts val="500"/>
-              </a:spcBef>
-              <a:defRPr sz="1050">
-                <a:solidFill>
-                  <a:srgbClr val="334155"/>
-                </a:solidFill>
-                <a:latin typeface="Segoe UI"/>
-              </a:defRPr>
-            </a:pPr>
-            <a:r>
-              <a:t>• Verificación de Paridad:</a:t>
-            </a:r>
-            <a:br/>
-            <a:r>
-              <a:t>  Los tests automatizados comprueban que el algoritmo en Python y la lógica en PL/SQL de Oracle producen idénticos pesos y rankings ante los mismos datos.</a:t>
-            </a:r>
-          </a:p>
-          <a:p>
-            <a:pPr>
-              <a:spcBef>
-                <a:spcPts val="500"/>
-              </a:spcBef>
-              <a:defRPr sz="1050">
-                <a:solidFill>
-                  <a:srgbClr val="334155"/>
-                </a:solidFill>
-                <a:latin typeface="Segoe UI"/>
-              </a:defRPr>
-            </a:pPr>
-            <a:r>
-              <a:t>• Garantía Total de Privacidad:</a:t>
-            </a:r>
-            <a:br/>
-            <a:r>
-              <a:t>  La base de datos Oracle NO almacena ningún dato personal del ciudadano. Solo almacena las reglas maestras de ponderación (ej: 'cada hijo suma 0,05 a educación'). Los datos del ciudadano se pasan como parámetros volátiles de sesión y nunca persisten en disco.</a:t>
-            </a:r>
           </a:p>
         </p:txBody>
       </p:sp>
@@ -7728,7 +7536,7 @@
               </a:defRPr>
             </a:pPr>
             <a:r>
-              <a:t>4. ECOSISTEMA DE MODELOS</a:t>
+              <a:t>4  ·  ECOSISTEMA DE MODELOS</a:t>
             </a:r>
           </a:p>
         </p:txBody>
@@ -7764,7 +7572,7 @@
               </a:defRPr>
             </a:pPr>
             <a:r>
-              <a:t>Cinco Modelos Analíticos: Una Ficha Municipal Única</a:t>
+              <a:t>Cinco modelos, una ficha municipal</a:t>
             </a:r>
           </a:p>
           <a:p>
@@ -7793,8 +7601,8 @@
         </p:nvSpPr>
         <p:spPr>
           <a:xfrm>
-            <a:off x="731520" y="1645920"/>
-            <a:ext cx="3291840" cy="2194560"/>
+            <a:off x="731520" y="1463040"/>
+            <a:ext cx="10728655" cy="868680"/>
           </a:xfrm>
           <a:prstGeom prst="roundRect">
             <a:avLst/>
@@ -7823,10 +7631,36 @@
           </a:fontRef>
         </p:style>
         <p:txBody>
-          <a:bodyPr rtlCol="0" anchor="ctr"/>
-          <a:lstStyle/>
-          <a:p>
-            <a:pPr algn="ctr"/>
+          <a:bodyPr rtlCol="0" anchor="ctr" wrap="square"/>
+          <a:lstStyle/>
+          <a:p>
+            <a:pPr algn="ctr">
+              <a:defRPr sz="1200" b="1">
+                <a:solidFill>
+                  <a:srgbClr val="1E40AF"/>
+                </a:solidFill>
+                <a:latin typeface="Segoe UI"/>
+              </a:defRPr>
+            </a:pPr>
+            <a:r>
+              <a:t>M1  ·  Asequibilidad y precio (AVM)</a:t>
+            </a:r>
+          </a:p>
+          <a:p>
+            <a:pPr>
+              <a:spcBef>
+                <a:spcPts val="200"/>
+              </a:spcBef>
+              <a:defRPr sz="1050">
+                <a:solidFill>
+                  <a:srgbClr val="334155"/>
+                </a:solidFill>
+                <a:latin typeface="Segoe UI"/>
+              </a:defRPr>
+            </a:pPr>
+            <a:r>
+              <a:t>Pregunta: ¿Puedo permitirme vivir aquí?  —  Respuesta analítica: Precio predicho (€/m²), esfuerzo familiar (% de la renta) y brecha de mercado.</a:t>
+            </a:r>
           </a:p>
         </p:txBody>
       </p:sp>
@@ -7838,8 +7672,8 @@
         </p:nvSpPr>
         <p:spPr>
           <a:xfrm>
-            <a:off x="731520" y="1719072"/>
-            <a:ext cx="73152" cy="2048255"/>
+            <a:off x="731520" y="1536192"/>
+            <a:ext cx="73152" cy="722375"/>
           </a:xfrm>
           <a:prstGeom prst="rect">
             <a:avLst/>
@@ -7875,82 +7709,14 @@
       </p:sp>
       <p:sp>
         <p:nvSpPr>
-          <p:cNvPr id="7" name="TextBox 6"/>
-          <p:cNvSpPr txBox="1"/>
-          <p:nvPr/>
-        </p:nvSpPr>
-        <p:spPr>
-          <a:xfrm>
-            <a:off x="914400" y="1783080"/>
-            <a:ext cx="2926080" cy="1920240"/>
-          </a:xfrm>
-          <a:prstGeom prst="rect">
-            <a:avLst/>
-          </a:prstGeom>
-          <a:noFill/>
-        </p:spPr>
-        <p:txBody>
-          <a:bodyPr wrap="square">
-            <a:spAutoFit/>
-          </a:bodyPr>
-          <a:lstStyle/>
-          <a:p>
-            <a:pPr>
-              <a:defRPr sz="1100" b="1">
-                <a:solidFill>
-                  <a:srgbClr val="1E40AF"/>
-                </a:solidFill>
-                <a:latin typeface="Segoe UI"/>
-              </a:defRPr>
-            </a:pPr>
-            <a:r>
-              <a:t>MODELO M1: ASEQUIBILIDAD Y PRECIO (AVM)</a:t>
-            </a:r>
-          </a:p>
-          <a:p>
-            <a:pPr>
-              <a:spcBef>
-                <a:spcPts val="200"/>
-              </a:spcBef>
-              <a:defRPr sz="1050" b="1">
-                <a:solidFill>
-                  <a:srgbClr val="1E293B"/>
-                </a:solidFill>
-                <a:latin typeface="Segoe UI"/>
-              </a:defRPr>
-            </a:pPr>
-            <a:r>
-              <a:t>¿Puedo permitirme vivir aquí?</a:t>
-            </a:r>
-          </a:p>
-          <a:p>
-            <a:pPr>
-              <a:spcBef>
-                <a:spcPts val="400"/>
-              </a:spcBef>
-              <a:defRPr sz="1000">
-                <a:solidFill>
-                  <a:srgbClr val="334155"/>
-                </a:solidFill>
-                <a:latin typeface="Segoe UI"/>
-              </a:defRPr>
-            </a:pPr>
-            <a:r>
-              <a:t>Precio predicho (€/m²), esfuerzo familiar (% renta) y brecha de mercado.</a:t>
-            </a:r>
-          </a:p>
-        </p:txBody>
-      </p:sp>
-      <p:sp>
-        <p:nvSpPr>
-          <p:cNvPr id="8" name="Rounded Rectangle 7"/>
+          <p:cNvPr id="7" name="Rounded Rectangle 6"/>
           <p:cNvSpPr/>
           <p:nvPr/>
         </p:nvSpPr>
         <p:spPr>
           <a:xfrm>
-            <a:off x="4389120" y="1645920"/>
-            <a:ext cx="3291840" cy="2194560"/>
+            <a:off x="731520" y="2432304"/>
+            <a:ext cx="10728655" cy="868680"/>
           </a:xfrm>
           <a:prstGeom prst="roundRect">
             <a:avLst/>
@@ -7979,29 +7745,55 @@
           </a:fontRef>
         </p:style>
         <p:txBody>
-          <a:bodyPr rtlCol="0" anchor="ctr"/>
-          <a:lstStyle/>
-          <a:p>
-            <a:pPr algn="ctr"/>
-          </a:p>
-        </p:txBody>
-      </p:sp>
-      <p:sp>
-        <p:nvSpPr>
-          <p:cNvPr id="9" name="Rectangle 8"/>
+          <a:bodyPr rtlCol="0" anchor="ctr" wrap="square"/>
+          <a:lstStyle/>
+          <a:p>
+            <a:pPr algn="ctr">
+              <a:defRPr sz="1200" b="1">
+                <a:solidFill>
+                  <a:srgbClr val="166534"/>
+                </a:solidFill>
+                <a:latin typeface="Segoe UI"/>
+              </a:defRPr>
+            </a:pPr>
+            <a:r>
+              <a:t>M2  ·  Dotación e infraestructuras</a:t>
+            </a:r>
+          </a:p>
+          <a:p>
+            <a:pPr>
+              <a:spcBef>
+                <a:spcPts val="200"/>
+              </a:spcBef>
+              <a:defRPr sz="1050">
+                <a:solidFill>
+                  <a:srgbClr val="334155"/>
+                </a:solidFill>
+                <a:latin typeface="Segoe UI"/>
+              </a:defRPr>
+            </a:pPr>
+            <a:r>
+              <a:t>Pregunta: ¿Qué tal servicios y conexión?  —  Respuesta analítica: Cuatro subíndices de 0 a 100: sanidad, educación, conectividad y calidad residencial.</a:t>
+            </a:r>
+          </a:p>
+        </p:txBody>
+      </p:sp>
+      <p:sp>
+        <p:nvSpPr>
+          <p:cNvPr id="8" name="Rectangle 7"/>
           <p:cNvSpPr/>
           <p:nvPr/>
         </p:nvSpPr>
         <p:spPr>
           <a:xfrm>
-            <a:off x="4389120" y="1719072"/>
-            <a:ext cx="73152" cy="2048255"/>
+            <a:off x="731520" y="2505456"/>
+            <a:ext cx="73152" cy="722375"/>
           </a:xfrm>
           <a:prstGeom prst="rect">
             <a:avLst/>
           </a:prstGeom>
           <a:solidFill>
-            <a:srgbClr val="0F172A"/>
+            <a:srgbClr val="166534"/>
           </a:solidFill>
           <a:ln>
             <a:noFill/>
@@ -8031,82 +7823,14 @@
       </p:sp>
       <p:sp>
         <p:nvSpPr>
-          <p:cNvPr id="10" name="TextBox 9"/>
-          <p:cNvSpPr txBox="1"/>
-          <p:nvPr/>
-        </p:nvSpPr>
-        <p:spPr>
-          <a:xfrm>
-            <a:off x="4572000" y="1783080"/>
-            <a:ext cx="2926080" cy="1920240"/>
-          </a:xfrm>
-          <a:prstGeom prst="rect">
-            <a:avLst/>
-          </a:prstGeom>
-          <a:noFill/>
-        </p:spPr>
-        <p:txBody>
-          <a:bodyPr wrap="square">
-            <a:spAutoFit/>
-          </a:bodyPr>
-          <a:lstStyle/>
-          <a:p>
-            <a:pPr>
-              <a:defRPr sz="1100" b="1">
-                <a:solidFill>
-                  <a:srgbClr val="0F172A"/>
-                </a:solidFill>
-                <a:latin typeface="Segoe UI"/>
-              </a:defRPr>
-            </a:pPr>
-            <a:r>
-              <a:t>MODELO M2: DOTACIÓN E INFRAESTRUCTURAS</a:t>
-            </a:r>
-          </a:p>
-          <a:p>
-            <a:pPr>
-              <a:spcBef>
-                <a:spcPts val="200"/>
-              </a:spcBef>
-              <a:defRPr sz="1050" b="1">
-                <a:solidFill>
-                  <a:srgbClr val="1E293B"/>
-                </a:solidFill>
-                <a:latin typeface="Segoe UI"/>
-              </a:defRPr>
-            </a:pPr>
-            <a:r>
-              <a:t>¿Qué tal servicios y conexión?</a:t>
-            </a:r>
-          </a:p>
-          <a:p>
-            <a:pPr>
-              <a:spcBef>
-                <a:spcPts val="400"/>
-              </a:spcBef>
-              <a:defRPr sz="1000">
-                <a:solidFill>
-                  <a:srgbClr val="334155"/>
-                </a:solidFill>
-                <a:latin typeface="Segoe UI"/>
-              </a:defRPr>
-            </a:pPr>
-            <a:r>
-              <a:t>4 sub-índices (0 a 100) en Sanidad, Educación, Conectividad y Calidad Residencial.</a:t>
-            </a:r>
-          </a:p>
-        </p:txBody>
-      </p:sp>
-      <p:sp>
-        <p:nvSpPr>
-          <p:cNvPr id="11" name="Rounded Rectangle 10"/>
+          <p:cNvPr id="9" name="Rounded Rectangle 8"/>
           <p:cNvSpPr/>
           <p:nvPr/>
         </p:nvSpPr>
         <p:spPr>
           <a:xfrm>
-            <a:off x="8046720" y="1645920"/>
-            <a:ext cx="3291840" cy="2194560"/>
+            <a:off x="731520" y="3401568"/>
+            <a:ext cx="10728655" cy="868680"/>
           </a:xfrm>
           <a:prstGeom prst="roundRect">
             <a:avLst/>
@@ -8135,29 +7859,55 @@
           </a:fontRef>
         </p:style>
         <p:txBody>
-          <a:bodyPr rtlCol="0" anchor="ctr"/>
-          <a:lstStyle/>
-          <a:p>
-            <a:pPr algn="ctr"/>
-          </a:p>
-        </p:txBody>
-      </p:sp>
-      <p:sp>
-        <p:nvSpPr>
-          <p:cNvPr id="12" name="Rectangle 11"/>
+          <a:bodyPr rtlCol="0" anchor="ctr" wrap="square"/>
+          <a:lstStyle/>
+          <a:p>
+            <a:pPr algn="ctr">
+              <a:defRPr sz="1200" b="1">
+                <a:solidFill>
+                  <a:srgbClr val="B45309"/>
+                </a:solidFill>
+                <a:latin typeface="Segoe UI"/>
+              </a:defRPr>
+            </a:pPr>
+            <a:r>
+              <a:t>M3  ·  Demografía y series temporales</a:t>
+            </a:r>
+          </a:p>
+          <a:p>
+            <a:pPr>
+              <a:spcBef>
+                <a:spcPts val="200"/>
+              </a:spcBef>
+              <a:defRPr sz="1050">
+                <a:solidFill>
+                  <a:srgbClr val="334155"/>
+                </a:solidFill>
+                <a:latin typeface="Segoe UI"/>
+              </a:defRPr>
+            </a:pPr>
+            <a:r>
+              <a:t>Pregunta: ¿Va a crecer o a vaciarse?  —  Respuesta analítica: Proyección a 5 y 10 años (2030 y 2035) y año estimado de saturación.</a:t>
+            </a:r>
+          </a:p>
+        </p:txBody>
+      </p:sp>
+      <p:sp>
+        <p:nvSpPr>
+          <p:cNvPr id="10" name="Rectangle 9"/>
           <p:cNvSpPr/>
           <p:nvPr/>
         </p:nvSpPr>
         <p:spPr>
           <a:xfrm>
-            <a:off x="8046720" y="1719072"/>
-            <a:ext cx="73152" cy="2048255"/>
+            <a:off x="731520" y="3474720"/>
+            <a:ext cx="73152" cy="722375"/>
           </a:xfrm>
           <a:prstGeom prst="rect">
             <a:avLst/>
           </a:prstGeom>
           <a:solidFill>
-            <a:srgbClr val="64748B"/>
+            <a:srgbClr val="B45309"/>
           </a:solidFill>
           <a:ln>
             <a:noFill/>
@@ -8187,82 +7937,14 @@
       </p:sp>
       <p:sp>
         <p:nvSpPr>
-          <p:cNvPr id="13" name="TextBox 12"/>
-          <p:cNvSpPr txBox="1"/>
-          <p:nvPr/>
-        </p:nvSpPr>
-        <p:spPr>
-          <a:xfrm>
-            <a:off x="8229600" y="1783080"/>
-            <a:ext cx="2926080" cy="1920240"/>
-          </a:xfrm>
-          <a:prstGeom prst="rect">
-            <a:avLst/>
-          </a:prstGeom>
-          <a:noFill/>
-        </p:spPr>
-        <p:txBody>
-          <a:bodyPr wrap="square">
-            <a:spAutoFit/>
-          </a:bodyPr>
-          <a:lstStyle/>
-          <a:p>
-            <a:pPr>
-              <a:defRPr sz="1100" b="1">
-                <a:solidFill>
-                  <a:srgbClr val="64748B"/>
-                </a:solidFill>
-                <a:latin typeface="Segoe UI"/>
-              </a:defRPr>
-            </a:pPr>
-            <a:r>
-              <a:t>MODELO M3: DEMOGRAFÍA Y SERIES TEMPORALES</a:t>
-            </a:r>
-          </a:p>
-          <a:p>
-            <a:pPr>
-              <a:spcBef>
-                <a:spcPts val="200"/>
-              </a:spcBef>
-              <a:defRPr sz="1050" b="1">
-                <a:solidFill>
-                  <a:srgbClr val="1E293B"/>
-                </a:solidFill>
-                <a:latin typeface="Segoe UI"/>
-              </a:defRPr>
-            </a:pPr>
-            <a:r>
-              <a:t>¿Va a crecer o a vaciarse?</a:t>
-            </a:r>
-          </a:p>
-          <a:p>
-            <a:pPr>
-              <a:spcBef>
-                <a:spcPts val="400"/>
-              </a:spcBef>
-              <a:defRPr sz="1000">
-                <a:solidFill>
-                  <a:srgbClr val="334155"/>
-                </a:solidFill>
-                <a:latin typeface="Segoe UI"/>
-              </a:defRPr>
-            </a:pPr>
-            <a:r>
-              <a:t>Proyección demográfica a 5 y 10 años (2030-2035) y año estimado de saturación.</a:t>
-            </a:r>
-          </a:p>
-        </p:txBody>
-      </p:sp>
-      <p:sp>
-        <p:nvSpPr>
-          <p:cNvPr id="14" name="Rounded Rectangle 13"/>
+          <p:cNvPr id="11" name="Rounded Rectangle 10"/>
           <p:cNvSpPr/>
           <p:nvPr/>
         </p:nvSpPr>
         <p:spPr>
           <a:xfrm>
-            <a:off x="2560320" y="4023360"/>
-            <a:ext cx="3291840" cy="2194560"/>
+            <a:off x="731520" y="4370832"/>
+            <a:ext cx="10728655" cy="868680"/>
           </a:xfrm>
           <a:prstGeom prst="roundRect">
             <a:avLst/>
@@ -8291,29 +7973,55 @@
           </a:fontRef>
         </p:style>
         <p:txBody>
-          <a:bodyPr rtlCol="0" anchor="ctr"/>
-          <a:lstStyle/>
-          <a:p>
-            <a:pPr algn="ctr"/>
-          </a:p>
-        </p:txBody>
-      </p:sp>
-      <p:sp>
-        <p:nvSpPr>
-          <p:cNvPr id="15" name="Rectangle 14"/>
+          <a:bodyPr rtlCol="0" anchor="ctr" wrap="square"/>
+          <a:lstStyle/>
+          <a:p>
+            <a:pPr algn="ctr">
+              <a:defRPr sz="1200" b="1">
+                <a:solidFill>
+                  <a:srgbClr val="C8102E"/>
+                </a:solidFill>
+                <a:latin typeface="Segoe UI"/>
+              </a:defRPr>
+            </a:pPr>
+            <a:r>
+              <a:t>M4  ·  Capacidad neta de carga (ICA)</a:t>
+            </a:r>
+          </a:p>
+          <a:p>
+            <a:pPr>
+              <a:spcBef>
+                <a:spcPts val="200"/>
+              </a:spcBef>
+              <a:defRPr sz="1050">
+                <a:solidFill>
+                  <a:srgbClr val="334155"/>
+                </a:solidFill>
+                <a:latin typeface="Segoe UI"/>
+              </a:defRPr>
+            </a:pPr>
+            <a:r>
+              <a:t>Pregunta: ¿Cuánta gente cabe y qué se rompe?  —  Respuesta analítica: Habitantes adicionales sostenibles e identificación del factor limitante.</a:t>
+            </a:r>
+          </a:p>
+        </p:txBody>
+      </p:sp>
+      <p:sp>
+        <p:nvSpPr>
+          <p:cNvPr id="12" name="Rectangle 11"/>
           <p:cNvSpPr/>
           <p:nvPr/>
         </p:nvSpPr>
         <p:spPr>
           <a:xfrm>
-            <a:off x="2560320" y="4096512"/>
-            <a:ext cx="73152" cy="2048255"/>
+            <a:off x="731520" y="4443984"/>
+            <a:ext cx="73152" cy="722375"/>
           </a:xfrm>
           <a:prstGeom prst="rect">
             <a:avLst/>
           </a:prstGeom>
           <a:solidFill>
-            <a:srgbClr val="166534"/>
+            <a:srgbClr val="C8102E"/>
           </a:solidFill>
           <a:ln>
             <a:noFill/>
@@ -8343,82 +8051,14 @@
       </p:sp>
       <p:sp>
         <p:nvSpPr>
-          <p:cNvPr id="16" name="TextBox 15"/>
-          <p:cNvSpPr txBox="1"/>
-          <p:nvPr/>
-        </p:nvSpPr>
-        <p:spPr>
-          <a:xfrm>
-            <a:off x="2743200" y="4160520"/>
-            <a:ext cx="2926080" cy="1920240"/>
-          </a:xfrm>
-          <a:prstGeom prst="rect">
-            <a:avLst/>
-          </a:prstGeom>
-          <a:noFill/>
-        </p:spPr>
-        <p:txBody>
-          <a:bodyPr wrap="square">
-            <a:spAutoFit/>
-          </a:bodyPr>
-          <a:lstStyle/>
-          <a:p>
-            <a:pPr>
-              <a:defRPr sz="1100" b="1">
-                <a:solidFill>
-                  <a:srgbClr val="166534"/>
-                </a:solidFill>
-                <a:latin typeface="Segoe UI"/>
-              </a:defRPr>
-            </a:pPr>
-            <a:r>
-              <a:t>MODELO M4: CAPACIDAD NETA DE CARGA (ICA)</a:t>
-            </a:r>
-          </a:p>
-          <a:p>
-            <a:pPr>
-              <a:spcBef>
-                <a:spcPts val="200"/>
-              </a:spcBef>
-              <a:defRPr sz="1050" b="1">
-                <a:solidFill>
-                  <a:srgbClr val="1E293B"/>
-                </a:solidFill>
-                <a:latin typeface="Segoe UI"/>
-              </a:defRPr>
-            </a:pPr>
-            <a:r>
-              <a:t>¿Cuánta gente cabe y qué se rompe?</a:t>
-            </a:r>
-          </a:p>
-          <a:p>
-            <a:pPr>
-              <a:spcBef>
-                <a:spcPts val="400"/>
-              </a:spcBef>
-              <a:defRPr sz="1000">
-                <a:solidFill>
-                  <a:srgbClr val="334155"/>
-                </a:solidFill>
-                <a:latin typeface="Segoe UI"/>
-              </a:defRPr>
-            </a:pPr>
-            <a:r>
-              <a:t>Cálculo de habitantes adicionales sostenibles e identificación del factor limitante.</a:t>
-            </a:r>
-          </a:p>
-        </p:txBody>
-      </p:sp>
-      <p:sp>
-        <p:nvSpPr>
-          <p:cNvPr id="17" name="Rounded Rectangle 16"/>
+          <p:cNvPr id="13" name="Rounded Rectangle 12"/>
           <p:cNvSpPr/>
           <p:nvPr/>
         </p:nvSpPr>
         <p:spPr>
           <a:xfrm>
-            <a:off x="6217920" y="4023360"/>
-            <a:ext cx="3291840" cy="2194560"/>
+            <a:off x="731520" y="5340096"/>
+            <a:ext cx="10728655" cy="868680"/>
           </a:xfrm>
           <a:prstGeom prst="roundRect">
             <a:avLst/>
@@ -8447,29 +8087,55 @@
           </a:fontRef>
         </p:style>
         <p:txBody>
-          <a:bodyPr rtlCol="0" anchor="ctr"/>
-          <a:lstStyle/>
-          <a:p>
-            <a:pPr algn="ctr"/>
-          </a:p>
-        </p:txBody>
-      </p:sp>
-      <p:sp>
-        <p:nvSpPr>
-          <p:cNvPr id="18" name="Rectangle 17"/>
+          <a:bodyPr rtlCol="0" anchor="ctr" wrap="square"/>
+          <a:lstStyle/>
+          <a:p>
+            <a:pPr algn="ctr">
+              <a:defRPr sz="1200" b="1">
+                <a:solidFill>
+                  <a:srgbClr val="1E293B"/>
+                </a:solidFill>
+                <a:latin typeface="Segoe UI"/>
+              </a:defRPr>
+            </a:pPr>
+            <a:r>
+              <a:t>M5  ·  Recomendador y optimizador</a:t>
+            </a:r>
+          </a:p>
+          <a:p>
+            <a:pPr>
+              <a:spcBef>
+                <a:spcPts val="200"/>
+              </a:spcBef>
+              <a:defRPr sz="1050">
+                <a:solidFill>
+                  <a:srgbClr val="334155"/>
+                </a:solidFill>
+                <a:latin typeface="Segoe UI"/>
+              </a:defRPr>
+            </a:pPr>
+            <a:r>
+              <a:t>Pregunta: ¿Cuál encaja conmigo?  —  Respuesta analítica: Ranking adaptado al perfil ciudadano y optimización de la inversión pública.</a:t>
+            </a:r>
+          </a:p>
+        </p:txBody>
+      </p:sp>
+      <p:sp>
+        <p:nvSpPr>
+          <p:cNvPr id="14" name="Rectangle 13"/>
           <p:cNvSpPr/>
           <p:nvPr/>
         </p:nvSpPr>
         <p:spPr>
           <a:xfrm>
-            <a:off x="6217920" y="4096512"/>
-            <a:ext cx="73152" cy="2048255"/>
+            <a:off x="731520" y="5413248"/>
+            <a:ext cx="73152" cy="722375"/>
           </a:xfrm>
           <a:prstGeom prst="rect">
             <a:avLst/>
           </a:prstGeom>
           <a:solidFill>
-            <a:srgbClr val="B45309"/>
+            <a:srgbClr val="1E293B"/>
           </a:solidFill>
           <a:ln>
             <a:noFill/>
@@ -8494,74 +8160,6 @@
           <a:lstStyle/>
           <a:p>
             <a:pPr algn="ctr"/>
-          </a:p>
-        </p:txBody>
-      </p:sp>
-      <p:sp>
-        <p:nvSpPr>
-          <p:cNvPr id="19" name="TextBox 18"/>
-          <p:cNvSpPr txBox="1"/>
-          <p:nvPr/>
-        </p:nvSpPr>
-        <p:spPr>
-          <a:xfrm>
-            <a:off x="6400800" y="4160520"/>
-            <a:ext cx="2926080" cy="1920240"/>
-          </a:xfrm>
-          <a:prstGeom prst="rect">
-            <a:avLst/>
-          </a:prstGeom>
-          <a:noFill/>
-        </p:spPr>
-        <p:txBody>
-          <a:bodyPr wrap="square">
-            <a:spAutoFit/>
-          </a:bodyPr>
-          <a:lstStyle/>
-          <a:p>
-            <a:pPr>
-              <a:defRPr sz="1100" b="1">
-                <a:solidFill>
-                  <a:srgbClr val="B45309"/>
-                </a:solidFill>
-                <a:latin typeface="Segoe UI"/>
-              </a:defRPr>
-            </a:pPr>
-            <a:r>
-              <a:t>MODELO M5: RECOMENDADOR Y OPTIMIZADOR</a:t>
-            </a:r>
-          </a:p>
-          <a:p>
-            <a:pPr>
-              <a:spcBef>
-                <a:spcPts val="200"/>
-              </a:spcBef>
-              <a:defRPr sz="1050" b="1">
-                <a:solidFill>
-                  <a:srgbClr val="1E293B"/>
-                </a:solidFill>
-                <a:latin typeface="Segoe UI"/>
-              </a:defRPr>
-            </a:pPr>
-            <a:r>
-              <a:t>¿Cuál encaja conmigo?</a:t>
-            </a:r>
-          </a:p>
-          <a:p>
-            <a:pPr>
-              <a:spcBef>
-                <a:spcPts val="400"/>
-              </a:spcBef>
-              <a:defRPr sz="1000">
-                <a:solidFill>
-                  <a:srgbClr val="334155"/>
-                </a:solidFill>
-                <a:latin typeface="Segoe UI"/>
-              </a:defRPr>
-            </a:pPr>
-            <a:r>
-              <a:t>Ranking adaptado al perfil ciudadano y optimización de inversión para la Administración.</a:t>
-            </a:r>
           </a:p>
         </p:txBody>
       </p:sp>
@@ -8657,7 +8255,7 @@
               </a:defRPr>
             </a:pPr>
             <a:r>
-              <a:t>5. CLARIDAD METODOLÓGICA</a:t>
+              <a:t>5  ·  CLARIDAD METODOLÓGICA</a:t>
             </a:r>
           </a:p>
         </p:txBody>
@@ -8693,7 +8291,7 @@
               </a:defRPr>
             </a:pPr>
             <a:r>
-              <a:t>Las Tres Operaciones que se Suelen Confundir</a:t>
+              <a:t>Evaluar, predecir y simular no es lo mismo</a:t>
             </a:r>
           </a:p>
           <a:p>
@@ -8722,8 +8320,8 @@
         </p:nvSpPr>
         <p:spPr>
           <a:xfrm>
-            <a:off x="731520" y="1645920"/>
-            <a:ext cx="3291840" cy="4572000"/>
+            <a:off x="731520" y="1463040"/>
+            <a:ext cx="3337560" cy="4754880"/>
           </a:xfrm>
           <a:prstGeom prst="roundRect">
             <a:avLst/>
@@ -8752,10 +8350,74 @@
           </a:fontRef>
         </p:style>
         <p:txBody>
-          <a:bodyPr rtlCol="0" anchor="ctr"/>
-          <a:lstStyle/>
-          <a:p>
-            <a:pPr algn="ctr"/>
+          <a:bodyPr rtlCol="0" anchor="ctr" wrap="square"/>
+          <a:lstStyle/>
+          <a:p>
+            <a:pPr algn="ctr">
+              <a:defRPr sz="1200" b="1">
+                <a:solidFill>
+                  <a:srgbClr val="1E40AF"/>
+                </a:solidFill>
+                <a:latin typeface="Segoe UI"/>
+              </a:defRPr>
+            </a:pPr>
+            <a:r>
+              <a:t>1. EVALUAR / ORDENAR</a:t>
+            </a:r>
+          </a:p>
+          <a:p>
+            <a:pPr>
+              <a:spcBef>
+                <a:spcPts val="600"/>
+              </a:spcBef>
+              <a:defRPr sz="1200" b="1">
+                <a:solidFill>
+                  <a:srgbClr val="1E293B"/>
+                </a:solidFill>
+                <a:latin typeface="Segoe UI"/>
+              </a:defRPr>
+            </a:pPr>
+            <a:r>
+              <a:t>¿Qué municipio encaja con lo que pido?</a:t>
+            </a:r>
+          </a:p>
+          <a:p>
+            <a:pPr>
+              <a:spcBef>
+                <a:spcPts val="1200"/>
+              </a:spcBef>
+              <a:defRPr sz="1050">
+                <a:solidFill>
+                  <a:srgbClr val="334155"/>
+                </a:solidFill>
+                <a:latin typeface="Segoe UI"/>
+              </a:defRPr>
+            </a:pPr>
+            <a:r>
+              <a:t>• NECESITA:</a:t>
+            </a:r>
+            <a:br/>
+            <a:r>
+              <a:t>  Ningún dato del futuro: lo observado ya existe hoy.</a:t>
+            </a:r>
+            <a:br/>
+            <a:br/>
+            <a:r>
+              <a:t>• FUNCIÓN:</a:t>
+            </a:r>
+            <a:br/>
+            <a:r>
+              <a:t>  Reordenar municipios según preferencias declaradas.</a:t>
+            </a:r>
+            <a:br/>
+            <a:br/>
+            <a:r>
+              <a:t>• IMPLEMENTACIÓN:</a:t>
+            </a:r>
+            <a:br/>
+            <a:r>
+              <a:t>  Ranking adaptativo por perfiles (C2 / M5).</a:t>
+            </a:r>
           </a:p>
         </p:txBody>
       </p:sp>
@@ -8767,8 +8429,8 @@
         </p:nvSpPr>
         <p:spPr>
           <a:xfrm>
-            <a:off x="731520" y="1719072"/>
-            <a:ext cx="73152" cy="4425696"/>
+            <a:off x="731520" y="1536192"/>
+            <a:ext cx="73152" cy="4608576"/>
           </a:xfrm>
           <a:prstGeom prst="rect">
             <a:avLst/>
@@ -8804,95 +8466,14 @@
       </p:sp>
       <p:sp>
         <p:nvSpPr>
-          <p:cNvPr id="7" name="TextBox 6"/>
-          <p:cNvSpPr txBox="1"/>
-          <p:nvPr/>
-        </p:nvSpPr>
-        <p:spPr>
-          <a:xfrm>
-            <a:off x="914400" y="1828800"/>
-            <a:ext cx="2926080" cy="4114800"/>
-          </a:xfrm>
-          <a:prstGeom prst="rect">
-            <a:avLst/>
-          </a:prstGeom>
-          <a:noFill/>
-        </p:spPr>
-        <p:txBody>
-          <a:bodyPr wrap="square">
-            <a:spAutoFit/>
-          </a:bodyPr>
-          <a:lstStyle/>
-          <a:p>
-            <a:pPr>
-              <a:defRPr sz="1200" b="1">
-                <a:solidFill>
-                  <a:srgbClr val="1E40AF"/>
-                </a:solidFill>
-                <a:latin typeface="Segoe UI"/>
-              </a:defRPr>
-            </a:pPr>
-            <a:r>
-              <a:t>1. EVALUAR / ORDENAR</a:t>
-            </a:r>
-          </a:p>
-          <a:p>
-            <a:pPr>
-              <a:spcBef>
-                <a:spcPts val="400"/>
-              </a:spcBef>
-              <a:defRPr sz="1400" b="1">
-                <a:solidFill>
-                  <a:srgbClr val="1E293B"/>
-                </a:solidFill>
-                <a:latin typeface="Segoe UI"/>
-              </a:defRPr>
-            </a:pPr>
-            <a:r>
-              <a:t>¿Qué municipio encaja con lo que pido?</a:t>
-            </a:r>
-          </a:p>
-          <a:p>
-            <a:pPr>
-              <a:spcBef>
-                <a:spcPts val="800"/>
-              </a:spcBef>
-              <a:defRPr sz="1100">
-                <a:solidFill>
-                  <a:srgbClr val="334155"/>
-                </a:solidFill>
-                <a:latin typeface="Segoe UI"/>
-              </a:defRPr>
-            </a:pPr>
-            <a:r>
-              <a:t>No necesita datos del futuro.</a:t>
-            </a:r>
-            <a:br/>
-            <a:r>
-              <a:t>Los datos observados ya existen hoy.</a:t>
-            </a:r>
-            <a:br/>
-            <a:br/>
-            <a:r>
-              <a:t>• Función: Reordenar municipios según preferencias declaradas.</a:t>
-            </a:r>
-            <a:br/>
-            <a:r>
-              <a:t>• Implementación: Ranking adaptativo por perfiles (C2 / M5).</a:t>
-            </a:r>
-          </a:p>
-        </p:txBody>
-      </p:sp>
-      <p:sp>
-        <p:nvSpPr>
-          <p:cNvPr id="8" name="Rounded Rectangle 7"/>
+          <p:cNvPr id="7" name="Rounded Rectangle 6"/>
           <p:cNvSpPr/>
           <p:nvPr/>
         </p:nvSpPr>
         <p:spPr>
           <a:xfrm>
-            <a:off x="4389120" y="1645920"/>
-            <a:ext cx="3291840" cy="4572000"/>
+            <a:off x="4270248" y="1463040"/>
+            <a:ext cx="3337560" cy="4754880"/>
           </a:xfrm>
           <a:prstGeom prst="roundRect">
             <a:avLst/>
@@ -8921,23 +8502,87 @@
           </a:fontRef>
         </p:style>
         <p:txBody>
-          <a:bodyPr rtlCol="0" anchor="ctr"/>
-          <a:lstStyle/>
-          <a:p>
-            <a:pPr algn="ctr"/>
-          </a:p>
-        </p:txBody>
-      </p:sp>
-      <p:sp>
-        <p:nvSpPr>
-          <p:cNvPr id="9" name="Rectangle 8"/>
+          <a:bodyPr rtlCol="0" anchor="ctr" wrap="square"/>
+          <a:lstStyle/>
+          <a:p>
+            <a:pPr algn="ctr">
+              <a:defRPr sz="1200" b="1">
+                <a:solidFill>
+                  <a:srgbClr val="B45309"/>
+                </a:solidFill>
+                <a:latin typeface="Segoe UI"/>
+              </a:defRPr>
+            </a:pPr>
+            <a:r>
+              <a:t>2. PREDECIR</a:t>
+            </a:r>
+          </a:p>
+          <a:p>
+            <a:pPr>
+              <a:spcBef>
+                <a:spcPts val="600"/>
+              </a:spcBef>
+              <a:defRPr sz="1200" b="1">
+                <a:solidFill>
+                  <a:srgbClr val="1E293B"/>
+                </a:solidFill>
+                <a:latin typeface="Segoe UI"/>
+              </a:defRPr>
+            </a:pPr>
+            <a:r>
+              <a:t>¿Qué pasará en este municipio en 2030?</a:t>
+            </a:r>
+          </a:p>
+          <a:p>
+            <a:pPr>
+              <a:spcBef>
+                <a:spcPts val="1200"/>
+              </a:spcBef>
+              <a:defRPr sz="1050">
+                <a:solidFill>
+                  <a:srgbClr val="334155"/>
+                </a:solidFill>
+                <a:latin typeface="Segoe UI"/>
+              </a:defRPr>
+            </a:pPr>
+            <a:r>
+              <a:t>• NECESITA:</a:t>
+            </a:r>
+            <a:br/>
+            <a:r>
+              <a:t>  Estimar una incógnita futura con series temporales.</a:t>
+            </a:r>
+            <a:br/>
+            <a:br/>
+            <a:r>
+              <a:t>• FUNCIÓN:</a:t>
+            </a:r>
+            <a:br/>
+            <a:r>
+              <a:t>  Anticipar población futura y año de saturación dotacional.</a:t>
+            </a:r>
+            <a:br/>
+            <a:br/>
+            <a:r>
+              <a:t>• IMPLEMENTACIÓN:</a:t>
+            </a:r>
+            <a:br/>
+            <a:r>
+              <a:t>  Modelo M3 (población 2030/2035 y año de colapso).</a:t>
+            </a:r>
+          </a:p>
+        </p:txBody>
+      </p:sp>
+      <p:sp>
+        <p:nvSpPr>
+          <p:cNvPr id="8" name="Rectangle 7"/>
           <p:cNvSpPr/>
           <p:nvPr/>
         </p:nvSpPr>
         <p:spPr>
           <a:xfrm>
-            <a:off x="4389120" y="1719072"/>
-            <a:ext cx="73152" cy="4425696"/>
+            <a:off x="4270248" y="1536192"/>
+            <a:ext cx="73152" cy="4608576"/>
           </a:xfrm>
           <a:prstGeom prst="rect">
             <a:avLst/>
@@ -8973,95 +8618,14 @@
       </p:sp>
       <p:sp>
         <p:nvSpPr>
-          <p:cNvPr id="10" name="TextBox 9"/>
-          <p:cNvSpPr txBox="1"/>
-          <p:nvPr/>
-        </p:nvSpPr>
-        <p:spPr>
-          <a:xfrm>
-            <a:off x="4572000" y="1828800"/>
-            <a:ext cx="2926080" cy="4114800"/>
-          </a:xfrm>
-          <a:prstGeom prst="rect">
-            <a:avLst/>
-          </a:prstGeom>
-          <a:noFill/>
-        </p:spPr>
-        <p:txBody>
-          <a:bodyPr wrap="square">
-            <a:spAutoFit/>
-          </a:bodyPr>
-          <a:lstStyle/>
-          <a:p>
-            <a:pPr>
-              <a:defRPr sz="1200" b="1">
-                <a:solidFill>
-                  <a:srgbClr val="B45309"/>
-                </a:solidFill>
-                <a:latin typeface="Segoe UI"/>
-              </a:defRPr>
-            </a:pPr>
-            <a:r>
-              <a:t>2. PREDECIR</a:t>
-            </a:r>
-          </a:p>
-          <a:p>
-            <a:pPr>
-              <a:spcBef>
-                <a:spcPts val="400"/>
-              </a:spcBef>
-              <a:defRPr sz="1400" b="1">
-                <a:solidFill>
-                  <a:srgbClr val="1E293B"/>
-                </a:solidFill>
-                <a:latin typeface="Segoe UI"/>
-              </a:defRPr>
-            </a:pPr>
-            <a:r>
-              <a:t>¿Qué pasará en este municipio en 2030?</a:t>
-            </a:r>
-          </a:p>
-          <a:p>
-            <a:pPr>
-              <a:spcBef>
-                <a:spcPts val="800"/>
-              </a:spcBef>
-              <a:defRPr sz="1100">
-                <a:solidFill>
-                  <a:srgbClr val="334155"/>
-                </a:solidFill>
-                <a:latin typeface="Segoe UI"/>
-              </a:defRPr>
-            </a:pPr>
-            <a:r>
-              <a:t>Sí necesita estimar una incógnita futura.</a:t>
-            </a:r>
-            <a:br/>
-            <a:r>
-              <a:t>Requiere modelado de series temporales.</a:t>
-            </a:r>
-            <a:br/>
-            <a:br/>
-            <a:r>
-              <a:t>• Función: Anticipar el horizonte demográfico y año de saturación.</a:t>
-            </a:r>
-            <a:br/>
-            <a:r>
-              <a:t>• Implementación: Modelo M3 (Población 2030/2035 y año de colapso).</a:t>
-            </a:r>
-          </a:p>
-        </p:txBody>
-      </p:sp>
-      <p:sp>
-        <p:nvSpPr>
-          <p:cNvPr id="11" name="Rounded Rectangle 10"/>
+          <p:cNvPr id="9" name="Rounded Rectangle 8"/>
           <p:cNvSpPr/>
           <p:nvPr/>
         </p:nvSpPr>
         <p:spPr>
           <a:xfrm>
-            <a:off x="8046720" y="1645920"/>
-            <a:ext cx="3291840" cy="4572000"/>
+            <a:off x="7808976" y="1463040"/>
+            <a:ext cx="3337560" cy="4754880"/>
           </a:xfrm>
           <a:prstGeom prst="roundRect">
             <a:avLst/>
@@ -9090,23 +8654,87 @@
           </a:fontRef>
         </p:style>
         <p:txBody>
-          <a:bodyPr rtlCol="0" anchor="ctr"/>
-          <a:lstStyle/>
-          <a:p>
-            <a:pPr algn="ctr"/>
-          </a:p>
-        </p:txBody>
-      </p:sp>
-      <p:sp>
-        <p:nvSpPr>
-          <p:cNvPr id="12" name="Rectangle 11"/>
+          <a:bodyPr rtlCol="0" anchor="ctr" wrap="square"/>
+          <a:lstStyle/>
+          <a:p>
+            <a:pPr algn="ctr">
+              <a:defRPr sz="1200" b="1">
+                <a:solidFill>
+                  <a:srgbClr val="166534"/>
+                </a:solidFill>
+                <a:latin typeface="Segoe UI"/>
+              </a:defRPr>
+            </a:pPr>
+            <a:r>
+              <a:t>3. SIMULAR</a:t>
+            </a:r>
+          </a:p>
+          <a:p>
+            <a:pPr>
+              <a:spcBef>
+                <a:spcPts val="600"/>
+              </a:spcBef>
+              <a:defRPr sz="1200" b="1">
+                <a:solidFill>
+                  <a:srgbClr val="1E293B"/>
+                </a:solidFill>
+                <a:latin typeface="Segoe UI"/>
+              </a:defRPr>
+            </a:pPr>
+            <a:r>
+              <a:t>¿Qué pasa si invierto X o llegan N personas?</a:t>
+            </a:r>
+          </a:p>
+          <a:p>
+            <a:pPr>
+              <a:spcBef>
+                <a:spcPts val="1200"/>
+              </a:spcBef>
+              <a:defRPr sz="1050">
+                <a:solidFill>
+                  <a:srgbClr val="334155"/>
+                </a:solidFill>
+                <a:latin typeface="Segoe UI"/>
+              </a:defRPr>
+            </a:pPr>
+            <a:r>
+              <a:t>• NECESITA:</a:t>
+            </a:r>
+            <a:br/>
+            <a:r>
+              <a:t>  No predice: recalcula con reglas normativas ante supuestos (what-if).</a:t>
+            </a:r>
+            <a:br/>
+            <a:br/>
+            <a:r>
+              <a:t>• FUNCIÓN:</a:t>
+            </a:r>
+            <a:br/>
+            <a:r>
+              <a:t>  Medir impacto presupuestario y cuellos de botella.</a:t>
+            </a:r>
+            <a:br/>
+            <a:br/>
+            <a:r>
+              <a:t>• IMPLEMENTACIÓN:</a:t>
+            </a:r>
+            <a:br/>
+            <a:r>
+              <a:t>  Simulador what-if y optimizador Simplex.</a:t>
+            </a:r>
+          </a:p>
+        </p:txBody>
+      </p:sp>
+      <p:sp>
+        <p:nvSpPr>
+          <p:cNvPr id="10" name="Rectangle 9"/>
           <p:cNvSpPr/>
           <p:nvPr/>
         </p:nvSpPr>
         <p:spPr>
           <a:xfrm>
-            <a:off x="8046720" y="1719072"/>
-            <a:ext cx="73152" cy="4425696"/>
+            <a:off x="7808976" y="1536192"/>
+            <a:ext cx="73152" cy="4608576"/>
           </a:xfrm>
           <a:prstGeom prst="rect">
             <a:avLst/>
@@ -9137,87 +8765,6 @@
           <a:lstStyle/>
           <a:p>
             <a:pPr algn="ctr"/>
-          </a:p>
-        </p:txBody>
-      </p:sp>
-      <p:sp>
-        <p:nvSpPr>
-          <p:cNvPr id="13" name="TextBox 12"/>
-          <p:cNvSpPr txBox="1"/>
-          <p:nvPr/>
-        </p:nvSpPr>
-        <p:spPr>
-          <a:xfrm>
-            <a:off x="8229600" y="1828800"/>
-            <a:ext cx="2926080" cy="4114800"/>
-          </a:xfrm>
-          <a:prstGeom prst="rect">
-            <a:avLst/>
-          </a:prstGeom>
-          <a:noFill/>
-        </p:spPr>
-        <p:txBody>
-          <a:bodyPr wrap="square">
-            <a:spAutoFit/>
-          </a:bodyPr>
-          <a:lstStyle/>
-          <a:p>
-            <a:pPr>
-              <a:defRPr sz="1200" b="1">
-                <a:solidFill>
-                  <a:srgbClr val="166534"/>
-                </a:solidFill>
-                <a:latin typeface="Segoe UI"/>
-              </a:defRPr>
-            </a:pPr>
-            <a:r>
-              <a:t>3. SIMULAR</a:t>
-            </a:r>
-          </a:p>
-          <a:p>
-            <a:pPr>
-              <a:spcBef>
-                <a:spcPts val="400"/>
-              </a:spcBef>
-              <a:defRPr sz="1400" b="1">
-                <a:solidFill>
-                  <a:srgbClr val="1E293B"/>
-                </a:solidFill>
-                <a:latin typeface="Segoe UI"/>
-              </a:defRPr>
-            </a:pPr>
-            <a:r>
-              <a:t>¿Qué pasa si invierto X o llegan N personas?</a:t>
-            </a:r>
-          </a:p>
-          <a:p>
-            <a:pPr>
-              <a:spcBef>
-                <a:spcPts val="800"/>
-              </a:spcBef>
-              <a:defRPr sz="1100">
-                <a:solidFill>
-                  <a:srgbClr val="334155"/>
-                </a:solidFill>
-                <a:latin typeface="Segoe UI"/>
-              </a:defRPr>
-            </a:pPr>
-            <a:r>
-              <a:t>No predice: recalcula con reglas normativas.</a:t>
-            </a:r>
-            <a:br/>
-            <a:r>
-              <a:t>Responde a supuestos hipotéticos ('What-If').</a:t>
-            </a:r>
-            <a:br/>
-            <a:br/>
-            <a:r>
-              <a:t>• Función: Medir impacto presupuestario y cuellos de botella.</a:t>
-            </a:r>
-            <a:br/>
-            <a:r>
-              <a:t>• Implementación: Simulador What-If y Optimizador Simplex.</a:t>
-            </a:r>
           </a:p>
         </p:txBody>
       </p:sp>
@@ -9313,7 +8860,7 @@
               </a:defRPr>
             </a:pPr>
             <a:r>
-              <a:t>6. VALIDACIÓN CIENTÍFICA</a:t>
+              <a:t>6  ·  VALIDACIÓN CIENTÍFICA</a:t>
             </a:r>
           </a:p>
         </p:txBody>
@@ -9349,7 +8896,7 @@
               </a:defRPr>
             </a:pPr>
             <a:r>
-              <a:t>¿Cómo Sabemos que Nuestro Modelo ICA es Bueno?</a:t>
+              <a:t>¿Cómo sabemos que el modelo es bueno?</a:t>
             </a:r>
           </a:p>
           <a:p>
@@ -9365,7 +8912,7 @@
               </a:defRPr>
             </a:pPr>
             <a:r>
-              <a:t>Medimos la capacidad de acogida y la contrastamos empíricamente mediante backtest</a:t>
+              <a:t>Proyectamos de 2020 a 2025 sin ver el dato real y lo comparamos con el padrón oficial</a:t>
             </a:r>
           </a:p>
         </p:txBody>
@@ -9378,8 +8925,8 @@
         </p:nvSpPr>
         <p:spPr>
           <a:xfrm>
-            <a:off x="731520" y="1645920"/>
-            <a:ext cx="5212080" cy="4572000"/>
+            <a:off x="731520" y="1463040"/>
+            <a:ext cx="5120640" cy="4754880"/>
           </a:xfrm>
           <a:prstGeom prst="roundRect">
             <a:avLst/>
@@ -9408,10 +8955,100 @@
           </a:fontRef>
         </p:style>
         <p:txBody>
-          <a:bodyPr rtlCol="0" anchor="ctr"/>
-          <a:lstStyle/>
-          <a:p>
-            <a:pPr algn="ctr"/>
+          <a:bodyPr rtlCol="0" anchor="ctr" wrap="square"/>
+          <a:lstStyle/>
+          <a:p>
+            <a:pPr algn="ctr">
+              <a:defRPr sz="1200" b="1">
+                <a:solidFill>
+                  <a:srgbClr val="1E40AF"/>
+                </a:solidFill>
+                <a:latin typeface="Segoe UI"/>
+              </a:defRPr>
+            </a:pPr>
+            <a:r>
+              <a:t>MÉTODO DE VALIDACIÓN (BACKTESTING 5 PASOS)</a:t>
+            </a:r>
+          </a:p>
+          <a:p>
+            <a:pPr>
+              <a:spcBef>
+                <a:spcPts val="800"/>
+              </a:spcBef>
+              <a:defRPr sz="1050">
+                <a:solidFill>
+                  <a:srgbClr val="334155"/>
+                </a:solidFill>
+                <a:latin typeface="Segoe UI"/>
+              </a:defRPr>
+            </a:pPr>
+            <a:r>
+              <a:t>1. Población real de 2015 y 2020 (INE)</a:t>
+            </a:r>
+            <a:br/>
+            <a:r>
+              <a:t>2. Tasa anual geométrica de crecimiento</a:t>
+            </a:r>
+            <a:br/>
+            <a:r>
+              <a:t>3. Proyección a 2025 sin ver el dato real</a:t>
+            </a:r>
+            <a:br/>
+            <a:r>
+              <a:t>4. Contraste con el padrón oficial de 2025</a:t>
+            </a:r>
+            <a:br/>
+            <a:r>
+              <a:t>5. Medición del error en porcentaje y habitantes</a:t>
+            </a:r>
+          </a:p>
+          <a:p>
+            <a:pPr>
+              <a:spcBef>
+                <a:spcPts val="1400"/>
+              </a:spcBef>
+              <a:defRPr sz="1600" b="1">
+                <a:solidFill>
+                  <a:srgbClr val="166534"/>
+                </a:solidFill>
+                <a:latin typeface="Segoe UI"/>
+              </a:defRPr>
+            </a:pPr>
+            <a:r>
+              <a:t>1,55%  error mediano a 5 años</a:t>
+            </a:r>
+          </a:p>
+          <a:p>
+            <a:pPr>
+              <a:spcBef>
+                <a:spcPts val="200"/>
+              </a:spcBef>
+              <a:defRPr sz="1100">
+                <a:solidFill>
+                  <a:srgbClr val="64748B"/>
+                </a:solidFill>
+                <a:latin typeface="Segoe UI"/>
+              </a:defRPr>
+            </a:pPr>
+            <a:r>
+              <a:t>7,02%  error mediano si se asume que nada cambia (inercial)</a:t>
+            </a:r>
+          </a:p>
+          <a:p>
+            <a:pPr>
+              <a:spcBef>
+                <a:spcPts val="1000"/>
+              </a:spcBef>
+              <a:defRPr sz="1050" b="1">
+                <a:solidFill>
+                  <a:srgbClr val="1E293B"/>
+                </a:solidFill>
+                <a:latin typeface="Segoe UI"/>
+              </a:defRPr>
+            </a:pPr>
+            <a:r>
+              <a:t>La mitad de los municipios queda por debajo del 1,55%. En uno de 5.000 habitantes, el desvío típico ronda las 78 personas.</a:t>
+            </a:r>
           </a:p>
         </p:txBody>
       </p:sp>
@@ -9423,8 +9060,8 @@
         </p:nvSpPr>
         <p:spPr>
           <a:xfrm>
-            <a:off x="731520" y="1719072"/>
-            <a:ext cx="73152" cy="4425696"/>
+            <a:off x="731520" y="1536192"/>
+            <a:ext cx="73152" cy="4608576"/>
           </a:xfrm>
           <a:prstGeom prst="rect">
             <a:avLst/>
@@ -9460,146 +9097,14 @@
       </p:sp>
       <p:sp>
         <p:nvSpPr>
-          <p:cNvPr id="7" name="TextBox 6"/>
-          <p:cNvSpPr txBox="1"/>
-          <p:nvPr/>
-        </p:nvSpPr>
-        <p:spPr>
-          <a:xfrm>
-            <a:off x="914400" y="1828800"/>
-            <a:ext cx="4846320" cy="4114800"/>
-          </a:xfrm>
-          <a:prstGeom prst="rect">
-            <a:avLst/>
-          </a:prstGeom>
-          <a:noFill/>
-        </p:spPr>
-        <p:txBody>
-          <a:bodyPr wrap="square">
-            <a:spAutoFit/>
-          </a:bodyPr>
-          <a:lstStyle/>
-          <a:p>
-            <a:pPr>
-              <a:defRPr sz="1100" b="1">
-                <a:solidFill>
-                  <a:srgbClr val="1E40AF"/>
-                </a:solidFill>
-                <a:latin typeface="Segoe UI"/>
-              </a:defRPr>
-            </a:pPr>
-            <a:r>
-              <a:t>MÉTODO DE VALIDACIÓN POR BACKTESTING</a:t>
-            </a:r>
-          </a:p>
-          <a:p>
-            <a:pPr>
-              <a:spcBef>
-                <a:spcPts val="400"/>
-              </a:spcBef>
-              <a:defRPr sz="1100">
-                <a:solidFill>
-                  <a:srgbClr val="334155"/>
-                </a:solidFill>
-                <a:latin typeface="Segoe UI"/>
-              </a:defRPr>
-            </a:pPr>
-            <a:r>
-              <a:t>• 1. Datos Base: Recogemos la población real de 2015 y 2020 de cada municipio (INE).</a:t>
-            </a:r>
-          </a:p>
-          <a:p>
-            <a:pPr>
-              <a:spcBef>
-                <a:spcPts val="400"/>
-              </a:spcBef>
-              <a:defRPr sz="1100">
-                <a:solidFill>
-                  <a:srgbClr val="334155"/>
-                </a:solidFill>
-                <a:latin typeface="Segoe UI"/>
-              </a:defRPr>
-            </a:pPr>
-            <a:r>
-              <a:t>• 2. Tasa Tendencial: Calculamos la tasa anual geométrica de crecimiento intercensal.</a:t>
-            </a:r>
-          </a:p>
-          <a:p>
-            <a:pPr>
-              <a:spcBef>
-                <a:spcPts val="400"/>
-              </a:spcBef>
-              <a:defRPr sz="1100">
-                <a:solidFill>
-                  <a:srgbClr val="334155"/>
-                </a:solidFill>
-                <a:latin typeface="Segoe UI"/>
-              </a:defRPr>
-            </a:pPr>
-            <a:r>
-              <a:t>• 3. Proyección a 5 Años: Proyectamos la evolución hasta 2025 sin conocer el dato real.</a:t>
-            </a:r>
-          </a:p>
-          <a:p>
-            <a:pPr>
-              <a:spcBef>
-                <a:spcPts val="400"/>
-              </a:spcBef>
-              <a:defRPr sz="1100">
-                <a:solidFill>
-                  <a:srgbClr val="334155"/>
-                </a:solidFill>
-                <a:latin typeface="Segoe UI"/>
-              </a:defRPr>
-            </a:pPr>
-            <a:r>
-              <a:t>• 4. Contraste Empírico: Comparamos la predicción contra el padrón oficial real de 2025.</a:t>
-            </a:r>
-          </a:p>
-          <a:p>
-            <a:pPr>
-              <a:spcBef>
-                <a:spcPts val="400"/>
-              </a:spcBef>
-              <a:defRPr sz="1100">
-                <a:solidFill>
-                  <a:srgbClr val="334155"/>
-                </a:solidFill>
-                <a:latin typeface="Segoe UI"/>
-              </a:defRPr>
-            </a:pPr>
-            <a:r>
-              <a:t>• 5. Medición del Desvío: Evaluamos el error porcentual y el desvío absoluto en habitantes.</a:t>
-            </a:r>
-          </a:p>
-          <a:p>
-            <a:pPr>
-              <a:spcBef>
-                <a:spcPts val="800"/>
-              </a:spcBef>
-              <a:defRPr sz="1100" b="1">
-                <a:solidFill>
-                  <a:srgbClr val="166534"/>
-                </a:solidFill>
-                <a:latin typeface="Segoe UI"/>
-              </a:defRPr>
-            </a:pPr>
-            <a:r>
-              <a:t>Resultado Global: El modelo demográfico acierta con un error mediano del 1,55% a 5 años (frente al 7,02% de asumir que nada cambia). En un municipio de 5.000 habitantes, la predicción suele desviarse únicamente unas 78 personas.</a:t>
-            </a:r>
-          </a:p>
-        </p:txBody>
-      </p:sp>
-      <p:sp>
-        <p:nvSpPr>
-          <p:cNvPr id="8" name="Rounded Rectangle 7"/>
+          <p:cNvPr id="7" name="Rounded Rectangle 6"/>
           <p:cNvSpPr/>
           <p:nvPr/>
         </p:nvSpPr>
         <p:spPr>
           <a:xfrm>
-            <a:off x="6217920" y="1645920"/>
-            <a:ext cx="5212080" cy="4572000"/>
+            <a:off x="6309360" y="1463040"/>
+            <a:ext cx="5120640" cy="4754880"/>
           </a:xfrm>
           <a:prstGeom prst="roundRect">
             <a:avLst/>
@@ -9628,29 +9133,103 @@
           </a:fontRef>
         </p:style>
         <p:txBody>
-          <a:bodyPr rtlCol="0" anchor="ctr"/>
-          <a:lstStyle/>
-          <a:p>
-            <a:pPr algn="ctr"/>
-          </a:p>
-        </p:txBody>
-      </p:sp>
-      <p:sp>
-        <p:nvSpPr>
-          <p:cNvPr id="9" name="Rectangle 8"/>
+          <a:bodyPr rtlCol="0" anchor="ctr" wrap="square"/>
+          <a:lstStyle/>
+          <a:p>
+            <a:pPr algn="ctr">
+              <a:defRPr sz="1200" b="1">
+                <a:solidFill>
+                  <a:srgbClr val="166534"/>
+                </a:solidFill>
+                <a:latin typeface="Segoe UI"/>
+              </a:defRPr>
+            </a:pPr>
+            <a:r>
+              <a:t>ERROR DE LA PROYECCIÓN 2020 → 2025 (%)</a:t>
+            </a:r>
+          </a:p>
+          <a:p>
+            <a:pPr>
+              <a:spcBef>
+                <a:spcPts val="800"/>
+              </a:spcBef>
+              <a:defRPr sz="1000">
+                <a:solidFill>
+                  <a:srgbClr val="1E293B"/>
+                </a:solidFill>
+                <a:latin typeface="Consolas"/>
+              </a:defRPr>
+            </a:pPr>
+            <a:r>
+              <a:t>Municipio               Predicho   Real     Desvío</a:t>
+            </a:r>
+            <a:br/>
+            <a:r>
+              <a:t>--------------------------------------------------</a:t>
+            </a:r>
+            <a:br/>
+            <a:r>
+              <a:t>Robledo de Chavela        4.815   4.818     −3  (0,06%)</a:t>
+            </a:r>
+            <a:br/>
+            <a:r>
+              <a:t>Manzanares el Real        9.610   9.648    −38  (0,39%)</a:t>
+            </a:r>
+            <a:br/>
+            <a:r>
+              <a:t>Buitrago del Lozoya       2.058   2.034    +24  (1,17%)</a:t>
+            </a:r>
+            <a:br/>
+            <a:r>
+              <a:t>Meco                     16.219  15.922   +297  (1,86%)</a:t>
+            </a:r>
+            <a:br/>
+            <a:r>
+              <a:t>Chinchón                  5.390   5.800   −410  (7,07%)</a:t>
+            </a:r>
+            <a:br/>
+            <a:r>
+              <a:t>Villa del Prado           6.918   7.743   −825 (10,66%)</a:t>
+            </a:r>
+            <a:br/>
+            <a:r>
+              <a:t>Montejo de la Sierra        354     404    −50 (12,31%)</a:t>
+            </a:r>
+          </a:p>
+          <a:p>
+            <a:pPr>
+              <a:spcBef>
+                <a:spcPts val="1400"/>
+              </a:spcBef>
+              <a:defRPr sz="1050" b="1">
+                <a:solidFill>
+                  <a:srgbClr val="334155"/>
+                </a:solidFill>
+                <a:latin typeface="Segoe UI"/>
+              </a:defRPr>
+            </a:pPr>
+            <a:r>
+              <a:t>Conclusión: Precisión milimétrica en municipios estables y alerta cuantitativa anticipada en municipios sobretensionados.</a:t>
+            </a:r>
+          </a:p>
+        </p:txBody>
+      </p:sp>
+      <p:sp>
+        <p:nvSpPr>
+          <p:cNvPr id="8" name="Rectangle 7"/>
           <p:cNvSpPr/>
           <p:nvPr/>
         </p:nvSpPr>
         <p:spPr>
           <a:xfrm>
-            <a:off x="6217920" y="1719072"/>
-            <a:ext cx="73152" cy="4425696"/>
+            <a:off x="6309360" y="1536192"/>
+            <a:ext cx="73152" cy="4608576"/>
           </a:xfrm>
           <a:prstGeom prst="rect">
             <a:avLst/>
           </a:prstGeom>
           <a:solidFill>
-            <a:srgbClr val="1E293B"/>
+            <a:srgbClr val="166534"/>
           </a:solidFill>
           <a:ln>
             <a:noFill/>
@@ -9675,170 +9254,6 @@
           <a:lstStyle/>
           <a:p>
             <a:pPr algn="ctr"/>
-          </a:p>
-        </p:txBody>
-      </p:sp>
-      <p:sp>
-        <p:nvSpPr>
-          <p:cNvPr id="10" name="TextBox 9"/>
-          <p:cNvSpPr txBox="1"/>
-          <p:nvPr/>
-        </p:nvSpPr>
-        <p:spPr>
-          <a:xfrm>
-            <a:off x="6400800" y="1828800"/>
-            <a:ext cx="4846320" cy="4114800"/>
-          </a:xfrm>
-          <a:prstGeom prst="rect">
-            <a:avLst/>
-          </a:prstGeom>
-          <a:noFill/>
-        </p:spPr>
-        <p:txBody>
-          <a:bodyPr wrap="square">
-            <a:spAutoFit/>
-          </a:bodyPr>
-          <a:lstStyle/>
-          <a:p>
-            <a:pPr>
-              <a:defRPr sz="1100" b="1">
-                <a:solidFill>
-                  <a:srgbClr val="1E293B"/>
-                </a:solidFill>
-                <a:latin typeface="Segoe UI"/>
-              </a:defRPr>
-            </a:pPr>
-            <a:r>
-              <a:t>EVALUACIÓN EMPÍRICA POR MUNICIPIOS (2020 → 2025)</a:t>
-            </a:r>
-          </a:p>
-          <a:p>
-            <a:pPr>
-              <a:spcBef>
-                <a:spcPts val="300"/>
-              </a:spcBef>
-              <a:defRPr sz="1050">
-                <a:solidFill>
-                  <a:srgbClr val="334155"/>
-                </a:solidFill>
-                <a:latin typeface="Segoe UI"/>
-              </a:defRPr>
-            </a:pPr>
-            <a:r>
-              <a:t>• Robledo de Chavela: Pred 4.815 vs Real 4.818 → Error: −3 hab. (0,06%)</a:t>
-            </a:r>
-          </a:p>
-          <a:p>
-            <a:pPr>
-              <a:spcBef>
-                <a:spcPts val="300"/>
-              </a:spcBef>
-              <a:defRPr sz="1050">
-                <a:solidFill>
-                  <a:srgbClr val="334155"/>
-                </a:solidFill>
-                <a:latin typeface="Segoe UI"/>
-              </a:defRPr>
-            </a:pPr>
-            <a:r>
-              <a:t>• Manzanares el Real: Pred 9.610 vs Real 9.648 → Error: −38 hab. (0,39%)</a:t>
-            </a:r>
-          </a:p>
-          <a:p>
-            <a:pPr>
-              <a:spcBef>
-                <a:spcPts val="300"/>
-              </a:spcBef>
-              <a:defRPr sz="1050">
-                <a:solidFill>
-                  <a:srgbClr val="334155"/>
-                </a:solidFill>
-                <a:latin typeface="Segoe UI"/>
-              </a:defRPr>
-            </a:pPr>
-            <a:r>
-              <a:t>• Buitrago del Lozoya: Pred 2.058 vs Real 2.034 → Error: +24 hab. (1,17%)</a:t>
-            </a:r>
-          </a:p>
-          <a:p>
-            <a:pPr>
-              <a:spcBef>
-                <a:spcPts val="300"/>
-              </a:spcBef>
-              <a:defRPr sz="1050">
-                <a:solidFill>
-                  <a:srgbClr val="334155"/>
-                </a:solidFill>
-                <a:latin typeface="Segoe UI"/>
-              </a:defRPr>
-            </a:pPr>
-            <a:r>
-              <a:t>• Meco: Pred 16.219 vs Real 15.922 → Error: +297 hab. (1,86%)</a:t>
-            </a:r>
-          </a:p>
-          <a:p>
-            <a:pPr>
-              <a:spcBef>
-                <a:spcPts val="300"/>
-              </a:spcBef>
-              <a:defRPr sz="1050">
-                <a:solidFill>
-                  <a:srgbClr val="334155"/>
-                </a:solidFill>
-                <a:latin typeface="Segoe UI"/>
-              </a:defRPr>
-            </a:pPr>
-            <a:r>
-              <a:t>• Chinchón: Pred 5.390 vs Real 5.800 → Error: −410 hab. (7,07%)</a:t>
-            </a:r>
-          </a:p>
-          <a:p>
-            <a:pPr>
-              <a:spcBef>
-                <a:spcPts val="300"/>
-              </a:spcBef>
-              <a:defRPr sz="1050">
-                <a:solidFill>
-                  <a:srgbClr val="334155"/>
-                </a:solidFill>
-                <a:latin typeface="Segoe UI"/>
-              </a:defRPr>
-            </a:pPr>
-            <a:r>
-              <a:t>• Villa del Prado: Pred 6.918 vs Real 7.743 → Error: −825 hab. (10,66%)</a:t>
-            </a:r>
-          </a:p>
-          <a:p>
-            <a:pPr>
-              <a:spcBef>
-                <a:spcPts val="300"/>
-              </a:spcBef>
-              <a:defRPr sz="1050">
-                <a:solidFill>
-                  <a:srgbClr val="334155"/>
-                </a:solidFill>
-                <a:latin typeface="Segoe UI"/>
-              </a:defRPr>
-            </a:pPr>
-            <a:r>
-              <a:t>• Montejo de la Sierra: Pred 354 vs Real 404 → Error: −50 hab. (12,31%)</a:t>
-            </a:r>
-          </a:p>
-          <a:p>
-            <a:pPr>
-              <a:spcBef>
-                <a:spcPts val="600"/>
-              </a:spcBef>
-              <a:defRPr sz="1000">
-                <a:solidFill>
-                  <a:srgbClr val="64748B"/>
-                </a:solidFill>
-                <a:latin typeface="Segoe UI"/>
-              </a:defRPr>
-            </a:pPr>
-            <a:r>
-              <a:t>Conclusión: La mitad de los municipios analizados presentan un desvío inferior al 1,55%, demostrando una calibración robusta para la planificación comarcal.</a:t>
-            </a:r>
           </a:p>
         </p:txBody>
       </p:sp>
@@ -9934,7 +9349,7 @@
               </a:defRPr>
             </a:pPr>
             <a:r>
-              <a:t>7. JUSTIFICACIÓN DEL PROBLEMA</a:t>
+              <a:t>7  ·  JUSTIFICACIÓN DEL PROBLEMA</a:t>
             </a:r>
           </a:p>
         </p:txBody>
@@ -9970,7 +9385,7 @@
               </a:defRPr>
             </a:pPr>
             <a:r>
-              <a:t>La Predicción Honesta: ¿El ICA Anticipa el Crecimiento Actual?</a:t>
+              <a:t>El ICA mide capacidad, no atractivo</a:t>
             </a:r>
           </a:p>
           <a:p>
@@ -9986,7 +9401,7 @@
               </a:defRPr>
             </a:pPr>
             <a:r>
-              <a:t>El ICA mide capacidad de acogida, no atractivo demográfico: la paradoja que justifica la herramienta</a:t>
+              <a:t>Esa paradoja justifica la herramienta: crece más quien menos capacidad tiene</a:t>
             </a:r>
           </a:p>
         </p:txBody>
@@ -9999,8 +9414,8 @@
         </p:nvSpPr>
         <p:spPr>
           <a:xfrm>
-            <a:off x="731520" y="1645920"/>
-            <a:ext cx="5212080" cy="4572000"/>
+            <a:off x="731520" y="1463040"/>
+            <a:ext cx="5120640" cy="4754880"/>
           </a:xfrm>
           <a:prstGeom prst="roundRect">
             <a:avLst/>
@@ -10029,10 +9444,70 @@
           </a:fontRef>
         </p:style>
         <p:txBody>
-          <a:bodyPr rtlCol="0" anchor="ctr"/>
-          <a:lstStyle/>
-          <a:p>
-            <a:pPr algn="ctr"/>
+          <a:bodyPr rtlCol="0" anchor="ctr" wrap="square"/>
+          <a:lstStyle/>
+          <a:p>
+            <a:pPr algn="ctr">
+              <a:defRPr sz="1200" b="1">
+                <a:solidFill>
+                  <a:srgbClr val="B45309"/>
+                </a:solidFill>
+                <a:latin typeface="Segoe UI"/>
+              </a:defRPr>
+            </a:pPr>
+            <a:r>
+              <a:t>EL LÍMITE, DICHO CON HONESTIDAD</a:t>
+            </a:r>
+          </a:p>
+          <a:p>
+            <a:pPr>
+              <a:spcBef>
+                <a:spcPts val="600"/>
+              </a:spcBef>
+              <a:defRPr sz="3600" b="1">
+                <a:solidFill>
+                  <a:srgbClr val="1E293B"/>
+                </a:solidFill>
+                <a:latin typeface="Segoe UI"/>
+              </a:defRPr>
+            </a:pPr>
+            <a:r>
+              <a:t>ρ = 0,10</a:t>
+            </a:r>
+          </a:p>
+          <a:p>
+            <a:pPr>
+              <a:defRPr sz="1050" b="1">
+                <a:solidFill>
+                  <a:srgbClr val="64748B"/>
+                </a:solidFill>
+                <a:latin typeface="Segoe UI"/>
+              </a:defRPr>
+            </a:pPr>
+            <a:r>
+              <a:t>Correlación entre el ICA y el crecimiento espontáneo: no significativa.</a:t>
+            </a:r>
+          </a:p>
+          <a:p>
+            <a:pPr>
+              <a:spcBef>
+                <a:spcPts val="1000"/>
+              </a:spcBef>
+              <a:defRPr sz="1050">
+                <a:solidFill>
+                  <a:srgbClr val="334155"/>
+                </a:solidFill>
+                <a:latin typeface="Segoe UI"/>
+              </a:defRPr>
+            </a:pPr>
+            <a:r>
+              <a:t>• El ICA mide dónde hay infraestructura disponible para crecer sin colapsar servicios esenciales.</a:t>
+            </a:r>
+            <a:br/>
+            <a:br/>
+            <a:r>
+              <a:t>• La gente no se muda espontáneamente adonde sobran plazas escolares o médicos, sino adonde hay alquiler barato o inercia urbana metropolitana.</a:t>
+            </a:r>
           </a:p>
         </p:txBody>
       </p:sp>
@@ -10044,8 +9519,8 @@
         </p:nvSpPr>
         <p:spPr>
           <a:xfrm>
-            <a:off x="731520" y="1719072"/>
-            <a:ext cx="73152" cy="4425696"/>
+            <a:off x="731520" y="1536192"/>
+            <a:ext cx="73152" cy="4608576"/>
           </a:xfrm>
           <a:prstGeom prst="rect">
             <a:avLst/>
@@ -10081,95 +9556,14 @@
       </p:sp>
       <p:sp>
         <p:nvSpPr>
-          <p:cNvPr id="7" name="TextBox 6"/>
-          <p:cNvSpPr txBox="1"/>
-          <p:nvPr/>
-        </p:nvSpPr>
-        <p:spPr>
-          <a:xfrm>
-            <a:off x="914400" y="1828800"/>
-            <a:ext cx="4846320" cy="4114800"/>
-          </a:xfrm>
-          <a:prstGeom prst="rect">
-            <a:avLst/>
-          </a:prstGeom>
-          <a:noFill/>
-        </p:spPr>
-        <p:txBody>
-          <a:bodyPr wrap="square">
-            <a:spAutoFit/>
-          </a:bodyPr>
-          <a:lstStyle/>
-          <a:p>
-            <a:pPr>
-              <a:defRPr sz="1100" b="1">
-                <a:solidFill>
-                  <a:srgbClr val="B45309"/>
-                </a:solidFill>
-                <a:latin typeface="Segoe UI"/>
-              </a:defRPr>
-            </a:pPr>
-            <a:r>
-              <a:t>EL LÍMITE HONESTO Y DOCUMENTADO</a:t>
-            </a:r>
-          </a:p>
-          <a:p>
-            <a:pPr>
-              <a:spcBef>
-                <a:spcPts val="400"/>
-              </a:spcBef>
-              <a:defRPr sz="1400" b="1">
-                <a:solidFill>
-                  <a:srgbClr val="1E293B"/>
-                </a:solidFill>
-                <a:latin typeface="Segoe UI"/>
-              </a:defRPr>
-            </a:pPr>
-            <a:r>
-              <a:t>«El índice NO predice el crecimiento espontáneo (ρ = 0,10, no significativo).»</a:t>
-            </a:r>
-          </a:p>
-          <a:p>
-            <a:pPr>
-              <a:spcBef>
-                <a:spcPts val="600"/>
-              </a:spcBef>
-              <a:defRPr sz="1100">
-                <a:solidFill>
-                  <a:srgbClr val="334155"/>
-                </a:solidFill>
-                <a:latin typeface="Segoe UI"/>
-              </a:defRPr>
-            </a:pPr>
-            <a:r>
-              <a:t>• ¿Qué significa esto?</a:t>
-            </a:r>
-            <a:br/>
-            <a:r>
-              <a:t>El ICA mide dónde hay infraestructura disponible para crecer sin colapsar servicios. La gente no se muda espontáneamente donde hay plazas escolares libres, sino donde encuentra alquiler barato o inercia urbana.</a:t>
-            </a:r>
-            <a:br/>
-            <a:br/>
-            <a:r>
-              <a:t>• ¿Se puede predecir el crecimiento?</a:t>
-            </a:r>
-            <a:br/>
-            <a:r>
-              <a:t>Sí, combinando el ICA con variables de mercado (catastro, migración, brecha de precios) para estimar la probabilidad de absorción futura.</a:t>
-            </a:r>
-          </a:p>
-        </p:txBody>
-      </p:sp>
-      <p:sp>
-        <p:nvSpPr>
-          <p:cNvPr id="8" name="Rounded Rectangle 7"/>
+          <p:cNvPr id="7" name="Rounded Rectangle 6"/>
           <p:cNvSpPr/>
           <p:nvPr/>
         </p:nvSpPr>
         <p:spPr>
           <a:xfrm>
-            <a:off x="6217920" y="1645920"/>
-            <a:ext cx="5212080" cy="4572000"/>
+            <a:off x="6309360" y="1463040"/>
+            <a:ext cx="5120640" cy="4754880"/>
           </a:xfrm>
           <a:prstGeom prst="roundRect">
             <a:avLst/>
@@ -10198,23 +9592,107 @@
           </a:fontRef>
         </p:style>
         <p:txBody>
-          <a:bodyPr rtlCol="0" anchor="ctr"/>
-          <a:lstStyle/>
-          <a:p>
-            <a:pPr algn="ctr"/>
-          </a:p>
-        </p:txBody>
-      </p:sp>
-      <p:sp>
-        <p:nvSpPr>
-          <p:cNvPr id="9" name="Rectangle 8"/>
+          <a:bodyPr rtlCol="0" anchor="ctr" wrap="square"/>
+          <a:lstStyle/>
+          <a:p>
+            <a:pPr algn="ctr">
+              <a:defRPr sz="1200" b="1">
+                <a:solidFill>
+                  <a:srgbClr val="C8102E"/>
+                </a:solidFill>
+                <a:latin typeface="Segoe UI"/>
+              </a:defRPr>
+            </a:pPr>
+            <a:r>
+              <a:t>LOS QUE MÁS CRECEN, MENOS CAPACIDAD TIENEN</a:t>
+            </a:r>
+          </a:p>
+          <a:p>
+            <a:pPr>
+              <a:spcBef>
+                <a:spcPts val="800"/>
+              </a:spcBef>
+              <a:defRPr sz="1300" b="1">
+                <a:solidFill>
+                  <a:srgbClr val="1E293B"/>
+                </a:solidFill>
+                <a:latin typeface="Segoe UI"/>
+              </a:defRPr>
+            </a:pPr>
+            <a:r>
+              <a:t>+16,2% (2020 a 2025)  ·  Villa del Prado</a:t>
+            </a:r>
+          </a:p>
+          <a:p>
+            <a:pPr>
+              <a:defRPr sz="1000">
+                <a:solidFill>
+                  <a:srgbClr val="334155"/>
+                </a:solidFill>
+                <a:latin typeface="Segoe UI"/>
+              </a:defRPr>
+            </a:pPr>
+            <a:r>
+              <a:t>Capacidad BAJA (ICA 36,9). Centro de salud y consultorios sobrecargados.</a:t>
+            </a:r>
+          </a:p>
+          <a:p>
+            <a:pPr>
+              <a:spcBef>
+                <a:spcPts val="1200"/>
+              </a:spcBef>
+              <a:defRPr sz="1300" b="1">
+                <a:solidFill>
+                  <a:srgbClr val="1E293B"/>
+                </a:solidFill>
+                <a:latin typeface="Segoe UI"/>
+              </a:defRPr>
+            </a:pPr>
+            <a:r>
+              <a:t>+11,2% (31.979 habitantes)  ·  Navalcarnero</a:t>
+            </a:r>
+          </a:p>
+          <a:p>
+            <a:pPr>
+              <a:defRPr sz="1000">
+                <a:solidFill>
+                  <a:srgbClr val="334155"/>
+                </a:solidFill>
+                <a:latin typeface="Segoe UI"/>
+              </a:defRPr>
+            </a:pPr>
+            <a:r>
+              <a:t>ALERTA ROJA (ICA 24,5), con 1.667 hab/médico y ocupación escolar al 95,2%.</a:t>
+            </a:r>
+          </a:p>
+          <a:p>
+            <a:pPr>
+              <a:spcBef>
+                <a:spcPts val="1400"/>
+              </a:spcBef>
+              <a:defRPr sz="1050" b="1">
+                <a:solidFill>
+                  <a:srgbClr val="C8102E"/>
+                </a:solidFill>
+                <a:latin typeface="Segoe UI"/>
+              </a:defRPr>
+            </a:pPr>
+            <a:r>
+              <a:t>Sin intervención pública planificada, la inercia seguirá llenando municipios que ya están saturados. MadridNext reorienta ese flujo hacia donde hay capacidad real.</a:t>
+            </a:r>
+          </a:p>
+        </p:txBody>
+      </p:sp>
+      <p:sp>
+        <p:nvSpPr>
+          <p:cNvPr id="8" name="Rectangle 7"/>
           <p:cNvSpPr/>
           <p:nvPr/>
         </p:nvSpPr>
         <p:spPr>
           <a:xfrm>
-            <a:off x="6217920" y="1719072"/>
-            <a:ext cx="73152" cy="4425696"/>
+            <a:off x="6309360" y="1536192"/>
+            <a:ext cx="73152" cy="4608576"/>
           </a:xfrm>
           <a:prstGeom prst="rect">
             <a:avLst/>
@@ -10245,96 +9723,6 @@
           <a:lstStyle/>
           <a:p>
             <a:pPr algn="ctr"/>
-          </a:p>
-        </p:txBody>
-      </p:sp>
-      <p:sp>
-        <p:nvSpPr>
-          <p:cNvPr id="10" name="TextBox 9"/>
-          <p:cNvSpPr txBox="1"/>
-          <p:nvPr/>
-        </p:nvSpPr>
-        <p:spPr>
-          <a:xfrm>
-            <a:off x="6400800" y="1828800"/>
-            <a:ext cx="4846320" cy="4114800"/>
-          </a:xfrm>
-          <a:prstGeom prst="rect">
-            <a:avLst/>
-          </a:prstGeom>
-          <a:noFill/>
-        </p:spPr>
-        <p:txBody>
-          <a:bodyPr wrap="square">
-            <a:spAutoFit/>
-          </a:bodyPr>
-          <a:lstStyle/>
-          <a:p>
-            <a:pPr>
-              <a:defRPr sz="1100" b="1">
-                <a:solidFill>
-                  <a:srgbClr val="C8102E"/>
-                </a:solidFill>
-                <a:latin typeface="Segoe UI"/>
-              </a:defRPr>
-            </a:pPr>
-            <a:r>
-              <a:t>EL PROBLEMA QUE JUSTIFICA ESTE PROYECTO</a:t>
-            </a:r>
-          </a:p>
-          <a:p>
-            <a:pPr>
-              <a:spcBef>
-                <a:spcPts val="400"/>
-              </a:spcBef>
-              <a:defRPr sz="1500" b="1">
-                <a:solidFill>
-                  <a:srgbClr val="0F172A"/>
-                </a:solidFill>
-                <a:latin typeface="Segoe UI"/>
-              </a:defRPr>
-            </a:pPr>
-            <a:r>
-              <a:t>Los Municipios que Más Crecen son los que Menos Capacidad Tienen</a:t>
-            </a:r>
-          </a:p>
-          <a:p>
-            <a:pPr>
-              <a:spcBef>
-                <a:spcPts val="600"/>
-              </a:spcBef>
-              <a:defRPr sz="1100">
-                <a:solidFill>
-                  <a:srgbClr val="334155"/>
-                </a:solidFill>
-                <a:latin typeface="Segoe UI"/>
-              </a:defRPr>
-            </a:pPr>
-            <a:r>
-              <a:t>• Villa del Prado:</a:t>
-            </a:r>
-            <a:br/>
-            <a:r>
-              <a:t>Creció un +16,2% entre 2020 y 2025, pero su capacidad es BAJA (ICA 36,9). Su centro de salud y consultorios están sobrecargados.</a:t>
-            </a:r>
-            <a:br/>
-            <a:br/>
-            <a:r>
-              <a:t>• Navalcarnero:</a:t>
-            </a:r>
-            <a:br/>
-            <a:r>
-              <a:t>Creció un +11,2% (31.979 habitantes), pero su capacidad es BAJA (ICA 24,5, Alerta Roja) con 1.667 hab/médico y aulas al 95,2%.</a:t>
-            </a:r>
-            <a:br/>
-            <a:br/>
-            <a:r>
-              <a:t>• Conclusión Institucional:</a:t>
-            </a:r>
-            <a:br/>
-            <a:r>
-              <a:t>Si la Comunidad de Madrid no interviene, la inercia demográfica continuará llenando municipios que ya están saturados. MadridNext es la herramienta para reorientar ese flujo hacia donde hay capacidad real.</a:t>
-            </a:r>
           </a:p>
         </p:txBody>
       </p:sp>
@@ -10430,7 +9818,7 @@
               </a:defRPr>
             </a:pPr>
             <a:r>
-              <a:t>8. DIAGNÓSTICO Y CONTROL</a:t>
+              <a:t>8  ·  DIAGNÓSTICO Y CONTROL</a:t>
             </a:r>
           </a:p>
         </p:txBody>
@@ -10466,7 +9854,7 @@
               </a:defRPr>
             </a:pPr>
             <a:r>
-              <a:t>El Semáforo ICA y la Alerta No Compensatoria</a:t>
+              <a:t>El semáforo ICA y la alerta no compensatoria</a:t>
             </a:r>
           </a:p>
           <a:p>
@@ -10482,7 +9870,7 @@
               </a:defRPr>
             </a:pPr>
             <a:r>
-              <a:t>Umbrales normativos de capacidad e interrupción automática de encaje</a:t>
+              <a:t>Umbrales de capacidad e interrupción automática del encaje</a:t>
             </a:r>
           </a:p>
         </p:txBody>
@@ -10495,8 +9883,8 @@
         </p:nvSpPr>
         <p:spPr>
           <a:xfrm>
-            <a:off x="731520" y="1645920"/>
-            <a:ext cx="3291840" cy="2103120"/>
+            <a:off x="731520" y="1463040"/>
+            <a:ext cx="3337560" cy="2286000"/>
           </a:xfrm>
           <a:prstGeom prst="roundRect">
             <a:avLst/>
@@ -10525,10 +9913,52 @@
           </a:fontRef>
         </p:style>
         <p:txBody>
-          <a:bodyPr rtlCol="0" anchor="ctr"/>
-          <a:lstStyle/>
-          <a:p>
-            <a:pPr algn="ctr"/>
+          <a:bodyPr rtlCol="0" anchor="ctr" wrap="square"/>
+          <a:lstStyle/>
+          <a:p>
+            <a:pPr algn="ctr">
+              <a:defRPr sz="1400" b="1">
+                <a:solidFill>
+                  <a:srgbClr val="166534"/>
+                </a:solidFill>
+                <a:latin typeface="Segoe UI"/>
+              </a:defRPr>
+            </a:pPr>
+            <a:r>
+              <a:t>ALTA (≥ 60)</a:t>
+            </a:r>
+          </a:p>
+          <a:p>
+            <a:pPr>
+              <a:spcBef>
+                <a:spcPts val="200"/>
+              </a:spcBef>
+              <a:defRPr sz="1100" b="1">
+                <a:solidFill>
+                  <a:srgbClr val="1E293B"/>
+                </a:solidFill>
+                <a:latin typeface="Segoe UI"/>
+              </a:defRPr>
+            </a:pPr>
+            <a:r>
+              <a:t>Mucho margen de acogida</a:t>
+            </a:r>
+          </a:p>
+          <a:p>
+            <a:pPr>
+              <a:spcBef>
+                <a:spcPts val="400"/>
+              </a:spcBef>
+              <a:defRPr sz="950">
+                <a:solidFill>
+                  <a:srgbClr val="334155"/>
+                </a:solidFill>
+                <a:latin typeface="Segoe UI"/>
+              </a:defRPr>
+            </a:pPr>
+            <a:r>
+              <a:t>Absorbe población de inmediato sin comprometer colegios ni consultorios. Ejemplos: Robledo de Chavela (66,7) y Buitrago del Lozoya (62,5).</a:t>
+            </a:r>
           </a:p>
         </p:txBody>
       </p:sp>
@@ -10540,8 +9970,8 @@
         </p:nvSpPr>
         <p:spPr>
           <a:xfrm>
-            <a:off x="731520" y="1719072"/>
-            <a:ext cx="73152" cy="1956815"/>
+            <a:off x="731520" y="1536192"/>
+            <a:ext cx="73152" cy="2139696"/>
           </a:xfrm>
           <a:prstGeom prst="rect">
             <a:avLst/>
@@ -10577,79 +10007,14 @@
       </p:sp>
       <p:sp>
         <p:nvSpPr>
-          <p:cNvPr id="7" name="TextBox 6"/>
-          <p:cNvSpPr txBox="1"/>
-          <p:nvPr/>
-        </p:nvSpPr>
-        <p:spPr>
-          <a:xfrm>
-            <a:off x="914400" y="1737360"/>
-            <a:ext cx="2926080" cy="1920240"/>
-          </a:xfrm>
-          <a:prstGeom prst="rect">
-            <a:avLst/>
-          </a:prstGeom>
-          <a:noFill/>
-        </p:spPr>
-        <p:txBody>
-          <a:bodyPr wrap="square">
-            <a:spAutoFit/>
-          </a:bodyPr>
-          <a:lstStyle/>
-          <a:p>
-            <a:pPr>
-              <a:defRPr sz="1300" b="1">
-                <a:solidFill>
-                  <a:srgbClr val="166534"/>
-                </a:solidFill>
-                <a:latin typeface="Segoe UI"/>
-              </a:defRPr>
-            </a:pPr>
-            <a:r>
-              <a:t>ALTA (ICA ≥ 60)</a:t>
-            </a:r>
-          </a:p>
-          <a:p>
-            <a:pPr>
-              <a:defRPr sz="1100" b="1">
-                <a:solidFill>
-                  <a:srgbClr val="1E293B"/>
-                </a:solidFill>
-                <a:latin typeface="Segoe UI"/>
-              </a:defRPr>
-            </a:pPr>
-            <a:r>
-              <a:t>Mucho Margen de Acogida</a:t>
-            </a:r>
-          </a:p>
-          <a:p>
-            <a:pPr>
-              <a:spcBef>
-                <a:spcPts val="200"/>
-              </a:spcBef>
-              <a:defRPr sz="1000">
-                <a:solidFill>
-                  <a:srgbClr val="334155"/>
-                </a:solidFill>
-                <a:latin typeface="Segoe UI"/>
-              </a:defRPr>
-            </a:pPr>
-            <a:r>
-              <a:t>Municipios con capacidad para absorber población de forma inmediata sin comprometer colegios ni consultorios (ej. Robledo 66,7 | Buitrago 62,5).</a:t>
-            </a:r>
-          </a:p>
-        </p:txBody>
-      </p:sp>
-      <p:sp>
-        <p:nvSpPr>
-          <p:cNvPr id="8" name="Rounded Rectangle 7"/>
+          <p:cNvPr id="7" name="Rounded Rectangle 6"/>
           <p:cNvSpPr/>
           <p:nvPr/>
         </p:nvSpPr>
         <p:spPr>
           <a:xfrm>
-            <a:off x="4389120" y="1645920"/>
-            <a:ext cx="3291840" cy="2103120"/>
+            <a:off x="4270248" y="1463040"/>
+            <a:ext cx="3337560" cy="2286000"/>
           </a:xfrm>
           <a:prstGeom prst="roundRect">
             <a:avLst/>
@@ -10678,23 +10043,65 @@
           </a:fontRef>
         </p:style>
         <p:txBody>
-          <a:bodyPr rtlCol="0" anchor="ctr"/>
-          <a:lstStyle/>
-          <a:p>
-            <a:pPr algn="ctr"/>
-          </a:p>
-        </p:txBody>
-      </p:sp>
-      <p:sp>
-        <p:nvSpPr>
-          <p:cNvPr id="9" name="Rectangle 8"/>
+          <a:bodyPr rtlCol="0" anchor="ctr" wrap="square"/>
+          <a:lstStyle/>
+          <a:p>
+            <a:pPr algn="ctr">
+              <a:defRPr sz="1400" b="1">
+                <a:solidFill>
+                  <a:srgbClr val="B45309"/>
+                </a:solidFill>
+                <a:latin typeface="Segoe UI"/>
+              </a:defRPr>
+            </a:pPr>
+            <a:r>
+              <a:t>MEDIA (40–59)</a:t>
+            </a:r>
+          </a:p>
+          <a:p>
+            <a:pPr>
+              <a:spcBef>
+                <a:spcPts val="200"/>
+              </a:spcBef>
+              <a:defRPr sz="1100" b="1">
+                <a:solidFill>
+                  <a:srgbClr val="1E293B"/>
+                </a:solidFill>
+                <a:latin typeface="Segoe UI"/>
+              </a:defRPr>
+            </a:pPr>
+            <a:r>
+              <a:t>Margen justo, condicionado</a:t>
+            </a:r>
+          </a:p>
+          <a:p>
+            <a:pPr>
+              <a:spcBef>
+                <a:spcPts val="400"/>
+              </a:spcBef>
+              <a:defRPr sz="950">
+                <a:solidFill>
+                  <a:srgbClr val="334155"/>
+                </a:solidFill>
+                <a:latin typeface="Segoe UI"/>
+              </a:defRPr>
+            </a:pPr>
+            <a:r>
+              <a:t>Admite nuevos vecinos siempre que se acompañe de inversiones puntuales en refuerzo dotacional. Absorbe crecimiento con planificación.</a:t>
+            </a:r>
+          </a:p>
+        </p:txBody>
+      </p:sp>
+      <p:sp>
+        <p:nvSpPr>
+          <p:cNvPr id="8" name="Rectangle 7"/>
           <p:cNvSpPr/>
           <p:nvPr/>
         </p:nvSpPr>
         <p:spPr>
           <a:xfrm>
-            <a:off x="4389120" y="1719072"/>
-            <a:ext cx="73152" cy="1956815"/>
+            <a:off x="4270248" y="1536192"/>
+            <a:ext cx="73152" cy="2139696"/>
           </a:xfrm>
           <a:prstGeom prst="rect">
             <a:avLst/>
@@ -10730,79 +10137,14 @@
       </p:sp>
       <p:sp>
         <p:nvSpPr>
-          <p:cNvPr id="10" name="TextBox 9"/>
-          <p:cNvSpPr txBox="1"/>
-          <p:nvPr/>
-        </p:nvSpPr>
-        <p:spPr>
-          <a:xfrm>
-            <a:off x="4572000" y="1737360"/>
-            <a:ext cx="2926080" cy="1920240"/>
-          </a:xfrm>
-          <a:prstGeom prst="rect">
-            <a:avLst/>
-          </a:prstGeom>
-          <a:noFill/>
-        </p:spPr>
-        <p:txBody>
-          <a:bodyPr wrap="square">
-            <a:spAutoFit/>
-          </a:bodyPr>
-          <a:lstStyle/>
-          <a:p>
-            <a:pPr>
-              <a:defRPr sz="1300" b="1">
-                <a:solidFill>
-                  <a:srgbClr val="B45309"/>
-                </a:solidFill>
-                <a:latin typeface="Segoe UI"/>
-              </a:defRPr>
-            </a:pPr>
-            <a:r>
-              <a:t>MEDIA (ICA 40–59)</a:t>
-            </a:r>
-          </a:p>
-          <a:p>
-            <a:pPr>
-              <a:defRPr sz="1100" b="1">
-                <a:solidFill>
-                  <a:srgbClr val="1E293B"/>
-                </a:solidFill>
-                <a:latin typeface="Segoe UI"/>
-              </a:defRPr>
-            </a:pPr>
-            <a:r>
-              <a:t>Margen Justo / Condicionado</a:t>
-            </a:r>
-          </a:p>
-          <a:p>
-            <a:pPr>
-              <a:spcBef>
-                <a:spcPts val="200"/>
-              </a:spcBef>
-              <a:defRPr sz="1000">
-                <a:solidFill>
-                  <a:srgbClr val="334155"/>
-                </a:solidFill>
-                <a:latin typeface="Segoe UI"/>
-              </a:defRPr>
-            </a:pPr>
-            <a:r>
-              <a:t>Municipios que pueden absorber nueva población siempre que se acompañe de inversiones puntuales en refuerzo de servicios.</a:t>
-            </a:r>
-          </a:p>
-        </p:txBody>
-      </p:sp>
-      <p:sp>
-        <p:nvSpPr>
-          <p:cNvPr id="11" name="Rounded Rectangle 10"/>
+          <p:cNvPr id="9" name="Rounded Rectangle 8"/>
           <p:cNvSpPr/>
           <p:nvPr/>
         </p:nvSpPr>
         <p:spPr>
           <a:xfrm>
-            <a:off x="8046720" y="1645920"/>
-            <a:ext cx="3291840" cy="2103120"/>
+            <a:off x="7808976" y="1463040"/>
+            <a:ext cx="3337560" cy="2286000"/>
           </a:xfrm>
           <a:prstGeom prst="roundRect">
             <a:avLst/>
@@ -10831,23 +10173,65 @@
           </a:fontRef>
         </p:style>
         <p:txBody>
-          <a:bodyPr rtlCol="0" anchor="ctr"/>
-          <a:lstStyle/>
-          <a:p>
-            <a:pPr algn="ctr"/>
-          </a:p>
-        </p:txBody>
-      </p:sp>
-      <p:sp>
-        <p:nvSpPr>
-          <p:cNvPr id="12" name="Rectangle 11"/>
+          <a:bodyPr rtlCol="0" anchor="ctr" wrap="square"/>
+          <a:lstStyle/>
+          <a:p>
+            <a:pPr algn="ctr">
+              <a:defRPr sz="1400" b="1">
+                <a:solidFill>
+                  <a:srgbClr val="C8102E"/>
+                </a:solidFill>
+                <a:latin typeface="Segoe UI"/>
+              </a:defRPr>
+            </a:pPr>
+            <a:r>
+              <a:t>BAJA (&lt; 40)</a:t>
+            </a:r>
+          </a:p>
+          <a:p>
+            <a:pPr>
+              <a:spcBef>
+                <a:spcPts val="200"/>
+              </a:spcBef>
+              <a:defRPr sz="1100" b="1">
+                <a:solidFill>
+                  <a:srgbClr val="1E293B"/>
+                </a:solidFill>
+                <a:latin typeface="Segoe UI"/>
+              </a:defRPr>
+            </a:pPr>
+            <a:r>
+              <a:t>Sin margen: saturación</a:t>
+            </a:r>
+          </a:p>
+          <a:p>
+            <a:pPr>
+              <a:spcBef>
+                <a:spcPts val="400"/>
+              </a:spcBef>
+              <a:defRPr sz="950">
+                <a:solidFill>
+                  <a:srgbClr val="334155"/>
+                </a:solidFill>
+                <a:latin typeface="Segoe UI"/>
+              </a:defRPr>
+            </a:pPr>
+            <a:r>
+              <a:t>Servicios esenciales en situación crítica: la llegada de más vecinos provoca el colapso dotacional y la degradación asistencial inmediata.</a:t>
+            </a:r>
+          </a:p>
+        </p:txBody>
+      </p:sp>
+      <p:sp>
+        <p:nvSpPr>
+          <p:cNvPr id="10" name="Rectangle 9"/>
           <p:cNvSpPr/>
           <p:nvPr/>
         </p:nvSpPr>
         <p:spPr>
           <a:xfrm>
-            <a:off x="8046720" y="1719072"/>
-            <a:ext cx="73152" cy="1956815"/>
+            <a:off x="7808976" y="1536192"/>
+            <a:ext cx="73152" cy="2139696"/>
           </a:xfrm>
           <a:prstGeom prst="rect">
             <a:avLst/>
@@ -10883,79 +10267,14 @@
       </p:sp>
       <p:sp>
         <p:nvSpPr>
-          <p:cNvPr id="13" name="TextBox 12"/>
-          <p:cNvSpPr txBox="1"/>
-          <p:nvPr/>
-        </p:nvSpPr>
-        <p:spPr>
-          <a:xfrm>
-            <a:off x="8229600" y="1737360"/>
-            <a:ext cx="2926080" cy="1920240"/>
-          </a:xfrm>
-          <a:prstGeom prst="rect">
-            <a:avLst/>
-          </a:prstGeom>
-          <a:noFill/>
-        </p:spPr>
-        <p:txBody>
-          <a:bodyPr wrap="square">
-            <a:spAutoFit/>
-          </a:bodyPr>
-          <a:lstStyle/>
-          <a:p>
-            <a:pPr>
-              <a:defRPr sz="1300" b="1">
-                <a:solidFill>
-                  <a:srgbClr val="C8102E"/>
-                </a:solidFill>
-                <a:latin typeface="Segoe UI"/>
-              </a:defRPr>
-            </a:pPr>
-            <a:r>
-              <a:t>BAJA (ICA &lt; 40)</a:t>
-            </a:r>
-          </a:p>
-          <a:p>
-            <a:pPr>
-              <a:defRPr sz="1100" b="1">
-                <a:solidFill>
-                  <a:srgbClr val="1E293B"/>
-                </a:solidFill>
-                <a:latin typeface="Segoe UI"/>
-              </a:defRPr>
-            </a:pPr>
-            <a:r>
-              <a:t>Sin Margen / Saturación</a:t>
-            </a:r>
-          </a:p>
-          <a:p>
-            <a:pPr>
-              <a:spcBef>
-                <a:spcPts val="200"/>
-              </a:spcBef>
-              <a:defRPr sz="1000">
-                <a:solidFill>
-                  <a:srgbClr val="334155"/>
-                </a:solidFill>
-                <a:latin typeface="Segoe UI"/>
-              </a:defRPr>
-            </a:pPr>
-            <a:r>
-              <a:t>Municipios con servicios esenciales en situación crítica. La llegada de nuevos vecinos provoca el colapso dotacional.</a:t>
-            </a:r>
-          </a:p>
-        </p:txBody>
-      </p:sp>
-      <p:sp>
-        <p:nvSpPr>
-          <p:cNvPr id="14" name="Rounded Rectangle 13"/>
+          <p:cNvPr id="11" name="Rounded Rectangle 10"/>
           <p:cNvSpPr/>
           <p:nvPr/>
         </p:nvSpPr>
         <p:spPr>
           <a:xfrm>
-            <a:off x="731520" y="3931920"/>
-            <a:ext cx="10728655" cy="2286000"/>
+            <a:off x="731520" y="3977639"/>
+            <a:ext cx="10728655" cy="2240280"/>
           </a:xfrm>
           <a:prstGeom prst="roundRect">
             <a:avLst/>
@@ -10984,23 +10303,57 @@
           </a:fontRef>
         </p:style>
         <p:txBody>
-          <a:bodyPr rtlCol="0" anchor="ctr"/>
-          <a:lstStyle/>
-          <a:p>
-            <a:pPr algn="ctr"/>
-          </a:p>
-        </p:txBody>
-      </p:sp>
-      <p:sp>
-        <p:nvSpPr>
-          <p:cNvPr id="15" name="Rectangle 14"/>
+          <a:bodyPr rtlCol="0" anchor="ctr" wrap="square"/>
+          <a:lstStyle/>
+          <a:p>
+            <a:pPr algn="ctr">
+              <a:defRPr sz="1200" b="1">
+                <a:solidFill>
+                  <a:srgbClr val="C8102E"/>
+                </a:solidFill>
+                <a:latin typeface="Segoe UI"/>
+              </a:defRPr>
+            </a:pPr>
+            <a:r>
+              <a:t>ALERTA S  ·  REGLA NO COMPENSATORIA (COLAPSO CRÍTICO)</a:t>
+            </a:r>
+          </a:p>
+          <a:p>
+            <a:pPr>
+              <a:spcBef>
+                <a:spcPts val="600"/>
+              </a:spcBef>
+              <a:defRPr sz="1050">
+                <a:solidFill>
+                  <a:srgbClr val="334155"/>
+                </a:solidFill>
+                <a:latin typeface="Segoe UI"/>
+              </a:defRPr>
+            </a:pPr>
+            <a:r>
+              <a:t>• Disparador automático: Se activa 'S' con más de 1.500 hab/médico o una ocupación escolar superior al 95%.</a:t>
+            </a:r>
+            <a:br/>
+            <a:r>
+              <a:t>• Truncamiento forzado: El ICA total se trunca por debajo de 40 puntos y el encaje máximo para cualquier ciudadano queda topado en 39, aunque la vivienda sea barata o sobren zonas verdes.</a:t>
+            </a:r>
+            <a:br/>
+            <a:r>
+              <a:t>• Caso verificado: Cercedilla presenta una puntuación teórica de 34,61 y queda clasificada con Alerta S, advirtiendo a las familias de que su red asistencial no admite más presión.</a:t>
+            </a:r>
+          </a:p>
+        </p:txBody>
+      </p:sp>
+      <p:sp>
+        <p:nvSpPr>
+          <p:cNvPr id="12" name="Rectangle 11"/>
           <p:cNvSpPr/>
           <p:nvPr/>
         </p:nvSpPr>
         <p:spPr>
           <a:xfrm>
-            <a:off x="731520" y="4005072"/>
-            <a:ext cx="73152" cy="2139696"/>
+            <a:off x="731520" y="4050791"/>
+            <a:ext cx="73152" cy="2093976"/>
           </a:xfrm>
           <a:prstGeom prst="rect">
             <a:avLst/>
@@ -11031,82 +10384,6 @@
           <a:lstStyle/>
           <a:p>
             <a:pPr algn="ctr"/>
-          </a:p>
-        </p:txBody>
-      </p:sp>
-      <p:sp>
-        <p:nvSpPr>
-          <p:cNvPr id="16" name="TextBox 15"/>
-          <p:cNvSpPr txBox="1"/>
-          <p:nvPr/>
-        </p:nvSpPr>
-        <p:spPr>
-          <a:xfrm>
-            <a:off x="914400" y="4023360"/>
-            <a:ext cx="10332720" cy="2103120"/>
-          </a:xfrm>
-          <a:prstGeom prst="rect">
-            <a:avLst/>
-          </a:prstGeom>
-          <a:noFill/>
-        </p:spPr>
-        <p:txBody>
-          <a:bodyPr wrap="square">
-            <a:spAutoFit/>
-          </a:bodyPr>
-          <a:lstStyle/>
-          <a:p>
-            <a:pPr>
-              <a:defRPr sz="1100" b="1">
-                <a:solidFill>
-                  <a:srgbClr val="C8102E"/>
-                </a:solidFill>
-                <a:latin typeface="Segoe UI"/>
-              </a:defRPr>
-            </a:pPr>
-            <a:r>
-              <a:t>MECANISMO DE CONTROL: ALERTA NO COMPENSATORIA (ALERTA S)</a:t>
-            </a:r>
-          </a:p>
-          <a:p>
-            <a:pPr>
-              <a:spcBef>
-                <a:spcPts val="200"/>
-              </a:spcBef>
-              <a:defRPr sz="1200" b="1">
-                <a:solidFill>
-                  <a:srgbClr val="1E293B"/>
-                </a:solidFill>
-                <a:latin typeface="Segoe UI"/>
-              </a:defRPr>
-            </a:pPr>
-            <a:r>
-              <a:t>Activación Automática: Se marca 'S' cuando hab/médico &gt; 1.500 o la ocupación escolar supera el 95%.</a:t>
-            </a:r>
-          </a:p>
-          <a:p>
-            <a:pPr>
-              <a:spcBef>
-                <a:spcPts val="400"/>
-              </a:spcBef>
-              <a:defRPr sz="1050">
-                <a:solidFill>
-                  <a:srgbClr val="334155"/>
-                </a:solidFill>
-                <a:latin typeface="Segoe UI"/>
-              </a:defRPr>
-            </a:pPr>
-            <a:r>
-              <a:t>• Efecto 1: La capacidad total se trunca por debajo de 40 puntos (nivel BAJA), independientemente de que la vivienda sea económica o existan amplias zonas verdes.</a:t>
-            </a:r>
-            <a:br/>
-            <a:r>
-              <a:t>• Efecto 2: El encaje máximo para cualquier ciudadano queda topado en 39 puntos.</a:t>
-            </a:r>
-            <a:br/>
-            <a:r>
-              <a:t>• Ejemplo Documentado: Cercedilla presenta una puntuación teórica de 34,61 y queda clasificado con Alerta S, advirtiendo a las familias de que la red asistencial no admite mayor presión.</a:t>
-            </a:r>
           </a:p>
         </p:txBody>
       </p:sp>
